--- a/docs/slides/story_20260706.pptx
+++ b/docs/slides/story_20260706.pptx
@@ -33,6 +33,7 @@
     <p:sldId id="281" r:id="rId32"/>
     <p:sldId id="282" r:id="rId33"/>
     <p:sldId id="283" r:id="rId34"/>
+    <p:sldId id="284" r:id="rId35"/>
   </p:sldIdLst>
   <p:sldSz cx="12191695" cy="6858000" type="screen4x3"/>
   <p:notesSz cx="6858000" cy="9144000"/>
@@ -6293,109 +6294,35 @@
                   <a:srgbClr val="0F172A"/>
                 </a:solidFill>
               </a:rPr>
-              <a:t>Naches groundwater (PFLOTRAN) — interpretation</a:t>
+              <a:t>Naches groundwater (PFLOTRAN) — driver → response relations (controls: water table + soil)</a:t>
             </a:r>
           </a:p>
         </p:txBody>
       </p:sp>
-      <p:sp>
-        <p:nvSpPr>
-          <p:cNvPr id="3" name="TextBox 2"/>
-          <p:cNvSpPr txBox="1"/>
+      <p:pic>
+        <p:nvPicPr>
+          <p:cNvPr id="3" name="Picture 2" descr="pflotran_relations.png"/>
+          <p:cNvPicPr>
+            <a:picLocks noChangeAspect="1"/>
+          </p:cNvPicPr>
           <p:nvPr/>
-        </p:nvSpPr>
+        </p:nvPicPr>
+        <p:blipFill>
+          <a:blip r:embed="rId2"/>
+          <a:stretch>
+            <a:fillRect/>
+          </a:stretch>
+        </p:blipFill>
         <p:spPr>
           <a:xfrm>
-            <a:off x="548640" y="1280160"/>
-            <a:ext cx="11094415" cy="5120640"/>
+            <a:off x="914400" y="1234440"/>
+            <a:ext cx="10332720" cy="6556412"/>
           </a:xfrm>
           <a:prstGeom prst="rect">
             <a:avLst/>
           </a:prstGeom>
-          <a:noFill/>
         </p:spPr>
-        <p:txBody>
-          <a:bodyPr wrap="square">
-            <a:spAutoFit/>
-          </a:bodyPr>
-          <a:lstStyle/>
-          <a:p>
-            <a:pPr>
-              <a:spcAft>
-                <a:spcPts val="600"/>
-              </a:spcAft>
-            </a:pPr>
-            <a:r>
-              <a:rPr sz="1400" b="0">
-                <a:solidFill>
-                  <a:srgbClr val="0F172A"/>
-                </a:solidFill>
-              </a:rPr>
-              <a:t>•  Uniform steady recharge (30/100/300 mm/yr) on all 20 columns — every difference below is subsurface structure, not climate.</a:t>
-            </a:r>
-          </a:p>
-          <a:p>
-            <a:pPr>
-              <a:spcAft>
-                <a:spcPts val="600"/>
-              </a:spcAft>
-            </a:pPr>
-            <a:r>
-              <a:rPr sz="1400" b="0">
-                <a:solidFill>
-                  <a:srgbClr val="0F172A"/>
-                </a:solidFill>
-              </a:rPr>
-              <a:t>•  Vadose-zone wetness spans 0.32–0.97 at the same forcing — soil layering and water-table depth set the baseline, not recharge.</a:t>
-            </a:r>
-          </a:p>
-          <a:p>
-            <a:pPr>
-              <a:spcAft>
-                <a:spcPts val="600"/>
-              </a:spcAft>
-            </a:pPr>
-            <a:r>
-              <a:rPr sz="1400" b="0">
-                <a:solidFill>
-                  <a:srgbClr val="0F172A"/>
-                </a:solidFill>
-              </a:rPr>
-              <a:t>•  Most climate-sensitive: col_01 (Δsat +0.22, Fan WTD 61.5 m); least: col_09 (Δsat +0.00, Fan WTD 0.2 m) — deep unsaturated zones buffer recharge changes; shallow water tables pin the profile.</a:t>
-            </a:r>
-          </a:p>
-          <a:p>
-            <a:pPr>
-              <a:spcAft>
-                <a:spcPts val="600"/>
-              </a:spcAft>
-            </a:pPr>
-            <a:r>
-              <a:rPr sz="1400" b="0">
-                <a:solidFill>
-                  <a:srgbClr val="0F172A"/>
-                </a:solidFill>
-              </a:rPr>
-              <a:t>•  6 ridge columns keep their water table below the capped 50 m domain at every rate (Fan says 61–215 m there) — honestly flagged, not simulated.</a:t>
-            </a:r>
-          </a:p>
-          <a:p>
-            <a:pPr>
-              <a:spcAft>
-                <a:spcPts val="600"/>
-              </a:spcAft>
-            </a:pPr>
-            <a:r>
-              <a:rPr sz="1400" b="0">
-                <a:solidFill>
-                  <a:srgbClr val="0F172A"/>
-                </a:solidFill>
-              </a:rPr>
-              <a:t>•  Water tables are held by the bottom boundary (pinned at the Fan prior), so this sweep isolates the UNSATURATED-zone response; transient forcing and a free water table are the ELM-coupling phase.</a:t>
-            </a:r>
-          </a:p>
-        </p:txBody>
-      </p:sp>
+      </p:pic>
     </p:spTree>
   </p:cSld>
   <p:clrMapOvr>
@@ -6447,7 +6374,7 @@
                   <a:srgbClr val="0F172A"/>
                 </a:solidFill>
               </a:rPr>
-              <a:t>Cross-study synthesis</a:t>
+              <a:t>Naches groundwater (PFLOTRAN) — interpretation</a:t>
             </a:r>
           </a:p>
         </p:txBody>
@@ -6460,8 +6387,8 @@
         </p:nvSpPr>
         <p:spPr>
           <a:xfrm>
-            <a:off x="457200" y="868680"/>
-            <a:ext cx="11277295" cy="365760"/>
+            <a:off x="548640" y="1280160"/>
+            <a:ext cx="11094415" cy="5120640"/>
           </a:xfrm>
           <a:prstGeom prst="rect">
             <a:avLst/>
@@ -6480,297 +6407,14 @@
               </a:spcAft>
             </a:pPr>
             <a:r>
-              <a:rPr sz="1300" b="0">
+              <a:rPr sz="1400" b="0">
                 <a:solidFill>
-                  <a:srgbClr val="475569"/>
+                  <a:srgbClr val="0F172A"/>
                 </a:solidFill>
               </a:rPr>
-              <a:t>same framework, three experiments — the control on recharge/runoff partitioning depends on climate</a:t>
-            </a:r>
-          </a:p>
-        </p:txBody>
-      </p:sp>
-      <p:graphicFrame>
-        <p:nvGraphicFramePr>
-          <p:cNvPr id="4" name="Table 3"/>
-          <p:cNvGraphicFramePr>
-            <a:graphicFrameLocks noGrp="1"/>
-          </p:cNvGraphicFramePr>
-          <p:nvPr/>
-        </p:nvGraphicFramePr>
-        <p:xfrm>
-          <a:off x="457200" y="1463040"/>
-          <a:ext cx="11247120" cy="1371600"/>
-        </p:xfrm>
-        <a:graphic>
-          <a:graphicData uri="http://schemas.openxmlformats.org/drawingml/2006/table">
-            <a:tbl>
-              <a:tblPr firstRow="1" bandRow="1">
-                <a:tableStyleId>{5C22544A-7EE6-4342-B048-85BDC9FD1C3A}</a:tableStyleId>
-              </a:tblPr>
-              <a:tblGrid>
-                <a:gridCol w="2926080"/>
-                <a:gridCol w="1097280"/>
-                <a:gridCol w="1828800"/>
-                <a:gridCol w="2011680"/>
-                <a:gridCol w="3383280"/>
-              </a:tblGrid>
-              <a:tr h="457200">
-                <a:tc>
-                  <a:txBody>
-                    <a:bodyPr/>
-                    <a:lstStyle/>
-                    <a:p>
-                      <a:pPr>
-                        <a:defRPr sz="1300" b="1"/>
-                      </a:pPr>
-                      <a:r>
-                        <a:t>study</a:t>
-                      </a:r>
-                    </a:p>
-                  </a:txBody>
-                  <a:tcPr/>
-                </a:tc>
-                <a:tc>
-                  <a:txBody>
-                    <a:bodyPr/>
-                    <a:lstStyle/>
-                    <a:p>
-                      <a:pPr>
-                        <a:defRPr sz="1300" b="1"/>
-                      </a:pPr>
-                      <a:r>
-                        <a:t>columns</a:t>
-                      </a:r>
-                    </a:p>
-                  </a:txBody>
-                  <a:tcPr/>
-                </a:tc>
-                <a:tc>
-                  <a:txBody>
-                    <a:bodyPr/>
-                    <a:lstStyle/>
-                    <a:p>
-                      <a:pPr>
-                        <a:defRPr sz="1300" b="1"/>
-                      </a:pPr>
-                      <a:r>
-                        <a:t>forcing (mm/yr)</a:t>
-                      </a:r>
-                    </a:p>
-                  </a:txBody>
-                  <a:tcPr/>
-                </a:tc>
-                <a:tc>
-                  <a:txBody>
-                    <a:bodyPr/>
-                    <a:lstStyle/>
-                    <a:p>
-                      <a:pPr>
-                        <a:defRPr sz="1300" b="1"/>
-                      </a:pPr>
-                      <a:r>
-                        <a:t>recharge (mm/yr)</a:t>
-                      </a:r>
-                    </a:p>
-                  </a:txBody>
-                  <a:tcPr/>
-                </a:tc>
-                <a:tc>
-                  <a:txBody>
-                    <a:bodyPr/>
-                    <a:lstStyle/>
-                    <a:p>
-                      <a:pPr>
-                        <a:defRPr sz="1300" b="1"/>
-                      </a:pPr>
-                      <a:r>
-                        <a:t>strongest control</a:t>
-                      </a:r>
-                    </a:p>
-                  </a:txBody>
-                  <a:tcPr/>
-                </a:tc>
-              </a:tr>
-              <a:tr h="457200">
-                <a:tc>
-                  <a:txBody>
-                    <a:bodyPr/>
-                    <a:lstStyle/>
-                    <a:p>
-                      <a:pPr>
-                        <a:defRPr sz="1300" b="0"/>
-                      </a:pPr>
-                      <a:r>
-                        <a:t>Naches</a:t>
-                      </a:r>
-                    </a:p>
-                  </a:txBody>
-                  <a:tcPr/>
-                </a:tc>
-                <a:tc>
-                  <a:txBody>
-                    <a:bodyPr/>
-                    <a:lstStyle/>
-                    <a:p>
-                      <a:pPr>
-                        <a:defRPr sz="1300" b="0"/>
-                      </a:pPr>
-                      <a:r>
-                        <a:t>20</a:t>
-                      </a:r>
-                    </a:p>
-                  </a:txBody>
-                  <a:tcPr/>
-                </a:tc>
-                <a:tc>
-                  <a:txBody>
-                    <a:bodyPr/>
-                    <a:lstStyle/>
-                    <a:p>
-                      <a:pPr>
-                        <a:defRPr sz="1300" b="0"/>
-                      </a:pPr>
-                      <a:r>
-                        <a:t>459, 474, 509, 611, 619, 682, 699, 727, 735, 793, 941, 975, 1153, 1361, 1580</a:t>
-                      </a:r>
-                    </a:p>
-                  </a:txBody>
-                  <a:tcPr/>
-                </a:tc>
-                <a:tc>
-                  <a:txBody>
-                    <a:bodyPr/>
-                    <a:lstStyle/>
-                    <a:p>
-                      <a:pPr>
-                        <a:defRPr sz="1300" b="0"/>
-                      </a:pPr>
-                      <a:r>
-                        <a:t>-3.6 → 291.2</a:t>
-                      </a:r>
-                    </a:p>
-                  </a:txBody>
-                  <a:tcPr/>
-                </a:tc>
-                <a:tc>
-                  <a:txBody>
-                    <a:bodyPr/>
-                    <a:lstStyle/>
-                    <a:p>
-                      <a:pPr>
-                        <a:defRPr sz="1300" b="0"/>
-                      </a:pPr>
-                      <a:r>
-                        <a:t>—</a:t>
-                      </a:r>
-                    </a:p>
-                  </a:txBody>
-                  <a:tcPr/>
-                </a:tc>
-              </a:tr>
-              <a:tr h="457200">
-                <a:tc>
-                  <a:txBody>
-                    <a:bodyPr/>
-                    <a:lstStyle/>
-                    <a:p>
-                      <a:pPr>
-                        <a:defRPr sz="1300" b="0"/>
-                      </a:pPr>
-                      <a:r>
-                        <a:t>Naches — Fan warm start</a:t>
-                      </a:r>
-                    </a:p>
-                  </a:txBody>
-                  <a:tcPr/>
-                </a:tc>
-                <a:tc>
-                  <a:txBody>
-                    <a:bodyPr/>
-                    <a:lstStyle/>
-                    <a:p>
-                      <a:pPr>
-                        <a:defRPr sz="1300" b="0"/>
-                      </a:pPr>
-                      <a:r>
-                        <a:t>20</a:t>
-                      </a:r>
-                    </a:p>
-                  </a:txBody>
-                  <a:tcPr/>
-                </a:tc>
-                <a:tc>
-                  <a:txBody>
-                    <a:bodyPr/>
-                    <a:lstStyle/>
-                    <a:p>
-                      <a:pPr>
-                        <a:defRPr sz="1300" b="0"/>
-                      </a:pPr>
-                      <a:r>
-                        <a:t>459, 474, 509, 611, 619, 682, 699, 727, 735, 793, 941, 975, 1153, 1361, 1580</a:t>
-                      </a:r>
-                    </a:p>
-                  </a:txBody>
-                  <a:tcPr/>
-                </a:tc>
-                <a:tc>
-                  <a:txBody>
-                    <a:bodyPr/>
-                    <a:lstStyle/>
-                    <a:p>
-                      <a:pPr>
-                        <a:defRPr sz="1300" b="0"/>
-                      </a:pPr>
-                      <a:r>
-                        <a:t>-84.8 → 1298.8</a:t>
-                      </a:r>
-                    </a:p>
-                  </a:txBody>
-                  <a:tcPr/>
-                </a:tc>
-                <a:tc>
-                  <a:txBody>
-                    <a:bodyPr/>
-                    <a:lstStyle/>
-                    <a:p>
-                      <a:pPr>
-                        <a:defRPr sz="1300" b="0"/>
-                      </a:pPr>
-                      <a:r>
-                        <a:t>—</a:t>
-                      </a:r>
-                    </a:p>
-                  </a:txBody>
-                  <a:tcPr/>
-                </a:tc>
-              </a:tr>
-            </a:tbl>
-          </a:graphicData>
-        </a:graphic>
-      </p:graphicFrame>
-      <p:sp>
-        <p:nvSpPr>
-          <p:cNvPr id="5" name="TextBox 4"/>
-          <p:cNvSpPr txBox="1"/>
-          <p:nvPr/>
-        </p:nvSpPr>
-        <p:spPr>
-          <a:xfrm>
-            <a:off x="457200" y="3200400"/>
-            <a:ext cx="11277295" cy="2011680"/>
-          </a:xfrm>
-          <a:prstGeom prst="rect">
-            <a:avLst/>
-          </a:prstGeom>
-          <a:noFill/>
-        </p:spPr>
-        <p:txBody>
-          <a:bodyPr wrap="square">
-            <a:spAutoFit/>
-          </a:bodyPr>
-          <a:lstStyle/>
+              <a:t>•  Uniform steady recharge (30/100/300 mm/yr) on all 20 columns — every difference below is subsurface structure, not climate.</a:t>
+            </a:r>
+          </a:p>
           <a:p>
             <a:pPr>
               <a:spcAft>
@@ -6778,20 +6422,12 @@
               </a:spcAft>
             </a:pPr>
             <a:r>
-              <a:rPr b="1" sz="1400">
-                <a:solidFill>
-                  <a:srgbClr val="2C7FB8"/>
-                </a:solidFill>
-              </a:rPr>
-              <a:t>wet basin:  </a:t>
-            </a:r>
-            <a:r>
-              <a:rPr sz="1400">
+              <a:rPr sz="1400" b="0">
                 <a:solidFill>
                   <a:srgbClr val="0F172A"/>
                 </a:solidFill>
               </a:rPr>
-              <a:t>recharge is CLAY-limited — water is ample; the impeding layer decides</a:t>
+              <a:t>•  Vadose-zone wetness spans 0.32–0.97 at the same forcing — soil layering and water-table depth set the baseline, not recharge.</a:t>
             </a:r>
           </a:p>
           <a:p>
@@ -6801,20 +6437,12 @@
               </a:spcAft>
             </a:pPr>
             <a:r>
-              <a:rPr b="1" sz="1400">
-                <a:solidFill>
-                  <a:srgbClr val="2C7FB8"/>
-                </a:solidFill>
-              </a:rPr>
-              <a:t>dry basin:  </a:t>
-            </a:r>
-            <a:r>
-              <a:rPr sz="1400">
+              <a:rPr sz="1400" b="0">
                 <a:solidFill>
                   <a:srgbClr val="0F172A"/>
                 </a:solidFill>
               </a:rPr>
-              <a:t>recharge is Ksat-limited (threshold) — only the most permeable soil recharges</a:t>
+              <a:t>•  Most climate-sensitive: col_01 (Δsat +0.22, Fan WTD 61.5 m); least: col_09 (Δsat +0.00, Fan WTD 0.2 m) — deep unsaturated zones buffer recharge changes; shallow water tables pin the profile.</a:t>
             </a:r>
           </a:p>
           <a:p>
@@ -6824,20 +6452,42 @@
               </a:spcAft>
             </a:pPr>
             <a:r>
-              <a:rPr b="1" sz="1400">
-                <a:solidFill>
-                  <a:srgbClr val="2C7FB8"/>
-                </a:solidFill>
-              </a:rPr>
-              <a:t>controlled sweep:  </a:t>
-            </a:r>
-            <a:r>
-              <a:rPr sz="1400">
+              <a:rPr sz="1400" b="0">
                 <a:solidFill>
                   <a:srgbClr val="0F172A"/>
                 </a:solidFill>
               </a:rPr>
-              <a:t>confirms causality: clay 5→55% collapses recharge 755→9 mm/yr with everything else fixed</a:t>
+              <a:t>•  6 ridge columns keep their water table below the capped 50 m domain at every rate (Fan says 61–215 m there) — honestly flagged, not simulated.</a:t>
+            </a:r>
+          </a:p>
+          <a:p>
+            <a:pPr>
+              <a:spcAft>
+                <a:spcPts val="600"/>
+              </a:spcAft>
+            </a:pPr>
+            <a:r>
+              <a:rPr sz="1400" b="0">
+                <a:solidFill>
+                  <a:srgbClr val="0F172A"/>
+                </a:solidFill>
+              </a:rPr>
+              <a:t>•  Water tables are held by the bottom boundary (pinned at the Fan prior), so this sweep isolates the UNSATURATED-zone response; transient forcing and a free water table are the ELM-coupling phase.</a:t>
+            </a:r>
+          </a:p>
+          <a:p>
+            <a:pPr>
+              <a:spcAft>
+                <a:spcPts val="600"/>
+              </a:spcAft>
+            </a:pPr>
+            <a:r>
+              <a:rPr sz="1400" b="0">
+                <a:solidFill>
+                  <a:srgbClr val="0F172A"/>
+                </a:solidFill>
+              </a:rPr>
+              <a:t>•  Strongest controls (|r|≥0.5): Δsat (300−30) vs log10 Fan WTD (m) (r=+0.93) · vadose sat @100 mm/yr vs log10 Fan WTD (m) (r=-0.70) · surface sat @100 vs log10 Fan WTD (m) (r=-0.54) — elevation matters only where it proxies the water table (no orographic forcing exists in this design, unlike the ELM/NLDAS studies).</a:t>
             </a:r>
           </a:p>
         </p:txBody>
@@ -6893,7 +6543,7 @@
                   <a:srgbClr val="0F172A"/>
                 </a:solidFill>
               </a:rPr>
-              <a:t>Appendix A1 — Naches: columns &amp; results</a:t>
+              <a:t>Cross-study synthesis</a:t>
             </a:r>
           </a:p>
         </p:txBody>
@@ -6931,7 +6581,7 @@
                   <a:srgbClr val="475569"/>
                 </a:solidFill>
               </a:rPr>
-              <a:t>characteristics from the real data (SSURGO soil, Fan 2013 WTD, NLDAS-2 (0.125°, ~12 km) forcing) · results are annual means (mm/yr)</a:t>
+              <a:t>same framework, three experiments — the control on recharge/runoff partitioning depends on climate</a:t>
             </a:r>
           </a:p>
         </p:txBody>
@@ -6945,8 +6595,8 @@
           <p:nvPr/>
         </p:nvGraphicFramePr>
         <p:xfrm>
-          <a:off x="365760" y="1325880"/>
-          <a:ext cx="11460175" cy="8065008"/>
+          <a:off x="457200" y="1463040"/>
+          <a:ext cx="11247120" cy="1371600"/>
         </p:xfrm>
         <a:graphic>
           <a:graphicData uri="http://schemas.openxmlformats.org/drawingml/2006/table">
@@ -6955,223 +6605,157 @@
                 <a:tableStyleId>{5C22544A-7EE6-4342-B048-85BDC9FD1C3A}</a:tableStyleId>
               </a:tblPr>
               <a:tblGrid>
-                <a:gridCol w="1041834"/>
-                <a:gridCol w="1041834"/>
-                <a:gridCol w="1041834"/>
-                <a:gridCol w="1041834"/>
-                <a:gridCol w="1041834"/>
-                <a:gridCol w="1041834"/>
-                <a:gridCol w="1041834"/>
-                <a:gridCol w="1041834"/>
-                <a:gridCol w="1041834"/>
-                <a:gridCol w="1041834"/>
-                <a:gridCol w="1041835"/>
+                <a:gridCol w="2926080"/>
+                <a:gridCol w="1097280"/>
+                <a:gridCol w="1828800"/>
+                <a:gridCol w="2011680"/>
+                <a:gridCol w="3383280"/>
               </a:tblGrid>
-              <a:tr h="384048">
-                <a:tc>
-                  <a:txBody>
-                    <a:bodyPr/>
-                    <a:lstStyle/>
-                    <a:p>
-                      <a:pPr>
-                        <a:defRPr sz="1100" b="1"/>
-                      </a:pPr>
-                      <a:r>
-                        <a:t>column</a:t>
-                      </a:r>
-                    </a:p>
-                  </a:txBody>
-                  <a:tcPr/>
-                </a:tc>
-                <a:tc>
-                  <a:txBody>
-                    <a:bodyPr/>
-                    <a:lstStyle/>
-                    <a:p>
-                      <a:pPr>
-                        <a:defRPr sz="1100" b="1"/>
-                      </a:pPr>
-                      <a:r>
-                        <a:t>elev m</a:t>
-                      </a:r>
-                    </a:p>
-                  </a:txBody>
-                  <a:tcPr/>
-                </a:tc>
-                <a:tc>
-                  <a:txBody>
-                    <a:bodyPr/>
-                    <a:lstStyle/>
-                    <a:p>
-                      <a:pPr>
-                        <a:defRPr sz="1100" b="1"/>
-                      </a:pPr>
-                      <a:r>
-                        <a:t>top soil</a:t>
-                      </a:r>
-                    </a:p>
-                  </a:txBody>
-                  <a:tcPr/>
-                </a:tc>
-                <a:tc>
-                  <a:txBody>
-                    <a:bodyPr/>
-                    <a:lstStyle/>
-                    <a:p>
-                      <a:pPr>
-                        <a:defRPr sz="1100" b="1"/>
-                      </a:pPr>
-                      <a:r>
-                        <a:t>clay%</a:t>
-                      </a:r>
-                    </a:p>
-                  </a:txBody>
-                  <a:tcPr/>
-                </a:tc>
-                <a:tc>
-                  <a:txBody>
-                    <a:bodyPr/>
-                    <a:lstStyle/>
-                    <a:p>
-                      <a:pPr>
-                        <a:defRPr sz="1100" b="1"/>
-                      </a:pPr>
-                      <a:r>
-                        <a:t>Ksat µm/s</a:t>
-                      </a:r>
-                    </a:p>
-                  </a:txBody>
-                  <a:tcPr/>
-                </a:tc>
-                <a:tc>
-                  <a:txBody>
-                    <a:bodyPr/>
-                    <a:lstStyle/>
-                    <a:p>
-                      <a:pPr>
-                        <a:defRPr sz="1100" b="1"/>
-                      </a:pPr>
-                      <a:r>
-                        <a:t>Fan WTD m</a:t>
-                      </a:r>
-                    </a:p>
-                  </a:txBody>
-                  <a:tcPr/>
-                </a:tc>
-                <a:tc>
-                  <a:txBody>
-                    <a:bodyPr/>
-                    <a:lstStyle/>
-                    <a:p>
-                      <a:pPr>
-                        <a:defRPr sz="1100" b="1"/>
-                      </a:pPr>
-                      <a:r>
-                        <a:t>precip</a:t>
-                      </a:r>
-                    </a:p>
-                  </a:txBody>
-                  <a:tcPr/>
-                </a:tc>
-                <a:tc>
-                  <a:txBody>
-                    <a:bodyPr/>
-                    <a:lstStyle/>
-                    <a:p>
-                      <a:pPr>
-                        <a:defRPr sz="1100" b="1"/>
-                      </a:pPr>
-                      <a:r>
-                        <a:t>recharge</a:t>
-                      </a:r>
-                    </a:p>
-                  </a:txBody>
-                  <a:tcPr/>
-                </a:tc>
-                <a:tc>
-                  <a:txBody>
-                    <a:bodyPr/>
-                    <a:lstStyle/>
-                    <a:p>
-                      <a:pPr>
-                        <a:defRPr sz="1100" b="1"/>
-                      </a:pPr>
-                      <a:r>
-                        <a:t>runoff</a:t>
-                      </a:r>
-                    </a:p>
-                  </a:txBody>
-                  <a:tcPr/>
-                </a:tc>
-                <a:tc>
-                  <a:txBody>
-                    <a:bodyPr/>
-                    <a:lstStyle/>
-                    <a:p>
-                      <a:pPr>
-                        <a:defRPr sz="1100" b="1"/>
-                      </a:pPr>
-                      <a:r>
-                        <a:t>rech.frac</a:t>
-                      </a:r>
-                    </a:p>
-                  </a:txBody>
-                  <a:tcPr/>
-                </a:tc>
-                <a:tc>
-                  <a:txBody>
-                    <a:bodyPr/>
-                    <a:lstStyle/>
-                    <a:p>
-                      <a:pPr>
-                        <a:defRPr sz="1100" b="1"/>
-                      </a:pPr>
-                      <a:r>
-                        <a:t>ZWT m</a:t>
+              <a:tr h="457200">
+                <a:tc>
+                  <a:txBody>
+                    <a:bodyPr/>
+                    <a:lstStyle/>
+                    <a:p>
+                      <a:pPr>
+                        <a:defRPr sz="1300" b="1"/>
+                      </a:pPr>
+                      <a:r>
+                        <a:t>study</a:t>
+                      </a:r>
+                    </a:p>
+                  </a:txBody>
+                  <a:tcPr/>
+                </a:tc>
+                <a:tc>
+                  <a:txBody>
+                    <a:bodyPr/>
+                    <a:lstStyle/>
+                    <a:p>
+                      <a:pPr>
+                        <a:defRPr sz="1300" b="1"/>
+                      </a:pPr>
+                      <a:r>
+                        <a:t>columns</a:t>
+                      </a:r>
+                    </a:p>
+                  </a:txBody>
+                  <a:tcPr/>
+                </a:tc>
+                <a:tc>
+                  <a:txBody>
+                    <a:bodyPr/>
+                    <a:lstStyle/>
+                    <a:p>
+                      <a:pPr>
+                        <a:defRPr sz="1300" b="1"/>
+                      </a:pPr>
+                      <a:r>
+                        <a:t>forcing (mm/yr)</a:t>
+                      </a:r>
+                    </a:p>
+                  </a:txBody>
+                  <a:tcPr/>
+                </a:tc>
+                <a:tc>
+                  <a:txBody>
+                    <a:bodyPr/>
+                    <a:lstStyle/>
+                    <a:p>
+                      <a:pPr>
+                        <a:defRPr sz="1300" b="1"/>
+                      </a:pPr>
+                      <a:r>
+                        <a:t>recharge (mm/yr)</a:t>
+                      </a:r>
+                    </a:p>
+                  </a:txBody>
+                  <a:tcPr/>
+                </a:tc>
+                <a:tc>
+                  <a:txBody>
+                    <a:bodyPr/>
+                    <a:lstStyle/>
+                    <a:p>
+                      <a:pPr>
+                        <a:defRPr sz="1300" b="1"/>
+                      </a:pPr>
+                      <a:r>
+                        <a:t>strongest control</a:t>
                       </a:r>
                     </a:p>
                   </a:txBody>
                   <a:tcPr/>
                 </a:tc>
               </a:tr>
-              <a:tr h="384048">
-                <a:tc>
-                  <a:txBody>
-                    <a:bodyPr/>
-                    <a:lstStyle/>
-                    <a:p>
-                      <a:pPr>
-                        <a:defRPr sz="1100" b="0"/>
-                      </a:pPr>
-                      <a:r>
-                        <a:t>col_01</a:t>
-                      </a:r>
-                    </a:p>
-                  </a:txBody>
-                  <a:tcPr/>
-                </a:tc>
-                <a:tc>
-                  <a:txBody>
-                    <a:bodyPr/>
-                    <a:lstStyle/>
-                    <a:p>
-                      <a:pPr>
-                        <a:defRPr sz="1100" b="0"/>
-                      </a:pPr>
-                      <a:r>
-                        <a:t>750</a:t>
-                      </a:r>
-                    </a:p>
-                  </a:txBody>
-                  <a:tcPr/>
-                </a:tc>
-                <a:tc>
-                  <a:txBody>
-                    <a:bodyPr/>
-                    <a:lstStyle/>
-                    <a:p>
-                      <a:pPr>
-                        <a:defRPr sz="1100" b="0"/>
+              <a:tr h="457200">
+                <a:tc>
+                  <a:txBody>
+                    <a:bodyPr/>
+                    <a:lstStyle/>
+                    <a:p>
+                      <a:pPr>
+                        <a:defRPr sz="1300" b="0"/>
+                      </a:pPr>
+                      <a:r>
+                        <a:t>Naches</a:t>
+                      </a:r>
+                    </a:p>
+                  </a:txBody>
+                  <a:tcPr/>
+                </a:tc>
+                <a:tc>
+                  <a:txBody>
+                    <a:bodyPr/>
+                    <a:lstStyle/>
+                    <a:p>
+                      <a:pPr>
+                        <a:defRPr sz="1300" b="0"/>
+                      </a:pPr>
+                      <a:r>
+                        <a:t>20</a:t>
+                      </a:r>
+                    </a:p>
+                  </a:txBody>
+                  <a:tcPr/>
+                </a:tc>
+                <a:tc>
+                  <a:txBody>
+                    <a:bodyPr/>
+                    <a:lstStyle/>
+                    <a:p>
+                      <a:pPr>
+                        <a:defRPr sz="1300" b="0"/>
+                      </a:pPr>
+                      <a:r>
+                        <a:t>459, 474, 509, 611, 619, 682, 699, 727, 735, 793, 941, 975, 1153, 1361, 1580</a:t>
+                      </a:r>
+                    </a:p>
+                  </a:txBody>
+                  <a:tcPr/>
+                </a:tc>
+                <a:tc>
+                  <a:txBody>
+                    <a:bodyPr/>
+                    <a:lstStyle/>
+                    <a:p>
+                      <a:pPr>
+                        <a:defRPr sz="1300" b="0"/>
+                      </a:pPr>
+                      <a:r>
+                        <a:t>-3.6 → 291.2</a:t>
+                      </a:r>
+                    </a:p>
+                  </a:txBody>
+                  <a:tcPr/>
+                </a:tc>
+                <a:tc>
+                  <a:txBody>
+                    <a:bodyPr/>
+                    <a:lstStyle/>
+                    <a:p>
+                      <a:pPr>
+                        <a:defRPr sz="1300" b="0"/>
                       </a:pPr>
                       <a:r>
                         <a:t>—</a:t>
@@ -7180,3294 +6764,78 @@
                   </a:txBody>
                   <a:tcPr/>
                 </a:tc>
-                <a:tc>
-                  <a:txBody>
-                    <a:bodyPr/>
-                    <a:lstStyle/>
-                    <a:p>
-                      <a:pPr>
-                        <a:defRPr sz="1100" b="0"/>
+              </a:tr>
+              <a:tr h="457200">
+                <a:tc>
+                  <a:txBody>
+                    <a:bodyPr/>
+                    <a:lstStyle/>
+                    <a:p>
+                      <a:pPr>
+                        <a:defRPr sz="1300" b="0"/>
+                      </a:pPr>
+                      <a:r>
+                        <a:t>Naches — Fan warm start</a:t>
+                      </a:r>
+                    </a:p>
+                  </a:txBody>
+                  <a:tcPr/>
+                </a:tc>
+                <a:tc>
+                  <a:txBody>
+                    <a:bodyPr/>
+                    <a:lstStyle/>
+                    <a:p>
+                      <a:pPr>
+                        <a:defRPr sz="1300" b="0"/>
+                      </a:pPr>
+                      <a:r>
+                        <a:t>20</a:t>
+                      </a:r>
+                    </a:p>
+                  </a:txBody>
+                  <a:tcPr/>
+                </a:tc>
+                <a:tc>
+                  <a:txBody>
+                    <a:bodyPr/>
+                    <a:lstStyle/>
+                    <a:p>
+                      <a:pPr>
+                        <a:defRPr sz="1300" b="0"/>
+                      </a:pPr>
+                      <a:r>
+                        <a:t>459, 474, 509, 611, 619, 682, 699, 727, 735, 793, 941, 975, 1153, 1361, 1580</a:t>
+                      </a:r>
+                    </a:p>
+                  </a:txBody>
+                  <a:tcPr/>
+                </a:tc>
+                <a:tc>
+                  <a:txBody>
+                    <a:bodyPr/>
+                    <a:lstStyle/>
+                    <a:p>
+                      <a:pPr>
+                        <a:defRPr sz="1300" b="0"/>
+                      </a:pPr>
+                      <a:r>
+                        <a:t>-84.8 → 1298.8</a:t>
+                      </a:r>
+                    </a:p>
+                  </a:txBody>
+                  <a:tcPr/>
+                </a:tc>
+                <a:tc>
+                  <a:txBody>
+                    <a:bodyPr/>
+                    <a:lstStyle/>
+                    <a:p>
+                      <a:pPr>
+                        <a:defRPr sz="1300" b="0"/>
                       </a:pPr>
                       <a:r>
                         <a:t>—</a:t>
-                      </a:r>
-                    </a:p>
-                  </a:txBody>
-                  <a:tcPr/>
-                </a:tc>
-                <a:tc>
-                  <a:txBody>
-                    <a:bodyPr/>
-                    <a:lstStyle/>
-                    <a:p>
-                      <a:pPr>
-                        <a:defRPr sz="1100" b="0"/>
-                      </a:pPr>
-                      <a:r>
-                        <a:t>—</a:t>
-                      </a:r>
-                    </a:p>
-                  </a:txBody>
-                  <a:tcPr/>
-                </a:tc>
-                <a:tc>
-                  <a:txBody>
-                    <a:bodyPr/>
-                    <a:lstStyle/>
-                    <a:p>
-                      <a:pPr>
-                        <a:defRPr sz="1100" b="0"/>
-                      </a:pPr>
-                      <a:r>
-                        <a:t>61.5</a:t>
-                      </a:r>
-                    </a:p>
-                  </a:txBody>
-                  <a:tcPr/>
-                </a:tc>
-                <a:tc>
-                  <a:txBody>
-                    <a:bodyPr/>
-                    <a:lstStyle/>
-                    <a:p>
-                      <a:pPr>
-                        <a:defRPr sz="1100" b="0"/>
-                      </a:pPr>
-                      <a:r>
-                        <a:t>474</a:t>
-                      </a:r>
-                    </a:p>
-                  </a:txBody>
-                  <a:tcPr/>
-                </a:tc>
-                <a:tc>
-                  <a:txBody>
-                    <a:bodyPr/>
-                    <a:lstStyle/>
-                    <a:p>
-                      <a:pPr>
-                        <a:defRPr sz="1100" b="0"/>
-                      </a:pPr>
-                      <a:r>
-                        <a:t>-0.2</a:t>
-                      </a:r>
-                    </a:p>
-                  </a:txBody>
-                  <a:tcPr/>
-                </a:tc>
-                <a:tc>
-                  <a:txBody>
-                    <a:bodyPr/>
-                    <a:lstStyle/>
-                    <a:p>
-                      <a:pPr>
-                        <a:defRPr sz="1100" b="0"/>
-                      </a:pPr>
-                      <a:r>
-                        <a:t>23.5</a:t>
-                      </a:r>
-                    </a:p>
-                  </a:txBody>
-                  <a:tcPr/>
-                </a:tc>
-                <a:tc>
-                  <a:txBody>
-                    <a:bodyPr/>
-                    <a:lstStyle/>
-                    <a:p>
-                      <a:pPr>
-                        <a:defRPr sz="1100" b="0"/>
-                      </a:pPr>
-                      <a:r>
-                        <a:t>-0.01</a:t>
-                      </a:r>
-                    </a:p>
-                  </a:txBody>
-                  <a:tcPr/>
-                </a:tc>
-                <a:tc>
-                  <a:txBody>
-                    <a:bodyPr/>
-                    <a:lstStyle/>
-                    <a:p>
-                      <a:pPr>
-                        <a:defRPr sz="1100" b="0"/>
-                      </a:pPr>
-                      <a:r>
-                        <a:t>8.80</a:t>
-                      </a:r>
-                    </a:p>
-                  </a:txBody>
-                  <a:tcPr/>
-                </a:tc>
-              </a:tr>
-              <a:tr h="384048">
-                <a:tc>
-                  <a:txBody>
-                    <a:bodyPr/>
-                    <a:lstStyle/>
-                    <a:p>
-                      <a:pPr>
-                        <a:defRPr sz="1100" b="0"/>
-                      </a:pPr>
-                      <a:r>
-                        <a:t>col_02</a:t>
-                      </a:r>
-                    </a:p>
-                  </a:txBody>
-                  <a:tcPr/>
-                </a:tc>
-                <a:tc>
-                  <a:txBody>
-                    <a:bodyPr/>
-                    <a:lstStyle/>
-                    <a:p>
-                      <a:pPr>
-                        <a:defRPr sz="1100" b="0"/>
-                      </a:pPr>
-                      <a:r>
-                        <a:t>754</a:t>
-                      </a:r>
-                    </a:p>
-                  </a:txBody>
-                  <a:tcPr/>
-                </a:tc>
-                <a:tc>
-                  <a:txBody>
-                    <a:bodyPr/>
-                    <a:lstStyle/>
-                    <a:p>
-                      <a:pPr>
-                        <a:defRPr sz="1100" b="0"/>
-                      </a:pPr>
-                      <a:r>
-                        <a:t>—</a:t>
-                      </a:r>
-                    </a:p>
-                  </a:txBody>
-                  <a:tcPr/>
-                </a:tc>
-                <a:tc>
-                  <a:txBody>
-                    <a:bodyPr/>
-                    <a:lstStyle/>
-                    <a:p>
-                      <a:pPr>
-                        <a:defRPr sz="1100" b="0"/>
-                      </a:pPr>
-                      <a:r>
-                        <a:t>—</a:t>
-                      </a:r>
-                    </a:p>
-                  </a:txBody>
-                  <a:tcPr/>
-                </a:tc>
-                <a:tc>
-                  <a:txBody>
-                    <a:bodyPr/>
-                    <a:lstStyle/>
-                    <a:p>
-                      <a:pPr>
-                        <a:defRPr sz="1100" b="0"/>
-                      </a:pPr>
-                      <a:r>
-                        <a:t>—</a:t>
-                      </a:r>
-                    </a:p>
-                  </a:txBody>
-                  <a:tcPr/>
-                </a:tc>
-                <a:tc>
-                  <a:txBody>
-                    <a:bodyPr/>
-                    <a:lstStyle/>
-                    <a:p>
-                      <a:pPr>
-                        <a:defRPr sz="1100" b="0"/>
-                      </a:pPr>
-                      <a:r>
-                        <a:t>0.6</a:t>
-                      </a:r>
-                    </a:p>
-                  </a:txBody>
-                  <a:tcPr/>
-                </a:tc>
-                <a:tc>
-                  <a:txBody>
-                    <a:bodyPr/>
-                    <a:lstStyle/>
-                    <a:p>
-                      <a:pPr>
-                        <a:defRPr sz="1100" b="0"/>
-                      </a:pPr>
-                      <a:r>
-                        <a:t>682</a:t>
-                      </a:r>
-                    </a:p>
-                  </a:txBody>
-                  <a:tcPr/>
-                </a:tc>
-                <a:tc>
-                  <a:txBody>
-                    <a:bodyPr/>
-                    <a:lstStyle/>
-                    <a:p>
-                      <a:pPr>
-                        <a:defRPr sz="1100" b="0"/>
-                      </a:pPr>
-                      <a:r>
-                        <a:t>-0.2</a:t>
-                      </a:r>
-                    </a:p>
-                  </a:txBody>
-                  <a:tcPr/>
-                </a:tc>
-                <a:tc>
-                  <a:txBody>
-                    <a:bodyPr/>
-                    <a:lstStyle/>
-                    <a:p>
-                      <a:pPr>
-                        <a:defRPr sz="1100" b="0"/>
-                      </a:pPr>
-                      <a:r>
-                        <a:t>39.5</a:t>
-                      </a:r>
-                    </a:p>
-                  </a:txBody>
-                  <a:tcPr/>
-                </a:tc>
-                <a:tc>
-                  <a:txBody>
-                    <a:bodyPr/>
-                    <a:lstStyle/>
-                    <a:p>
-                      <a:pPr>
-                        <a:defRPr sz="1100" b="0"/>
-                      </a:pPr>
-                      <a:r>
-                        <a:t>-0.00</a:t>
-                      </a:r>
-                    </a:p>
-                  </a:txBody>
-                  <a:tcPr/>
-                </a:tc>
-                <a:tc>
-                  <a:txBody>
-                    <a:bodyPr/>
-                    <a:lstStyle/>
-                    <a:p>
-                      <a:pPr>
-                        <a:defRPr sz="1100" b="0"/>
-                      </a:pPr>
-                      <a:r>
-                        <a:t>8.80</a:t>
-                      </a:r>
-                    </a:p>
-                  </a:txBody>
-                  <a:tcPr/>
-                </a:tc>
-              </a:tr>
-              <a:tr h="384048">
-                <a:tc>
-                  <a:txBody>
-                    <a:bodyPr/>
-                    <a:lstStyle/>
-                    <a:p>
-                      <a:pPr>
-                        <a:defRPr sz="1100" b="0"/>
-                      </a:pPr>
-                      <a:r>
-                        <a:t>col_05</a:t>
-                      </a:r>
-                    </a:p>
-                  </a:txBody>
-                  <a:tcPr/>
-                </a:tc>
-                <a:tc>
-                  <a:txBody>
-                    <a:bodyPr/>
-                    <a:lstStyle/>
-                    <a:p>
-                      <a:pPr>
-                        <a:defRPr sz="1100" b="0"/>
-                      </a:pPr>
-                      <a:r>
-                        <a:t>924</a:t>
-                      </a:r>
-                    </a:p>
-                  </a:txBody>
-                  <a:tcPr/>
-                </a:tc>
-                <a:tc>
-                  <a:txBody>
-                    <a:bodyPr/>
-                    <a:lstStyle/>
-                    <a:p>
-                      <a:pPr>
-                        <a:defRPr sz="1100" b="0"/>
-                      </a:pPr>
-                      <a:r>
-                        <a:t>—</a:t>
-                      </a:r>
-                    </a:p>
-                  </a:txBody>
-                  <a:tcPr/>
-                </a:tc>
-                <a:tc>
-                  <a:txBody>
-                    <a:bodyPr/>
-                    <a:lstStyle/>
-                    <a:p>
-                      <a:pPr>
-                        <a:defRPr sz="1100" b="0"/>
-                      </a:pPr>
-                      <a:r>
-                        <a:t>—</a:t>
-                      </a:r>
-                    </a:p>
-                  </a:txBody>
-                  <a:tcPr/>
-                </a:tc>
-                <a:tc>
-                  <a:txBody>
-                    <a:bodyPr/>
-                    <a:lstStyle/>
-                    <a:p>
-                      <a:pPr>
-                        <a:defRPr sz="1100" b="0"/>
-                      </a:pPr>
-                      <a:r>
-                        <a:t>—</a:t>
-                      </a:r>
-                    </a:p>
-                  </a:txBody>
-                  <a:tcPr/>
-                </a:tc>
-                <a:tc>
-                  <a:txBody>
-                    <a:bodyPr/>
-                    <a:lstStyle/>
-                    <a:p>
-                      <a:pPr>
-                        <a:defRPr sz="1100" b="0"/>
-                      </a:pPr>
-                      <a:r>
-                        <a:t>4.7</a:t>
-                      </a:r>
-                    </a:p>
-                  </a:txBody>
-                  <a:tcPr/>
-                </a:tc>
-                <a:tc>
-                  <a:txBody>
-                    <a:bodyPr/>
-                    <a:lstStyle/>
-                    <a:p>
-                      <a:pPr>
-                        <a:defRPr sz="1100" b="0"/>
-                      </a:pPr>
-                      <a:r>
-                        <a:t>474</a:t>
-                      </a:r>
-                    </a:p>
-                  </a:txBody>
-                  <a:tcPr/>
-                </a:tc>
-                <a:tc>
-                  <a:txBody>
-                    <a:bodyPr/>
-                    <a:lstStyle/>
-                    <a:p>
-                      <a:pPr>
-                        <a:defRPr sz="1100" b="0"/>
-                      </a:pPr>
-                      <a:r>
-                        <a:t>-0.2</a:t>
-                      </a:r>
-                    </a:p>
-                  </a:txBody>
-                  <a:tcPr/>
-                </a:tc>
-                <a:tc>
-                  <a:txBody>
-                    <a:bodyPr/>
-                    <a:lstStyle/>
-                    <a:p>
-                      <a:pPr>
-                        <a:defRPr sz="1100" b="0"/>
-                      </a:pPr>
-                      <a:r>
-                        <a:t>23.5</a:t>
-                      </a:r>
-                    </a:p>
-                  </a:txBody>
-                  <a:tcPr/>
-                </a:tc>
-                <a:tc>
-                  <a:txBody>
-                    <a:bodyPr/>
-                    <a:lstStyle/>
-                    <a:p>
-                      <a:pPr>
-                        <a:defRPr sz="1100" b="0"/>
-                      </a:pPr>
-                      <a:r>
-                        <a:t>-0.01</a:t>
-                      </a:r>
-                    </a:p>
-                  </a:txBody>
-                  <a:tcPr/>
-                </a:tc>
-                <a:tc>
-                  <a:txBody>
-                    <a:bodyPr/>
-                    <a:lstStyle/>
-                    <a:p>
-                      <a:pPr>
-                        <a:defRPr sz="1100" b="0"/>
-                      </a:pPr>
-                      <a:r>
-                        <a:t>8.80</a:t>
-                      </a:r>
-                    </a:p>
-                  </a:txBody>
-                  <a:tcPr/>
-                </a:tc>
-              </a:tr>
-              <a:tr h="384048">
-                <a:tc>
-                  <a:txBody>
-                    <a:bodyPr/>
-                    <a:lstStyle/>
-                    <a:p>
-                      <a:pPr>
-                        <a:defRPr sz="1100" b="0"/>
-                      </a:pPr>
-                      <a:r>
-                        <a:t>col_06</a:t>
-                      </a:r>
-                    </a:p>
-                  </a:txBody>
-                  <a:tcPr/>
-                </a:tc>
-                <a:tc>
-                  <a:txBody>
-                    <a:bodyPr/>
-                    <a:lstStyle/>
-                    <a:p>
-                      <a:pPr>
-                        <a:defRPr sz="1100" b="0"/>
-                      </a:pPr>
-                      <a:r>
-                        <a:t>932</a:t>
-                      </a:r>
-                    </a:p>
-                  </a:txBody>
-                  <a:tcPr/>
-                </a:tc>
-                <a:tc>
-                  <a:txBody>
-                    <a:bodyPr/>
-                    <a:lstStyle/>
-                    <a:p>
-                      <a:pPr>
-                        <a:defRPr sz="1100" b="0"/>
-                      </a:pPr>
-                      <a:r>
-                        <a:t>loam</a:t>
-                      </a:r>
-                    </a:p>
-                  </a:txBody>
-                  <a:tcPr/>
-                </a:tc>
-                <a:tc>
-                  <a:txBody>
-                    <a:bodyPr/>
-                    <a:lstStyle/>
-                    <a:p>
-                      <a:pPr>
-                        <a:defRPr sz="1100" b="0"/>
-                      </a:pPr>
-                      <a:r>
-                        <a:t>26</a:t>
-                      </a:r>
-                    </a:p>
-                  </a:txBody>
-                  <a:tcPr/>
-                </a:tc>
-                <a:tc>
-                  <a:txBody>
-                    <a:bodyPr/>
-                    <a:lstStyle/>
-                    <a:p>
-                      <a:pPr>
-                        <a:defRPr sz="1100" b="0"/>
-                      </a:pPr>
-                      <a:r>
-                        <a:t>3.0</a:t>
-                      </a:r>
-                    </a:p>
-                  </a:txBody>
-                  <a:tcPr/>
-                </a:tc>
-                <a:tc>
-                  <a:txBody>
-                    <a:bodyPr/>
-                    <a:lstStyle/>
-                    <a:p>
-                      <a:pPr>
-                        <a:defRPr sz="1100" b="0"/>
-                      </a:pPr>
-                      <a:r>
-                        <a:t>4.5</a:t>
-                      </a:r>
-                    </a:p>
-                  </a:txBody>
-                  <a:tcPr/>
-                </a:tc>
-                <a:tc>
-                  <a:txBody>
-                    <a:bodyPr/>
-                    <a:lstStyle/>
-                    <a:p>
-                      <a:pPr>
-                        <a:defRPr sz="1100" b="0"/>
-                      </a:pPr>
-                      <a:r>
-                        <a:t>727</a:t>
-                      </a:r>
-                    </a:p>
-                  </a:txBody>
-                  <a:tcPr/>
-                </a:tc>
-                <a:tc>
-                  <a:txBody>
-                    <a:bodyPr/>
-                    <a:lstStyle/>
-                    <a:p>
-                      <a:pPr>
-                        <a:defRPr sz="1100" b="0"/>
-                      </a:pPr>
-                      <a:r>
-                        <a:t>-0.6</a:t>
-                      </a:r>
-                    </a:p>
-                  </a:txBody>
-                  <a:tcPr/>
-                </a:tc>
-                <a:tc>
-                  <a:txBody>
-                    <a:bodyPr/>
-                    <a:lstStyle/>
-                    <a:p>
-                      <a:pPr>
-                        <a:defRPr sz="1100" b="0"/>
-                      </a:pPr>
-                      <a:r>
-                        <a:t>35.3</a:t>
-                      </a:r>
-                    </a:p>
-                  </a:txBody>
-                  <a:tcPr/>
-                </a:tc>
-                <a:tc>
-                  <a:txBody>
-                    <a:bodyPr/>
-                    <a:lstStyle/>
-                    <a:p>
-                      <a:pPr>
-                        <a:defRPr sz="1100" b="0"/>
-                      </a:pPr>
-                      <a:r>
-                        <a:t>-0.02</a:t>
-                      </a:r>
-                    </a:p>
-                  </a:txBody>
-                  <a:tcPr/>
-                </a:tc>
-                <a:tc>
-                  <a:txBody>
-                    <a:bodyPr/>
-                    <a:lstStyle/>
-                    <a:p>
-                      <a:pPr>
-                        <a:defRPr sz="1100" b="0"/>
-                      </a:pPr>
-                      <a:r>
-                        <a:t>8.80</a:t>
-                      </a:r>
-                    </a:p>
-                  </a:txBody>
-                  <a:tcPr/>
-                </a:tc>
-              </a:tr>
-              <a:tr h="384048">
-                <a:tc>
-                  <a:txBody>
-                    <a:bodyPr/>
-                    <a:lstStyle/>
-                    <a:p>
-                      <a:pPr>
-                        <a:defRPr sz="1100" b="0"/>
-                      </a:pPr>
-                      <a:r>
-                        <a:t>col_03</a:t>
-                      </a:r>
-                    </a:p>
-                  </a:txBody>
-                  <a:tcPr/>
-                </a:tc>
-                <a:tc>
-                  <a:txBody>
-                    <a:bodyPr/>
-                    <a:lstStyle/>
-                    <a:p>
-                      <a:pPr>
-                        <a:defRPr sz="1100" b="0"/>
-                      </a:pPr>
-                      <a:r>
-                        <a:t>943</a:t>
-                      </a:r>
-                    </a:p>
-                  </a:txBody>
-                  <a:tcPr/>
-                </a:tc>
-                <a:tc>
-                  <a:txBody>
-                    <a:bodyPr/>
-                    <a:lstStyle/>
-                    <a:p>
-                      <a:pPr>
-                        <a:defRPr sz="1100" b="0"/>
-                      </a:pPr>
-                      <a:r>
-                        <a:t>—</a:t>
-                      </a:r>
-                    </a:p>
-                  </a:txBody>
-                  <a:tcPr/>
-                </a:tc>
-                <a:tc>
-                  <a:txBody>
-                    <a:bodyPr/>
-                    <a:lstStyle/>
-                    <a:p>
-                      <a:pPr>
-                        <a:defRPr sz="1100" b="0"/>
-                      </a:pPr>
-                      <a:r>
-                        <a:t>—</a:t>
-                      </a:r>
-                    </a:p>
-                  </a:txBody>
-                  <a:tcPr/>
-                </a:tc>
-                <a:tc>
-                  <a:txBody>
-                    <a:bodyPr/>
-                    <a:lstStyle/>
-                    <a:p>
-                      <a:pPr>
-                        <a:defRPr sz="1100" b="0"/>
-                      </a:pPr>
-                      <a:r>
-                        <a:t>—</a:t>
-                      </a:r>
-                    </a:p>
-                  </a:txBody>
-                  <a:tcPr/>
-                </a:tc>
-                <a:tc>
-                  <a:txBody>
-                    <a:bodyPr/>
-                    <a:lstStyle/>
-                    <a:p>
-                      <a:pPr>
-                        <a:defRPr sz="1100" b="0"/>
-                      </a:pPr>
-                      <a:r>
-                        <a:t>0.7</a:t>
-                      </a:r>
-                    </a:p>
-                  </a:txBody>
-                  <a:tcPr/>
-                </a:tc>
-                <a:tc>
-                  <a:txBody>
-                    <a:bodyPr/>
-                    <a:lstStyle/>
-                    <a:p>
-                      <a:pPr>
-                        <a:defRPr sz="1100" b="0"/>
-                      </a:pPr>
-                      <a:r>
-                        <a:t>793</a:t>
-                      </a:r>
-                    </a:p>
-                  </a:txBody>
-                  <a:tcPr/>
-                </a:tc>
-                <a:tc>
-                  <a:txBody>
-                    <a:bodyPr/>
-                    <a:lstStyle/>
-                    <a:p>
-                      <a:pPr>
-                        <a:defRPr sz="1100" b="0"/>
-                      </a:pPr>
-                      <a:r>
-                        <a:t>-0.2</a:t>
-                      </a:r>
-                    </a:p>
-                  </a:txBody>
-                  <a:tcPr/>
-                </a:tc>
-                <a:tc>
-                  <a:txBody>
-                    <a:bodyPr/>
-                    <a:lstStyle/>
-                    <a:p>
-                      <a:pPr>
-                        <a:defRPr sz="1100" b="0"/>
-                      </a:pPr>
-                      <a:r>
-                        <a:t>40.7</a:t>
-                      </a:r>
-                    </a:p>
-                  </a:txBody>
-                  <a:tcPr/>
-                </a:tc>
-                <a:tc>
-                  <a:txBody>
-                    <a:bodyPr/>
-                    <a:lstStyle/>
-                    <a:p>
-                      <a:pPr>
-                        <a:defRPr sz="1100" b="0"/>
-                      </a:pPr>
-                      <a:r>
-                        <a:t>-0.00</a:t>
-                      </a:r>
-                    </a:p>
-                  </a:txBody>
-                  <a:tcPr/>
-                </a:tc>
-                <a:tc>
-                  <a:txBody>
-                    <a:bodyPr/>
-                    <a:lstStyle/>
-                    <a:p>
-                      <a:pPr>
-                        <a:defRPr sz="1100" b="0"/>
-                      </a:pPr>
-                      <a:r>
-                        <a:t>8.80</a:t>
-                      </a:r>
-                    </a:p>
-                  </a:txBody>
-                  <a:tcPr/>
-                </a:tc>
-              </a:tr>
-              <a:tr h="384048">
-                <a:tc>
-                  <a:txBody>
-                    <a:bodyPr/>
-                    <a:lstStyle/>
-                    <a:p>
-                      <a:pPr>
-                        <a:defRPr sz="1100" b="0"/>
-                      </a:pPr>
-                      <a:r>
-                        <a:t>col_04</a:t>
-                      </a:r>
-                    </a:p>
-                  </a:txBody>
-                  <a:tcPr/>
-                </a:tc>
-                <a:tc>
-                  <a:txBody>
-                    <a:bodyPr/>
-                    <a:lstStyle/>
-                    <a:p>
-                      <a:pPr>
-                        <a:defRPr sz="1100" b="0"/>
-                      </a:pPr>
-                      <a:r>
-                        <a:t>1031</a:t>
-                      </a:r>
-                    </a:p>
-                  </a:txBody>
-                  <a:tcPr/>
-                </a:tc>
-                <a:tc>
-                  <a:txBody>
-                    <a:bodyPr/>
-                    <a:lstStyle/>
-                    <a:p>
-                      <a:pPr>
-                        <a:defRPr sz="1100" b="0"/>
-                      </a:pPr>
-                      <a:r>
-                        <a:t>—</a:t>
-                      </a:r>
-                    </a:p>
-                  </a:txBody>
-                  <a:tcPr/>
-                </a:tc>
-                <a:tc>
-                  <a:txBody>
-                    <a:bodyPr/>
-                    <a:lstStyle/>
-                    <a:p>
-                      <a:pPr>
-                        <a:defRPr sz="1100" b="0"/>
-                      </a:pPr>
-                      <a:r>
-                        <a:t>—</a:t>
-                      </a:r>
-                    </a:p>
-                  </a:txBody>
-                  <a:tcPr/>
-                </a:tc>
-                <a:tc>
-                  <a:txBody>
-                    <a:bodyPr/>
-                    <a:lstStyle/>
-                    <a:p>
-                      <a:pPr>
-                        <a:defRPr sz="1100" b="0"/>
-                      </a:pPr>
-                      <a:r>
-                        <a:t>—</a:t>
-                      </a:r>
-                    </a:p>
-                  </a:txBody>
-                  <a:tcPr/>
-                </a:tc>
-                <a:tc>
-                  <a:txBody>
-                    <a:bodyPr/>
-                    <a:lstStyle/>
-                    <a:p>
-                      <a:pPr>
-                        <a:defRPr sz="1100" b="0"/>
-                      </a:pPr>
-                      <a:r>
-                        <a:t>0.9</a:t>
-                      </a:r>
-                    </a:p>
-                  </a:txBody>
-                  <a:tcPr/>
-                </a:tc>
-                <a:tc>
-                  <a:txBody>
-                    <a:bodyPr/>
-                    <a:lstStyle/>
-                    <a:p>
-                      <a:pPr>
-                        <a:defRPr sz="1100" b="0"/>
-                      </a:pPr>
-                      <a:r>
-                        <a:t>1361</a:t>
-                      </a:r>
-                    </a:p>
-                  </a:txBody>
-                  <a:tcPr/>
-                </a:tc>
-                <a:tc>
-                  <a:txBody>
-                    <a:bodyPr/>
-                    <a:lstStyle/>
-                    <a:p>
-                      <a:pPr>
-                        <a:defRPr sz="1100" b="0"/>
-                      </a:pPr>
-                      <a:r>
-                        <a:t>-0.2</a:t>
-                      </a:r>
-                    </a:p>
-                  </a:txBody>
-                  <a:tcPr/>
-                </a:tc>
-                <a:tc>
-                  <a:txBody>
-                    <a:bodyPr/>
-                    <a:lstStyle/>
-                    <a:p>
-                      <a:pPr>
-                        <a:defRPr sz="1100" b="0"/>
-                      </a:pPr>
-                      <a:r>
-                        <a:t>89.8</a:t>
-                      </a:r>
-                    </a:p>
-                  </a:txBody>
-                  <a:tcPr/>
-                </a:tc>
-                <a:tc>
-                  <a:txBody>
-                    <a:bodyPr/>
-                    <a:lstStyle/>
-                    <a:p>
-                      <a:pPr>
-                        <a:defRPr sz="1100" b="0"/>
-                      </a:pPr>
-                      <a:r>
-                        <a:t>-0.00</a:t>
-                      </a:r>
-                    </a:p>
-                  </a:txBody>
-                  <a:tcPr/>
-                </a:tc>
-                <a:tc>
-                  <a:txBody>
-                    <a:bodyPr/>
-                    <a:lstStyle/>
-                    <a:p>
-                      <a:pPr>
-                        <a:defRPr sz="1100" b="0"/>
-                      </a:pPr>
-                      <a:r>
-                        <a:t>8.80</a:t>
-                      </a:r>
-                    </a:p>
-                  </a:txBody>
-                  <a:tcPr/>
-                </a:tc>
-              </a:tr>
-              <a:tr h="384048">
-                <a:tc>
-                  <a:txBody>
-                    <a:bodyPr/>
-                    <a:lstStyle/>
-                    <a:p>
-                      <a:pPr>
-                        <a:defRPr sz="1100" b="0"/>
-                      </a:pPr>
-                      <a:r>
-                        <a:t>col_07</a:t>
-                      </a:r>
-                    </a:p>
-                  </a:txBody>
-                  <a:tcPr/>
-                </a:tc>
-                <a:tc>
-                  <a:txBody>
-                    <a:bodyPr/>
-                    <a:lstStyle/>
-                    <a:p>
-                      <a:pPr>
-                        <a:defRPr sz="1100" b="0"/>
-                      </a:pPr>
-                      <a:r>
-                        <a:t>1116</a:t>
-                      </a:r>
-                    </a:p>
-                  </a:txBody>
-                  <a:tcPr/>
-                </a:tc>
-                <a:tc>
-                  <a:txBody>
-                    <a:bodyPr/>
-                    <a:lstStyle/>
-                    <a:p>
-                      <a:pPr>
-                        <a:defRPr sz="1100" b="0"/>
-                      </a:pPr>
-                      <a:r>
-                        <a:t>loam</a:t>
-                      </a:r>
-                    </a:p>
-                  </a:txBody>
-                  <a:tcPr/>
-                </a:tc>
-                <a:tc>
-                  <a:txBody>
-                    <a:bodyPr/>
-                    <a:lstStyle/>
-                    <a:p>
-                      <a:pPr>
-                        <a:defRPr sz="1100" b="0"/>
-                      </a:pPr>
-                      <a:r>
-                        <a:t>14</a:t>
-                      </a:r>
-                    </a:p>
-                  </a:txBody>
-                  <a:tcPr/>
-                </a:tc>
-                <a:tc>
-                  <a:txBody>
-                    <a:bodyPr/>
-                    <a:lstStyle/>
-                    <a:p>
-                      <a:pPr>
-                        <a:defRPr sz="1100" b="0"/>
-                      </a:pPr>
-                      <a:r>
-                        <a:t>9.0</a:t>
-                      </a:r>
-                    </a:p>
-                  </a:txBody>
-                  <a:tcPr/>
-                </a:tc>
-                <a:tc>
-                  <a:txBody>
-                    <a:bodyPr/>
-                    <a:lstStyle/>
-                    <a:p>
-                      <a:pPr>
-                        <a:defRPr sz="1100" b="0"/>
-                      </a:pPr>
-                      <a:r>
-                        <a:t>0.7</a:t>
-                      </a:r>
-                    </a:p>
-                  </a:txBody>
-                  <a:tcPr/>
-                </a:tc>
-                <a:tc>
-                  <a:txBody>
-                    <a:bodyPr/>
-                    <a:lstStyle/>
-                    <a:p>
-                      <a:pPr>
-                        <a:defRPr sz="1100" b="0"/>
-                      </a:pPr>
-                      <a:r>
-                        <a:t>975</a:t>
-                      </a:r>
-                    </a:p>
-                  </a:txBody>
-                  <a:tcPr/>
-                </a:tc>
-                <a:tc>
-                  <a:txBody>
-                    <a:bodyPr/>
-                    <a:lstStyle/>
-                    <a:p>
-                      <a:pPr>
-                        <a:defRPr sz="1100" b="0"/>
-                      </a:pPr>
-                      <a:r>
-                        <a:t>-1.5</a:t>
-                      </a:r>
-                    </a:p>
-                  </a:txBody>
-                  <a:tcPr/>
-                </a:tc>
-                <a:tc>
-                  <a:txBody>
-                    <a:bodyPr/>
-                    <a:lstStyle/>
-                    <a:p>
-                      <a:pPr>
-                        <a:defRPr sz="1100" b="0"/>
-                      </a:pPr>
-                      <a:r>
-                        <a:t>52.6</a:t>
-                      </a:r>
-                    </a:p>
-                  </a:txBody>
-                  <a:tcPr/>
-                </a:tc>
-                <a:tc>
-                  <a:txBody>
-                    <a:bodyPr/>
-                    <a:lstStyle/>
-                    <a:p>
-                      <a:pPr>
-                        <a:defRPr sz="1100" b="0"/>
-                      </a:pPr>
-                      <a:r>
-                        <a:t>-0.03</a:t>
-                      </a:r>
-                    </a:p>
-                  </a:txBody>
-                  <a:tcPr/>
-                </a:tc>
-                <a:tc>
-                  <a:txBody>
-                    <a:bodyPr/>
-                    <a:lstStyle/>
-                    <a:p>
-                      <a:pPr>
-                        <a:defRPr sz="1100" b="0"/>
-                      </a:pPr>
-                      <a:r>
-                        <a:t>8.81</a:t>
-                      </a:r>
-                    </a:p>
-                  </a:txBody>
-                  <a:tcPr/>
-                </a:tc>
-              </a:tr>
-              <a:tr h="384048">
-                <a:tc>
-                  <a:txBody>
-                    <a:bodyPr/>
-                    <a:lstStyle/>
-                    <a:p>
-                      <a:pPr>
-                        <a:defRPr sz="1100" b="0"/>
-                      </a:pPr>
-                      <a:r>
-                        <a:t>col_08</a:t>
-                      </a:r>
-                    </a:p>
-                  </a:txBody>
-                  <a:tcPr/>
-                </a:tc>
-                <a:tc>
-                  <a:txBody>
-                    <a:bodyPr/>
-                    <a:lstStyle/>
-                    <a:p>
-                      <a:pPr>
-                        <a:defRPr sz="1100" b="0"/>
-                      </a:pPr>
-                      <a:r>
-                        <a:t>1130</a:t>
-                      </a:r>
-                    </a:p>
-                  </a:txBody>
-                  <a:tcPr/>
-                </a:tc>
-                <a:tc>
-                  <a:txBody>
-                    <a:bodyPr/>
-                    <a:lstStyle/>
-                    <a:p>
-                      <a:pPr>
-                        <a:defRPr sz="1100" b="0"/>
-                      </a:pPr>
-                      <a:r>
-                        <a:t>loam</a:t>
-                      </a:r>
-                    </a:p>
-                  </a:txBody>
-                  <a:tcPr/>
-                </a:tc>
-                <a:tc>
-                  <a:txBody>
-                    <a:bodyPr/>
-                    <a:lstStyle/>
-                    <a:p>
-                      <a:pPr>
-                        <a:defRPr sz="1100" b="0"/>
-                      </a:pPr>
-                      <a:r>
-                        <a:t>54</a:t>
-                      </a:r>
-                    </a:p>
-                  </a:txBody>
-                  <a:tcPr/>
-                </a:tc>
-                <a:tc>
-                  <a:txBody>
-                    <a:bodyPr/>
-                    <a:lstStyle/>
-                    <a:p>
-                      <a:pPr>
-                        <a:defRPr sz="1100" b="0"/>
-                      </a:pPr>
-                      <a:r>
-                        <a:t>0.1</a:t>
-                      </a:r>
-                    </a:p>
-                  </a:txBody>
-                  <a:tcPr/>
-                </a:tc>
-                <a:tc>
-                  <a:txBody>
-                    <a:bodyPr/>
-                    <a:lstStyle/>
-                    <a:p>
-                      <a:pPr>
-                        <a:defRPr sz="1100" b="0"/>
-                      </a:pPr>
-                      <a:r>
-                        <a:t>34.8</a:t>
-                      </a:r>
-                    </a:p>
-                  </a:txBody>
-                  <a:tcPr/>
-                </a:tc>
-                <a:tc>
-                  <a:txBody>
-                    <a:bodyPr/>
-                    <a:lstStyle/>
-                    <a:p>
-                      <a:pPr>
-                        <a:defRPr sz="1100" b="0"/>
-                      </a:pPr>
-                      <a:r>
-                        <a:t>509</a:t>
-                      </a:r>
-                    </a:p>
-                  </a:txBody>
-                  <a:tcPr/>
-                </a:tc>
-                <a:tc>
-                  <a:txBody>
-                    <a:bodyPr/>
-                    <a:lstStyle/>
-                    <a:p>
-                      <a:pPr>
-                        <a:defRPr sz="1100" b="0"/>
-                      </a:pPr>
-                      <a:r>
-                        <a:t>-0.0</a:t>
-                      </a:r>
-                    </a:p>
-                  </a:txBody>
-                  <a:tcPr/>
-                </a:tc>
-                <a:tc>
-                  <a:txBody>
-                    <a:bodyPr/>
-                    <a:lstStyle/>
-                    <a:p>
-                      <a:pPr>
-                        <a:defRPr sz="1100" b="0"/>
-                      </a:pPr>
-                      <a:r>
-                        <a:t>54.7</a:t>
-                      </a:r>
-                    </a:p>
-                  </a:txBody>
-                  <a:tcPr/>
-                </a:tc>
-                <a:tc>
-                  <a:txBody>
-                    <a:bodyPr/>
-                    <a:lstStyle/>
-                    <a:p>
-                      <a:pPr>
-                        <a:defRPr sz="1100" b="0"/>
-                      </a:pPr>
-                      <a:r>
-                        <a:t>-0.00</a:t>
-                      </a:r>
-                    </a:p>
-                  </a:txBody>
-                  <a:tcPr/>
-                </a:tc>
-                <a:tc>
-                  <a:txBody>
-                    <a:bodyPr/>
-                    <a:lstStyle/>
-                    <a:p>
-                      <a:pPr>
-                        <a:defRPr sz="1100" b="0"/>
-                      </a:pPr>
-                      <a:r>
-                        <a:t>8.80</a:t>
-                      </a:r>
-                    </a:p>
-                  </a:txBody>
-                  <a:tcPr/>
-                </a:tc>
-              </a:tr>
-              <a:tr h="384048">
-                <a:tc>
-                  <a:txBody>
-                    <a:bodyPr/>
-                    <a:lstStyle/>
-                    <a:p>
-                      <a:pPr>
-                        <a:defRPr sz="1100" b="0"/>
-                      </a:pPr>
-                      <a:r>
-                        <a:t>col_09</a:t>
-                      </a:r>
-                    </a:p>
-                  </a:txBody>
-                  <a:tcPr/>
-                </a:tc>
-                <a:tc>
-                  <a:txBody>
-                    <a:bodyPr/>
-                    <a:lstStyle/>
-                    <a:p>
-                      <a:pPr>
-                        <a:defRPr sz="1100" b="0"/>
-                      </a:pPr>
-                      <a:r>
-                        <a:t>1186</a:t>
-                      </a:r>
-                    </a:p>
-                  </a:txBody>
-                  <a:tcPr/>
-                </a:tc>
-                <a:tc>
-                  <a:txBody>
-                    <a:bodyPr/>
-                    <a:lstStyle/>
-                    <a:p>
-                      <a:pPr>
-                        <a:defRPr sz="1100" b="0"/>
-                      </a:pPr>
-                      <a:r>
-                        <a:t>loam</a:t>
-                      </a:r>
-                    </a:p>
-                  </a:txBody>
-                  <a:tcPr/>
-                </a:tc>
-                <a:tc>
-                  <a:txBody>
-                    <a:bodyPr/>
-                    <a:lstStyle/>
-                    <a:p>
-                      <a:pPr>
-                        <a:defRPr sz="1100" b="0"/>
-                      </a:pPr>
-                      <a:r>
-                        <a:t>12</a:t>
-                      </a:r>
-                    </a:p>
-                  </a:txBody>
-                  <a:tcPr/>
-                </a:tc>
-                <a:tc>
-                  <a:txBody>
-                    <a:bodyPr/>
-                    <a:lstStyle/>
-                    <a:p>
-                      <a:pPr>
-                        <a:defRPr sz="1100" b="0"/>
-                      </a:pPr>
-                      <a:r>
-                        <a:t>28.0</a:t>
-                      </a:r>
-                    </a:p>
-                  </a:txBody>
-                  <a:tcPr/>
-                </a:tc>
-                <a:tc>
-                  <a:txBody>
-                    <a:bodyPr/>
-                    <a:lstStyle/>
-                    <a:p>
-                      <a:pPr>
-                        <a:defRPr sz="1100" b="0"/>
-                      </a:pPr>
-                      <a:r>
-                        <a:t>0.2</a:t>
-                      </a:r>
-                    </a:p>
-                  </a:txBody>
-                  <a:tcPr/>
-                </a:tc>
-                <a:tc>
-                  <a:txBody>
-                    <a:bodyPr/>
-                    <a:lstStyle/>
-                    <a:p>
-                      <a:pPr>
-                        <a:defRPr sz="1100" b="0"/>
-                      </a:pPr>
-                      <a:r>
-                        <a:t>793</a:t>
-                      </a:r>
-                    </a:p>
-                  </a:txBody>
-                  <a:tcPr/>
-                </a:tc>
-                <a:tc>
-                  <a:txBody>
-                    <a:bodyPr/>
-                    <a:lstStyle/>
-                    <a:p>
-                      <a:pPr>
-                        <a:defRPr sz="1100" b="0"/>
-                      </a:pPr>
-                      <a:r>
-                        <a:t>-2.9</a:t>
-                      </a:r>
-                    </a:p>
-                  </a:txBody>
-                  <a:tcPr/>
-                </a:tc>
-                <a:tc>
-                  <a:txBody>
-                    <a:bodyPr/>
-                    <a:lstStyle/>
-                    <a:p>
-                      <a:pPr>
-                        <a:defRPr sz="1100" b="0"/>
-                      </a:pPr>
-                      <a:r>
-                        <a:t>40.1</a:t>
-                      </a:r>
-                    </a:p>
-                  </a:txBody>
-                  <a:tcPr/>
-                </a:tc>
-                <a:tc>
-                  <a:txBody>
-                    <a:bodyPr/>
-                    <a:lstStyle/>
-                    <a:p>
-                      <a:pPr>
-                        <a:defRPr sz="1100" b="0"/>
-                      </a:pPr>
-                      <a:r>
-                        <a:t>-0.08</a:t>
-                      </a:r>
-                    </a:p>
-                  </a:txBody>
-                  <a:tcPr/>
-                </a:tc>
-                <a:tc>
-                  <a:txBody>
-                    <a:bodyPr/>
-                    <a:lstStyle/>
-                    <a:p>
-                      <a:pPr>
-                        <a:defRPr sz="1100" b="0"/>
-                      </a:pPr>
-                      <a:r>
-                        <a:t>8.81</a:t>
-                      </a:r>
-                    </a:p>
-                  </a:txBody>
-                  <a:tcPr/>
-                </a:tc>
-              </a:tr>
-              <a:tr h="384048">
-                <a:tc>
-                  <a:txBody>
-                    <a:bodyPr/>
-                    <a:lstStyle/>
-                    <a:p>
-                      <a:pPr>
-                        <a:defRPr sz="1100" b="0"/>
-                      </a:pPr>
-                      <a:r>
-                        <a:t>col_10</a:t>
-                      </a:r>
-                    </a:p>
-                  </a:txBody>
-                  <a:tcPr/>
-                </a:tc>
-                <a:tc>
-                  <a:txBody>
-                    <a:bodyPr/>
-                    <a:lstStyle/>
-                    <a:p>
-                      <a:pPr>
-                        <a:defRPr sz="1100" b="0"/>
-                      </a:pPr>
-                      <a:r>
-                        <a:t>1249</a:t>
-                      </a:r>
-                    </a:p>
-                  </a:txBody>
-                  <a:tcPr/>
-                </a:tc>
-                <a:tc>
-                  <a:txBody>
-                    <a:bodyPr/>
-                    <a:lstStyle/>
-                    <a:p>
-                      <a:pPr>
-                        <a:defRPr sz="1100" b="0"/>
-                      </a:pPr>
-                      <a:r>
-                        <a:t>loam</a:t>
-                      </a:r>
-                    </a:p>
-                  </a:txBody>
-                  <a:tcPr/>
-                </a:tc>
-                <a:tc>
-                  <a:txBody>
-                    <a:bodyPr/>
-                    <a:lstStyle/>
-                    <a:p>
-                      <a:pPr>
-                        <a:defRPr sz="1100" b="0"/>
-                      </a:pPr>
-                      <a:r>
-                        <a:t>8</a:t>
-                      </a:r>
-                    </a:p>
-                  </a:txBody>
-                  <a:tcPr/>
-                </a:tc>
-                <a:tc>
-                  <a:txBody>
-                    <a:bodyPr/>
-                    <a:lstStyle/>
-                    <a:p>
-                      <a:pPr>
-                        <a:defRPr sz="1100" b="0"/>
-                      </a:pPr>
-                      <a:r>
-                        <a:t>28.0</a:t>
-                      </a:r>
-                    </a:p>
-                  </a:txBody>
-                  <a:tcPr/>
-                </a:tc>
-                <a:tc>
-                  <a:txBody>
-                    <a:bodyPr/>
-                    <a:lstStyle/>
-                    <a:p>
-                      <a:pPr>
-                        <a:defRPr sz="1100" b="0"/>
-                      </a:pPr>
-                      <a:r>
-                        <a:t>22.2</a:t>
-                      </a:r>
-                    </a:p>
-                  </a:txBody>
-                  <a:tcPr/>
-                </a:tc>
-                <a:tc>
-                  <a:txBody>
-                    <a:bodyPr/>
-                    <a:lstStyle/>
-                    <a:p>
-                      <a:pPr>
-                        <a:defRPr sz="1100" b="0"/>
-                      </a:pPr>
-                      <a:r>
-                        <a:t>699</a:t>
-                      </a:r>
-                    </a:p>
-                  </a:txBody>
-                  <a:tcPr/>
-                </a:tc>
-                <a:tc>
-                  <a:txBody>
-                    <a:bodyPr/>
-                    <a:lstStyle/>
-                    <a:p>
-                      <a:pPr>
-                        <a:defRPr sz="1100" b="0"/>
-                      </a:pPr>
-                      <a:r>
-                        <a:t>-0.6</a:t>
-                      </a:r>
-                    </a:p>
-                  </a:txBody>
-                  <a:tcPr/>
-                </a:tc>
-                <a:tc>
-                  <a:txBody>
-                    <a:bodyPr/>
-                    <a:lstStyle/>
-                    <a:p>
-                      <a:pPr>
-                        <a:defRPr sz="1100" b="0"/>
-                      </a:pPr>
-                      <a:r>
-                        <a:t>53.3</a:t>
-                      </a:r>
-                    </a:p>
-                  </a:txBody>
-                  <a:tcPr/>
-                </a:tc>
-                <a:tc>
-                  <a:txBody>
-                    <a:bodyPr/>
-                    <a:lstStyle/>
-                    <a:p>
-                      <a:pPr>
-                        <a:defRPr sz="1100" b="0"/>
-                      </a:pPr>
-                      <a:r>
-                        <a:t>-0.01</a:t>
-                      </a:r>
-                    </a:p>
-                  </a:txBody>
-                  <a:tcPr/>
-                </a:tc>
-                <a:tc>
-                  <a:txBody>
-                    <a:bodyPr/>
-                    <a:lstStyle/>
-                    <a:p>
-                      <a:pPr>
-                        <a:defRPr sz="1100" b="0"/>
-                      </a:pPr>
-                      <a:r>
-                        <a:t>8.80</a:t>
-                      </a:r>
-                    </a:p>
-                  </a:txBody>
-                  <a:tcPr/>
-                </a:tc>
-              </a:tr>
-              <a:tr h="384048">
-                <a:tc>
-                  <a:txBody>
-                    <a:bodyPr/>
-                    <a:lstStyle/>
-                    <a:p>
-                      <a:pPr>
-                        <a:defRPr sz="1100" b="0"/>
-                      </a:pPr>
-                      <a:r>
-                        <a:t>col_15</a:t>
-                      </a:r>
-                    </a:p>
-                  </a:txBody>
-                  <a:tcPr/>
-                </a:tc>
-                <a:tc>
-                  <a:txBody>
-                    <a:bodyPr/>
-                    <a:lstStyle/>
-                    <a:p>
-                      <a:pPr>
-                        <a:defRPr sz="1100" b="0"/>
-                      </a:pPr>
-                      <a:r>
-                        <a:t>1273</a:t>
-                      </a:r>
-                    </a:p>
-                  </a:txBody>
-                  <a:tcPr/>
-                </a:tc>
-                <a:tc>
-                  <a:txBody>
-                    <a:bodyPr/>
-                    <a:lstStyle/>
-                    <a:p>
-                      <a:pPr>
-                        <a:defRPr sz="1100" b="0"/>
-                      </a:pPr>
-                      <a:r>
-                        <a:t>loam</a:t>
-                      </a:r>
-                    </a:p>
-                  </a:txBody>
-                  <a:tcPr/>
-                </a:tc>
-                <a:tc>
-                  <a:txBody>
-                    <a:bodyPr/>
-                    <a:lstStyle/>
-                    <a:p>
-                      <a:pPr>
-                        <a:defRPr sz="1100" b="0"/>
-                      </a:pPr>
-                      <a:r>
-                        <a:t>6</a:t>
-                      </a:r>
-                    </a:p>
-                  </a:txBody>
-                  <a:tcPr/>
-                </a:tc>
-                <a:tc>
-                  <a:txBody>
-                    <a:bodyPr/>
-                    <a:lstStyle/>
-                    <a:p>
-                      <a:pPr>
-                        <a:defRPr sz="1100" b="0"/>
-                      </a:pPr>
-                      <a:r>
-                        <a:t>28.0</a:t>
-                      </a:r>
-                    </a:p>
-                  </a:txBody>
-                  <a:tcPr/>
-                </a:tc>
-                <a:tc>
-                  <a:txBody>
-                    <a:bodyPr/>
-                    <a:lstStyle/>
-                    <a:p>
-                      <a:pPr>
-                        <a:defRPr sz="1100" b="0"/>
-                      </a:pPr>
-                      <a:r>
-                        <a:t>215.2</a:t>
-                      </a:r>
-                    </a:p>
-                  </a:txBody>
-                  <a:tcPr/>
-                </a:tc>
-                <a:tc>
-                  <a:txBody>
-                    <a:bodyPr/>
-                    <a:lstStyle/>
-                    <a:p>
-                      <a:pPr>
-                        <a:defRPr sz="1100" b="0"/>
-                      </a:pPr>
-                      <a:r>
-                        <a:t>735</a:t>
-                      </a:r>
-                    </a:p>
-                  </a:txBody>
-                  <a:tcPr/>
-                </a:tc>
-                <a:tc>
-                  <a:txBody>
-                    <a:bodyPr/>
-                    <a:lstStyle/>
-                    <a:p>
-                      <a:pPr>
-                        <a:defRPr sz="1100" b="0"/>
-                      </a:pPr>
-                      <a:r>
-                        <a:t>-1.4</a:t>
-                      </a:r>
-                    </a:p>
-                  </a:txBody>
-                  <a:tcPr/>
-                </a:tc>
-                <a:tc>
-                  <a:txBody>
-                    <a:bodyPr/>
-                    <a:lstStyle/>
-                    <a:p>
-                      <a:pPr>
-                        <a:defRPr sz="1100" b="0"/>
-                      </a:pPr>
-                      <a:r>
-                        <a:t>56.8</a:t>
-                      </a:r>
-                    </a:p>
-                  </a:txBody>
-                  <a:tcPr/>
-                </a:tc>
-                <a:tc>
-                  <a:txBody>
-                    <a:bodyPr/>
-                    <a:lstStyle/>
-                    <a:p>
-                      <a:pPr>
-                        <a:defRPr sz="1100" b="0"/>
-                      </a:pPr>
-                      <a:r>
-                        <a:t>-0.02</a:t>
-                      </a:r>
-                    </a:p>
-                  </a:txBody>
-                  <a:tcPr/>
-                </a:tc>
-                <a:tc>
-                  <a:txBody>
-                    <a:bodyPr/>
-                    <a:lstStyle/>
-                    <a:p>
-                      <a:pPr>
-                        <a:defRPr sz="1100" b="0"/>
-                      </a:pPr>
-                      <a:r>
-                        <a:t>8.80</a:t>
-                      </a:r>
-                    </a:p>
-                  </a:txBody>
-                  <a:tcPr/>
-                </a:tc>
-              </a:tr>
-              <a:tr h="384048">
-                <a:tc>
-                  <a:txBody>
-                    <a:bodyPr/>
-                    <a:lstStyle/>
-                    <a:p>
-                      <a:pPr>
-                        <a:defRPr sz="1100" b="0"/>
-                      </a:pPr>
-                      <a:r>
-                        <a:t>col_13</a:t>
-                      </a:r>
-                    </a:p>
-                  </a:txBody>
-                  <a:tcPr/>
-                </a:tc>
-                <a:tc>
-                  <a:txBody>
-                    <a:bodyPr/>
-                    <a:lstStyle/>
-                    <a:p>
-                      <a:pPr>
-                        <a:defRPr sz="1100" b="0"/>
-                      </a:pPr>
-                      <a:r>
-                        <a:t>1280</a:t>
-                      </a:r>
-                    </a:p>
-                  </a:txBody>
-                  <a:tcPr/>
-                </a:tc>
-                <a:tc>
-                  <a:txBody>
-                    <a:bodyPr/>
-                    <a:lstStyle/>
-                    <a:p>
-                      <a:pPr>
-                        <a:defRPr sz="1100" b="0"/>
-                      </a:pPr>
-                      <a:r>
-                        <a:t>loam</a:t>
-                      </a:r>
-                    </a:p>
-                  </a:txBody>
-                  <a:tcPr/>
-                </a:tc>
-                <a:tc>
-                  <a:txBody>
-                    <a:bodyPr/>
-                    <a:lstStyle/>
-                    <a:p>
-                      <a:pPr>
-                        <a:defRPr sz="1100" b="0"/>
-                      </a:pPr>
-                      <a:r>
-                        <a:t>22</a:t>
-                      </a:r>
-                    </a:p>
-                  </a:txBody>
-                  <a:tcPr/>
-                </a:tc>
-                <a:tc>
-                  <a:txBody>
-                    <a:bodyPr/>
-                    <a:lstStyle/>
-                    <a:p>
-                      <a:pPr>
-                        <a:defRPr sz="1100" b="0"/>
-                      </a:pPr>
-                      <a:r>
-                        <a:t>9.0</a:t>
-                      </a:r>
-                    </a:p>
-                  </a:txBody>
-                  <a:tcPr/>
-                </a:tc>
-                <a:tc>
-                  <a:txBody>
-                    <a:bodyPr/>
-                    <a:lstStyle/>
-                    <a:p>
-                      <a:pPr>
-                        <a:defRPr sz="1100" b="0"/>
-                      </a:pPr>
-                      <a:r>
-                        <a:t>114.5</a:t>
-                      </a:r>
-                    </a:p>
-                  </a:txBody>
-                  <a:tcPr/>
-                </a:tc>
-                <a:tc>
-                  <a:txBody>
-                    <a:bodyPr/>
-                    <a:lstStyle/>
-                    <a:p>
-                      <a:pPr>
-                        <a:defRPr sz="1100" b="0"/>
-                      </a:pPr>
-                      <a:r>
-                        <a:t>459</a:t>
-                      </a:r>
-                    </a:p>
-                  </a:txBody>
-                  <a:tcPr/>
-                </a:tc>
-                <a:tc>
-                  <a:txBody>
-                    <a:bodyPr/>
-                    <a:lstStyle/>
-                    <a:p>
-                      <a:pPr>
-                        <a:defRPr sz="1100" b="0"/>
-                      </a:pPr>
-                      <a:r>
-                        <a:t>-0.3</a:t>
-                      </a:r>
-                    </a:p>
-                  </a:txBody>
-                  <a:tcPr/>
-                </a:tc>
-                <a:tc>
-                  <a:txBody>
-                    <a:bodyPr/>
-                    <a:lstStyle/>
-                    <a:p>
-                      <a:pPr>
-                        <a:defRPr sz="1100" b="0"/>
-                      </a:pPr>
-                      <a:r>
-                        <a:t>45.4</a:t>
-                      </a:r>
-                    </a:p>
-                  </a:txBody>
-                  <a:tcPr/>
-                </a:tc>
-                <a:tc>
-                  <a:txBody>
-                    <a:bodyPr/>
-                    <a:lstStyle/>
-                    <a:p>
-                      <a:pPr>
-                        <a:defRPr sz="1100" b="0"/>
-                      </a:pPr>
-                      <a:r>
-                        <a:t>-0.01</a:t>
-                      </a:r>
-                    </a:p>
-                  </a:txBody>
-                  <a:tcPr/>
-                </a:tc>
-                <a:tc>
-                  <a:txBody>
-                    <a:bodyPr/>
-                    <a:lstStyle/>
-                    <a:p>
-                      <a:pPr>
-                        <a:defRPr sz="1100" b="0"/>
-                      </a:pPr>
-                      <a:r>
-                        <a:t>8.80</a:t>
-                      </a:r>
-                    </a:p>
-                  </a:txBody>
-                  <a:tcPr/>
-                </a:tc>
-              </a:tr>
-              <a:tr h="384048">
-                <a:tc>
-                  <a:txBody>
-                    <a:bodyPr/>
-                    <a:lstStyle/>
-                    <a:p>
-                      <a:pPr>
-                        <a:defRPr sz="1100" b="0"/>
-                      </a:pPr>
-                      <a:r>
-                        <a:t>col_14</a:t>
-                      </a:r>
-                    </a:p>
-                  </a:txBody>
-                  <a:tcPr/>
-                </a:tc>
-                <a:tc>
-                  <a:txBody>
-                    <a:bodyPr/>
-                    <a:lstStyle/>
-                    <a:p>
-                      <a:pPr>
-                        <a:defRPr sz="1100" b="0"/>
-                      </a:pPr>
-                      <a:r>
-                        <a:t>1390</a:t>
-                      </a:r>
-                    </a:p>
-                  </a:txBody>
-                  <a:tcPr/>
-                </a:tc>
-                <a:tc>
-                  <a:txBody>
-                    <a:bodyPr/>
-                    <a:lstStyle/>
-                    <a:p>
-                      <a:pPr>
-                        <a:defRPr sz="1100" b="0"/>
-                      </a:pPr>
-                      <a:r>
-                        <a:t>sandy loam</a:t>
-                      </a:r>
-                    </a:p>
-                  </a:txBody>
-                  <a:tcPr/>
-                </a:tc>
-                <a:tc>
-                  <a:txBody>
-                    <a:bodyPr/>
-                    <a:lstStyle/>
-                    <a:p>
-                      <a:pPr>
-                        <a:defRPr sz="1100" b="0"/>
-                      </a:pPr>
-                      <a:r>
-                        <a:t>8</a:t>
-                      </a:r>
-                    </a:p>
-                  </a:txBody>
-                  <a:tcPr/>
-                </a:tc>
-                <a:tc>
-                  <a:txBody>
-                    <a:bodyPr/>
-                    <a:lstStyle/>
-                    <a:p>
-                      <a:pPr>
-                        <a:defRPr sz="1100" b="0"/>
-                      </a:pPr>
-                      <a:r>
-                        <a:t>9.0</a:t>
-                      </a:r>
-                    </a:p>
-                  </a:txBody>
-                  <a:tcPr/>
-                </a:tc>
-                <a:tc>
-                  <a:txBody>
-                    <a:bodyPr/>
-                    <a:lstStyle/>
-                    <a:p>
-                      <a:pPr>
-                        <a:defRPr sz="1100" b="0"/>
-                      </a:pPr>
-                      <a:r>
-                        <a:t>0.6</a:t>
-                      </a:r>
-                    </a:p>
-                  </a:txBody>
-                  <a:tcPr/>
-                </a:tc>
-                <a:tc>
-                  <a:txBody>
-                    <a:bodyPr/>
-                    <a:lstStyle/>
-                    <a:p>
-                      <a:pPr>
-                        <a:defRPr sz="1100" b="0"/>
-                      </a:pPr>
-                      <a:r>
-                        <a:t>611</a:t>
-                      </a:r>
-                    </a:p>
-                  </a:txBody>
-                  <a:tcPr/>
-                </a:tc>
-                <a:tc>
-                  <a:txBody>
-                    <a:bodyPr/>
-                    <a:lstStyle/>
-                    <a:p>
-                      <a:pPr>
-                        <a:defRPr sz="1100" b="0"/>
-                      </a:pPr>
-                      <a:r>
-                        <a:t>-3.6</a:t>
-                      </a:r>
-                    </a:p>
-                  </a:txBody>
-                  <a:tcPr/>
-                </a:tc>
-                <a:tc>
-                  <a:txBody>
-                    <a:bodyPr/>
-                    <a:lstStyle/>
-                    <a:p>
-                      <a:pPr>
-                        <a:defRPr sz="1100" b="0"/>
-                      </a:pPr>
-                      <a:r>
-                        <a:t>77.1</a:t>
-                      </a:r>
-                    </a:p>
-                  </a:txBody>
-                  <a:tcPr/>
-                </a:tc>
-                <a:tc>
-                  <a:txBody>
-                    <a:bodyPr/>
-                    <a:lstStyle/>
-                    <a:p>
-                      <a:pPr>
-                        <a:defRPr sz="1100" b="0"/>
-                      </a:pPr>
-                      <a:r>
-                        <a:t>-0.05</a:t>
-                      </a:r>
-                    </a:p>
-                  </a:txBody>
-                  <a:tcPr/>
-                </a:tc>
-                <a:tc>
-                  <a:txBody>
-                    <a:bodyPr/>
-                    <a:lstStyle/>
-                    <a:p>
-                      <a:pPr>
-                        <a:defRPr sz="1100" b="0"/>
-                      </a:pPr>
-                      <a:r>
-                        <a:t>8.81</a:t>
-                      </a:r>
-                    </a:p>
-                  </a:txBody>
-                  <a:tcPr/>
-                </a:tc>
-              </a:tr>
-              <a:tr h="384048">
-                <a:tc>
-                  <a:txBody>
-                    <a:bodyPr/>
-                    <a:lstStyle/>
-                    <a:p>
-                      <a:pPr>
-                        <a:defRPr sz="1100" b="0"/>
-                      </a:pPr>
-                      <a:r>
-                        <a:t>col_12</a:t>
-                      </a:r>
-                    </a:p>
-                  </a:txBody>
-                  <a:tcPr/>
-                </a:tc>
-                <a:tc>
-                  <a:txBody>
-                    <a:bodyPr/>
-                    <a:lstStyle/>
-                    <a:p>
-                      <a:pPr>
-                        <a:defRPr sz="1100" b="0"/>
-                      </a:pPr>
-                      <a:r>
-                        <a:t>1428</a:t>
-                      </a:r>
-                    </a:p>
-                  </a:txBody>
-                  <a:tcPr/>
-                </a:tc>
-                <a:tc>
-                  <a:txBody>
-                    <a:bodyPr/>
-                    <a:lstStyle/>
-                    <a:p>
-                      <a:pPr>
-                        <a:defRPr sz="1100" b="0"/>
-                      </a:pPr>
-                      <a:r>
-                        <a:t>loam</a:t>
-                      </a:r>
-                    </a:p>
-                  </a:txBody>
-                  <a:tcPr/>
-                </a:tc>
-                <a:tc>
-                  <a:txBody>
-                    <a:bodyPr/>
-                    <a:lstStyle/>
-                    <a:p>
-                      <a:pPr>
-                        <a:defRPr sz="1100" b="0"/>
-                      </a:pPr>
-                      <a:r>
-                        <a:t>21</a:t>
-                      </a:r>
-                    </a:p>
-                  </a:txBody>
-                  <a:tcPr/>
-                </a:tc>
-                <a:tc>
-                  <a:txBody>
-                    <a:bodyPr/>
-                    <a:lstStyle/>
-                    <a:p>
-                      <a:pPr>
-                        <a:defRPr sz="1100" b="0"/>
-                      </a:pPr>
-                      <a:r>
-                        <a:t>9.0</a:t>
-                      </a:r>
-                    </a:p>
-                  </a:txBody>
-                  <a:tcPr/>
-                </a:tc>
-                <a:tc>
-                  <a:txBody>
-                    <a:bodyPr/>
-                    <a:lstStyle/>
-                    <a:p>
-                      <a:pPr>
-                        <a:defRPr sz="1100" b="0"/>
-                      </a:pPr>
-                      <a:r>
-                        <a:t>35.2</a:t>
-                      </a:r>
-                    </a:p>
-                  </a:txBody>
-                  <a:tcPr/>
-                </a:tc>
-                <a:tc>
-                  <a:txBody>
-                    <a:bodyPr/>
-                    <a:lstStyle/>
-                    <a:p>
-                      <a:pPr>
-                        <a:defRPr sz="1100" b="0"/>
-                      </a:pPr>
-                      <a:r>
-                        <a:t>509</a:t>
-                      </a:r>
-                    </a:p>
-                  </a:txBody>
-                  <a:tcPr/>
-                </a:tc>
-                <a:tc>
-                  <a:txBody>
-                    <a:bodyPr/>
-                    <a:lstStyle/>
-                    <a:p>
-                      <a:pPr>
-                        <a:defRPr sz="1100" b="0"/>
-                      </a:pPr>
-                      <a:r>
-                        <a:t>-0.4</a:t>
-                      </a:r>
-                    </a:p>
-                  </a:txBody>
-                  <a:tcPr/>
-                </a:tc>
-                <a:tc>
-                  <a:txBody>
-                    <a:bodyPr/>
-                    <a:lstStyle/>
-                    <a:p>
-                      <a:pPr>
-                        <a:defRPr sz="1100" b="0"/>
-                      </a:pPr>
-                      <a:r>
-                        <a:t>44.2</a:t>
-                      </a:r>
-                    </a:p>
-                  </a:txBody>
-                  <a:tcPr/>
-                </a:tc>
-                <a:tc>
-                  <a:txBody>
-                    <a:bodyPr/>
-                    <a:lstStyle/>
-                    <a:p>
-                      <a:pPr>
-                        <a:defRPr sz="1100" b="0"/>
-                      </a:pPr>
-                      <a:r>
-                        <a:t>-0.01</a:t>
-                      </a:r>
-                    </a:p>
-                  </a:txBody>
-                  <a:tcPr/>
-                </a:tc>
-                <a:tc>
-                  <a:txBody>
-                    <a:bodyPr/>
-                    <a:lstStyle/>
-                    <a:p>
-                      <a:pPr>
-                        <a:defRPr sz="1100" b="0"/>
-                      </a:pPr>
-                      <a:r>
-                        <a:t>8.80</a:t>
-                      </a:r>
-                    </a:p>
-                  </a:txBody>
-                  <a:tcPr/>
-                </a:tc>
-              </a:tr>
-              <a:tr h="384048">
-                <a:tc>
-                  <a:txBody>
-                    <a:bodyPr/>
-                    <a:lstStyle/>
-                    <a:p>
-                      <a:pPr>
-                        <a:defRPr sz="1100" b="0"/>
-                      </a:pPr>
-                      <a:r>
-                        <a:t>col_11</a:t>
-                      </a:r>
-                    </a:p>
-                  </a:txBody>
-                  <a:tcPr/>
-                </a:tc>
-                <a:tc>
-                  <a:txBody>
-                    <a:bodyPr/>
-                    <a:lstStyle/>
-                    <a:p>
-                      <a:pPr>
-                        <a:defRPr sz="1100" b="0"/>
-                      </a:pPr>
-                      <a:r>
-                        <a:t>1485</a:t>
-                      </a:r>
-                    </a:p>
-                  </a:txBody>
-                  <a:tcPr/>
-                </a:tc>
-                <a:tc>
-                  <a:txBody>
-                    <a:bodyPr/>
-                    <a:lstStyle/>
-                    <a:p>
-                      <a:pPr>
-                        <a:defRPr sz="1100" b="0"/>
-                      </a:pPr>
-                      <a:r>
-                        <a:t>sandy loam</a:t>
-                      </a:r>
-                    </a:p>
-                  </a:txBody>
-                  <a:tcPr/>
-                </a:tc>
-                <a:tc>
-                  <a:txBody>
-                    <a:bodyPr/>
-                    <a:lstStyle/>
-                    <a:p>
-                      <a:pPr>
-                        <a:defRPr sz="1100" b="0"/>
-                      </a:pPr>
-                      <a:r>
-                        <a:t>8</a:t>
-                      </a:r>
-                    </a:p>
-                  </a:txBody>
-                  <a:tcPr/>
-                </a:tc>
-                <a:tc>
-                  <a:txBody>
-                    <a:bodyPr/>
-                    <a:lstStyle/>
-                    <a:p>
-                      <a:pPr>
-                        <a:defRPr sz="1100" b="0"/>
-                      </a:pPr>
-                      <a:r>
-                        <a:t>9.0</a:t>
-                      </a:r>
-                    </a:p>
-                  </a:txBody>
-                  <a:tcPr/>
-                </a:tc>
-                <a:tc>
-                  <a:txBody>
-                    <a:bodyPr/>
-                    <a:lstStyle/>
-                    <a:p>
-                      <a:pPr>
-                        <a:defRPr sz="1100" b="0"/>
-                      </a:pPr>
-                      <a:r>
-                        <a:t>0.2</a:t>
-                      </a:r>
-                    </a:p>
-                  </a:txBody>
-                  <a:tcPr/>
-                </a:tc>
-                <a:tc>
-                  <a:txBody>
-                    <a:bodyPr/>
-                    <a:lstStyle/>
-                    <a:p>
-                      <a:pPr>
-                        <a:defRPr sz="1100" b="0"/>
-                      </a:pPr>
-                      <a:r>
-                        <a:t>1580</a:t>
-                      </a:r>
-                    </a:p>
-                  </a:txBody>
-                  <a:tcPr/>
-                </a:tc>
-                <a:tc>
-                  <a:txBody>
-                    <a:bodyPr/>
-                    <a:lstStyle/>
-                    <a:p>
-                      <a:pPr>
-                        <a:defRPr sz="1100" b="0"/>
-                      </a:pPr>
-                      <a:r>
-                        <a:t>291.2</a:t>
-                      </a:r>
-                    </a:p>
-                  </a:txBody>
-                  <a:tcPr/>
-                </a:tc>
-                <a:tc>
-                  <a:txBody>
-                    <a:bodyPr/>
-                    <a:lstStyle/>
-                    <a:p>
-                      <a:pPr>
-                        <a:defRPr sz="1100" b="0"/>
-                      </a:pPr>
-                      <a:r>
-                        <a:t>94.6</a:t>
-                      </a:r>
-                    </a:p>
-                  </a:txBody>
-                  <a:tcPr/>
-                </a:tc>
-                <a:tc>
-                  <a:txBody>
-                    <a:bodyPr/>
-                    <a:lstStyle/>
-                    <a:p>
-                      <a:pPr>
-                        <a:defRPr sz="1100" b="0"/>
-                      </a:pPr>
-                      <a:r>
-                        <a:t>0.75</a:t>
-                      </a:r>
-                    </a:p>
-                  </a:txBody>
-                  <a:tcPr/>
-                </a:tc>
-                <a:tc>
-                  <a:txBody>
-                    <a:bodyPr/>
-                    <a:lstStyle/>
-                    <a:p>
-                      <a:pPr>
-                        <a:defRPr sz="1100" b="0"/>
-                      </a:pPr>
-                      <a:r>
-                        <a:t>8.74</a:t>
-                      </a:r>
-                    </a:p>
-                  </a:txBody>
-                  <a:tcPr/>
-                </a:tc>
-              </a:tr>
-              <a:tr h="384048">
-                <a:tc>
-                  <a:txBody>
-                    <a:bodyPr/>
-                    <a:lstStyle/>
-                    <a:p>
-                      <a:pPr>
-                        <a:defRPr sz="1100" b="0"/>
-                      </a:pPr>
-                      <a:r>
-                        <a:t>col_18</a:t>
-                      </a:r>
-                    </a:p>
-                  </a:txBody>
-                  <a:tcPr/>
-                </a:tc>
-                <a:tc>
-                  <a:txBody>
-                    <a:bodyPr/>
-                    <a:lstStyle/>
-                    <a:p>
-                      <a:pPr>
-                        <a:defRPr sz="1100" b="0"/>
-                      </a:pPr>
-                      <a:r>
-                        <a:t>1564</a:t>
-                      </a:r>
-                    </a:p>
-                  </a:txBody>
-                  <a:tcPr/>
-                </a:tc>
-                <a:tc>
-                  <a:txBody>
-                    <a:bodyPr/>
-                    <a:lstStyle/>
-                    <a:p>
-                      <a:pPr>
-                        <a:defRPr sz="1100" b="0"/>
-                      </a:pPr>
-                      <a:r>
-                        <a:t>loam</a:t>
-                      </a:r>
-                    </a:p>
-                  </a:txBody>
-                  <a:tcPr/>
-                </a:tc>
-                <a:tc>
-                  <a:txBody>
-                    <a:bodyPr/>
-                    <a:lstStyle/>
-                    <a:p>
-                      <a:pPr>
-                        <a:defRPr sz="1100" b="0"/>
-                      </a:pPr>
-                      <a:r>
-                        <a:t>21</a:t>
-                      </a:r>
-                    </a:p>
-                  </a:txBody>
-                  <a:tcPr/>
-                </a:tc>
-                <a:tc>
-                  <a:txBody>
-                    <a:bodyPr/>
-                    <a:lstStyle/>
-                    <a:p>
-                      <a:pPr>
-                        <a:defRPr sz="1100" b="0"/>
-                      </a:pPr>
-                      <a:r>
-                        <a:t>9.0</a:t>
-                      </a:r>
-                    </a:p>
-                  </a:txBody>
-                  <a:tcPr/>
-                </a:tc>
-                <a:tc>
-                  <a:txBody>
-                    <a:bodyPr/>
-                    <a:lstStyle/>
-                    <a:p>
-                      <a:pPr>
-                        <a:defRPr sz="1100" b="0"/>
-                      </a:pPr>
-                      <a:r>
-                        <a:t>62.7</a:t>
-                      </a:r>
-                    </a:p>
-                  </a:txBody>
-                  <a:tcPr/>
-                </a:tc>
-                <a:tc>
-                  <a:txBody>
-                    <a:bodyPr/>
-                    <a:lstStyle/>
-                    <a:p>
-                      <a:pPr>
-                        <a:defRPr sz="1100" b="0"/>
-                      </a:pPr>
-                      <a:r>
-                        <a:t>682</a:t>
-                      </a:r>
-                    </a:p>
-                  </a:txBody>
-                  <a:tcPr/>
-                </a:tc>
-                <a:tc>
-                  <a:txBody>
-                    <a:bodyPr/>
-                    <a:lstStyle/>
-                    <a:p>
-                      <a:pPr>
-                        <a:defRPr sz="1100" b="0"/>
-                      </a:pPr>
-                      <a:r>
-                        <a:t>-2.1</a:t>
-                      </a:r>
-                    </a:p>
-                  </a:txBody>
-                  <a:tcPr/>
-                </a:tc>
-                <a:tc>
-                  <a:txBody>
-                    <a:bodyPr/>
-                    <a:lstStyle/>
-                    <a:p>
-                      <a:pPr>
-                        <a:defRPr sz="1100" b="0"/>
-                      </a:pPr>
-                      <a:r>
-                        <a:t>38.9</a:t>
-                      </a:r>
-                    </a:p>
-                  </a:txBody>
-                  <a:tcPr/>
-                </a:tc>
-                <a:tc>
-                  <a:txBody>
-                    <a:bodyPr/>
-                    <a:lstStyle/>
-                    <a:p>
-                      <a:pPr>
-                        <a:defRPr sz="1100" b="0"/>
-                      </a:pPr>
-                      <a:r>
-                        <a:t>-0.06</a:t>
-                      </a:r>
-                    </a:p>
-                  </a:txBody>
-                  <a:tcPr/>
-                </a:tc>
-                <a:tc>
-                  <a:txBody>
-                    <a:bodyPr/>
-                    <a:lstStyle/>
-                    <a:p>
-                      <a:pPr>
-                        <a:defRPr sz="1100" b="0"/>
-                      </a:pPr>
-                      <a:r>
-                        <a:t>8.81</a:t>
-                      </a:r>
-                    </a:p>
-                  </a:txBody>
-                  <a:tcPr/>
-                </a:tc>
-              </a:tr>
-              <a:tr h="384048">
-                <a:tc>
-                  <a:txBody>
-                    <a:bodyPr/>
-                    <a:lstStyle/>
-                    <a:p>
-                      <a:pPr>
-                        <a:defRPr sz="1100" b="0"/>
-                      </a:pPr>
-                      <a:r>
-                        <a:t>col_16</a:t>
-                      </a:r>
-                    </a:p>
-                  </a:txBody>
-                  <a:tcPr/>
-                </a:tc>
-                <a:tc>
-                  <a:txBody>
-                    <a:bodyPr/>
-                    <a:lstStyle/>
-                    <a:p>
-                      <a:pPr>
-                        <a:defRPr sz="1100" b="0"/>
-                      </a:pPr>
-                      <a:r>
-                        <a:t>1578</a:t>
-                      </a:r>
-                    </a:p>
-                  </a:txBody>
-                  <a:tcPr/>
-                </a:tc>
-                <a:tc>
-                  <a:txBody>
-                    <a:bodyPr/>
-                    <a:lstStyle/>
-                    <a:p>
-                      <a:pPr>
-                        <a:defRPr sz="1100" b="0"/>
-                      </a:pPr>
-                      <a:r>
-                        <a:t>sandy loam</a:t>
-                      </a:r>
-                    </a:p>
-                  </a:txBody>
-                  <a:tcPr/>
-                </a:tc>
-                <a:tc>
-                  <a:txBody>
-                    <a:bodyPr/>
-                    <a:lstStyle/>
-                    <a:p>
-                      <a:pPr>
-                        <a:defRPr sz="1100" b="0"/>
-                      </a:pPr>
-                      <a:r>
-                        <a:t>8</a:t>
-                      </a:r>
-                    </a:p>
-                  </a:txBody>
-                  <a:tcPr/>
-                </a:tc>
-                <a:tc>
-                  <a:txBody>
-                    <a:bodyPr/>
-                    <a:lstStyle/>
-                    <a:p>
-                      <a:pPr>
-                        <a:defRPr sz="1100" b="0"/>
-                      </a:pPr>
-                      <a:r>
-                        <a:t>9.0</a:t>
-                      </a:r>
-                    </a:p>
-                  </a:txBody>
-                  <a:tcPr/>
-                </a:tc>
-                <a:tc>
-                  <a:txBody>
-                    <a:bodyPr/>
-                    <a:lstStyle/>
-                    <a:p>
-                      <a:pPr>
-                        <a:defRPr sz="1100" b="0"/>
-                      </a:pPr>
-                      <a:r>
-                        <a:t>145.0</a:t>
-                      </a:r>
-                    </a:p>
-                  </a:txBody>
-                  <a:tcPr/>
-                </a:tc>
-                <a:tc>
-                  <a:txBody>
-                    <a:bodyPr/>
-                    <a:lstStyle/>
-                    <a:p>
-                      <a:pPr>
-                        <a:defRPr sz="1100" b="0"/>
-                      </a:pPr>
-                      <a:r>
-                        <a:t>941</a:t>
-                      </a:r>
-                    </a:p>
-                  </a:txBody>
-                  <a:tcPr/>
-                </a:tc>
-                <a:tc>
-                  <a:txBody>
-                    <a:bodyPr/>
-                    <a:lstStyle/>
-                    <a:p>
-                      <a:pPr>
-                        <a:defRPr sz="1100" b="0"/>
-                      </a:pPr>
-                      <a:r>
-                        <a:t>-3.6</a:t>
-                      </a:r>
-                    </a:p>
-                  </a:txBody>
-                  <a:tcPr/>
-                </a:tc>
-                <a:tc>
-                  <a:txBody>
-                    <a:bodyPr/>
-                    <a:lstStyle/>
-                    <a:p>
-                      <a:pPr>
-                        <a:defRPr sz="1100" b="0"/>
-                      </a:pPr>
-                      <a:r>
-                        <a:t>52.9</a:t>
-                      </a:r>
-                    </a:p>
-                  </a:txBody>
-                  <a:tcPr/>
-                </a:tc>
-                <a:tc>
-                  <a:txBody>
-                    <a:bodyPr/>
-                    <a:lstStyle/>
-                    <a:p>
-                      <a:pPr>
-                        <a:defRPr sz="1100" b="0"/>
-                      </a:pPr>
-                      <a:r>
-                        <a:t>-0.07</a:t>
-                      </a:r>
-                    </a:p>
-                  </a:txBody>
-                  <a:tcPr/>
-                </a:tc>
-                <a:tc>
-                  <a:txBody>
-                    <a:bodyPr/>
-                    <a:lstStyle/>
-                    <a:p>
-                      <a:pPr>
-                        <a:defRPr sz="1100" b="0"/>
-                      </a:pPr>
-                      <a:r>
-                        <a:t>8.81</a:t>
-                      </a:r>
-                    </a:p>
-                  </a:txBody>
-                  <a:tcPr/>
-                </a:tc>
-              </a:tr>
-              <a:tr h="384048">
-                <a:tc>
-                  <a:txBody>
-                    <a:bodyPr/>
-                    <a:lstStyle/>
-                    <a:p>
-                      <a:pPr>
-                        <a:defRPr sz="1100" b="0"/>
-                      </a:pPr>
-                      <a:r>
-                        <a:t>col_20</a:t>
-                      </a:r>
-                    </a:p>
-                  </a:txBody>
-                  <a:tcPr/>
-                </a:tc>
-                <a:tc>
-                  <a:txBody>
-                    <a:bodyPr/>
-                    <a:lstStyle/>
-                    <a:p>
-                      <a:pPr>
-                        <a:defRPr sz="1100" b="0"/>
-                      </a:pPr>
-                      <a:r>
-                        <a:t>1617</a:t>
-                      </a:r>
-                    </a:p>
-                  </a:txBody>
-                  <a:tcPr/>
-                </a:tc>
-                <a:tc>
-                  <a:txBody>
-                    <a:bodyPr/>
-                    <a:lstStyle/>
-                    <a:p>
-                      <a:pPr>
-                        <a:defRPr sz="1100" b="0"/>
-                      </a:pPr>
-                      <a:r>
-                        <a:t>loam</a:t>
-                      </a:r>
-                    </a:p>
-                  </a:txBody>
-                  <a:tcPr/>
-                </a:tc>
-                <a:tc>
-                  <a:txBody>
-                    <a:bodyPr/>
-                    <a:lstStyle/>
-                    <a:p>
-                      <a:pPr>
-                        <a:defRPr sz="1100" b="0"/>
-                      </a:pPr>
-                      <a:r>
-                        <a:t>20</a:t>
-                      </a:r>
-                    </a:p>
-                  </a:txBody>
-                  <a:tcPr/>
-                </a:tc>
-                <a:tc>
-                  <a:txBody>
-                    <a:bodyPr/>
-                    <a:lstStyle/>
-                    <a:p>
-                      <a:pPr>
-                        <a:defRPr sz="1100" b="0"/>
-                      </a:pPr>
-                      <a:r>
-                        <a:t>—</a:t>
-                      </a:r>
-                    </a:p>
-                  </a:txBody>
-                  <a:tcPr/>
-                </a:tc>
-                <a:tc>
-                  <a:txBody>
-                    <a:bodyPr/>
-                    <a:lstStyle/>
-                    <a:p>
-                      <a:pPr>
-                        <a:defRPr sz="1100" b="0"/>
-                      </a:pPr>
-                      <a:r>
-                        <a:t>195.5</a:t>
-                      </a:r>
-                    </a:p>
-                  </a:txBody>
-                  <a:tcPr/>
-                </a:tc>
-                <a:tc>
-                  <a:txBody>
-                    <a:bodyPr/>
-                    <a:lstStyle/>
-                    <a:p>
-                      <a:pPr>
-                        <a:defRPr sz="1100" b="0"/>
-                      </a:pPr>
-                      <a:r>
-                        <a:t>619</a:t>
-                      </a:r>
-                    </a:p>
-                  </a:txBody>
-                  <a:tcPr/>
-                </a:tc>
-                <a:tc>
-                  <a:txBody>
-                    <a:bodyPr/>
-                    <a:lstStyle/>
-                    <a:p>
-                      <a:pPr>
-                        <a:defRPr sz="1100" b="0"/>
-                      </a:pPr>
-                      <a:r>
-                        <a:t>-0.5</a:t>
-                      </a:r>
-                    </a:p>
-                  </a:txBody>
-                  <a:tcPr/>
-                </a:tc>
-                <a:tc>
-                  <a:txBody>
-                    <a:bodyPr/>
-                    <a:lstStyle/>
-                    <a:p>
-                      <a:pPr>
-                        <a:defRPr sz="1100" b="0"/>
-                      </a:pPr>
-                      <a:r>
-                        <a:t>36.0</a:t>
-                      </a:r>
-                    </a:p>
-                  </a:txBody>
-                  <a:tcPr/>
-                </a:tc>
-                <a:tc>
-                  <a:txBody>
-                    <a:bodyPr/>
-                    <a:lstStyle/>
-                    <a:p>
-                      <a:pPr>
-                        <a:defRPr sz="1100" b="0"/>
-                      </a:pPr>
-                      <a:r>
-                        <a:t>-0.01</a:t>
-                      </a:r>
-                    </a:p>
-                  </a:txBody>
-                  <a:tcPr/>
-                </a:tc>
-                <a:tc>
-                  <a:txBody>
-                    <a:bodyPr/>
-                    <a:lstStyle/>
-                    <a:p>
-                      <a:pPr>
-                        <a:defRPr sz="1100" b="0"/>
-                      </a:pPr>
-                      <a:r>
-                        <a:t>8.80</a:t>
-                      </a:r>
-                    </a:p>
-                  </a:txBody>
-                  <a:tcPr/>
-                </a:tc>
-              </a:tr>
-              <a:tr h="384048">
-                <a:tc>
-                  <a:txBody>
-                    <a:bodyPr/>
-                    <a:lstStyle/>
-                    <a:p>
-                      <a:pPr>
-                        <a:defRPr sz="1100" b="0"/>
-                      </a:pPr>
-                      <a:r>
-                        <a:t>col_19</a:t>
-                      </a:r>
-                    </a:p>
-                  </a:txBody>
-                  <a:tcPr/>
-                </a:tc>
-                <a:tc>
-                  <a:txBody>
-                    <a:bodyPr/>
-                    <a:lstStyle/>
-                    <a:p>
-                      <a:pPr>
-                        <a:defRPr sz="1100" b="0"/>
-                      </a:pPr>
-                      <a:r>
-                        <a:t>1792</a:t>
-                      </a:r>
-                    </a:p>
-                  </a:txBody>
-                  <a:tcPr/>
-                </a:tc>
-                <a:tc>
-                  <a:txBody>
-                    <a:bodyPr/>
-                    <a:lstStyle/>
-                    <a:p>
-                      <a:pPr>
-                        <a:defRPr sz="1100" b="0"/>
-                      </a:pPr>
-                      <a:r>
-                        <a:t>sandy loam</a:t>
-                      </a:r>
-                    </a:p>
-                  </a:txBody>
-                  <a:tcPr/>
-                </a:tc>
-                <a:tc>
-                  <a:txBody>
-                    <a:bodyPr/>
-                    <a:lstStyle/>
-                    <a:p>
-                      <a:pPr>
-                        <a:defRPr sz="1100" b="0"/>
-                      </a:pPr>
-                      <a:r>
-                        <a:t>20</a:t>
-                      </a:r>
-                    </a:p>
-                  </a:txBody>
-                  <a:tcPr/>
-                </a:tc>
-                <a:tc>
-                  <a:txBody>
-                    <a:bodyPr/>
-                    <a:lstStyle/>
-                    <a:p>
-                      <a:pPr>
-                        <a:defRPr sz="1100" b="0"/>
-                      </a:pPr>
-                      <a:r>
-                        <a:t>9.0</a:t>
-                      </a:r>
-                    </a:p>
-                  </a:txBody>
-                  <a:tcPr/>
-                </a:tc>
-                <a:tc>
-                  <a:txBody>
-                    <a:bodyPr/>
-                    <a:lstStyle/>
-                    <a:p>
-                      <a:pPr>
-                        <a:defRPr sz="1100" b="0"/>
-                      </a:pPr>
-                      <a:r>
-                        <a:t>22.7</a:t>
-                      </a:r>
-                    </a:p>
-                  </a:txBody>
-                  <a:tcPr/>
-                </a:tc>
-                <a:tc>
-                  <a:txBody>
-                    <a:bodyPr/>
-                    <a:lstStyle/>
-                    <a:p>
-                      <a:pPr>
-                        <a:defRPr sz="1100" b="0"/>
-                      </a:pPr>
-                      <a:r>
-                        <a:t>975</a:t>
-                      </a:r>
-                    </a:p>
-                  </a:txBody>
-                  <a:tcPr/>
-                </a:tc>
-                <a:tc>
-                  <a:txBody>
-                    <a:bodyPr/>
-                    <a:lstStyle/>
-                    <a:p>
-                      <a:pPr>
-                        <a:defRPr sz="1100" b="0"/>
-                      </a:pPr>
-                      <a:r>
-                        <a:t>-3.6</a:t>
-                      </a:r>
-                    </a:p>
-                  </a:txBody>
-                  <a:tcPr/>
-                </a:tc>
-                <a:tc>
-                  <a:txBody>
-                    <a:bodyPr/>
-                    <a:lstStyle/>
-                    <a:p>
-                      <a:pPr>
-                        <a:defRPr sz="1100" b="0"/>
-                      </a:pPr>
-                      <a:r>
-                        <a:t>56.0</a:t>
-                      </a:r>
-                    </a:p>
-                  </a:txBody>
-                  <a:tcPr/>
-                </a:tc>
-                <a:tc>
-                  <a:txBody>
-                    <a:bodyPr/>
-                    <a:lstStyle/>
-                    <a:p>
-                      <a:pPr>
-                        <a:defRPr sz="1100" b="0"/>
-                      </a:pPr>
-                      <a:r>
-                        <a:t>-0.07</a:t>
-                      </a:r>
-                    </a:p>
-                  </a:txBody>
-                  <a:tcPr/>
-                </a:tc>
-                <a:tc>
-                  <a:txBody>
-                    <a:bodyPr/>
-                    <a:lstStyle/>
-                    <a:p>
-                      <a:pPr>
-                        <a:defRPr sz="1100" b="0"/>
-                      </a:pPr>
-                      <a:r>
-                        <a:t>8.81</a:t>
-                      </a:r>
-                    </a:p>
-                  </a:txBody>
-                  <a:tcPr/>
-                </a:tc>
-              </a:tr>
-              <a:tr h="384048">
-                <a:tc>
-                  <a:txBody>
-                    <a:bodyPr/>
-                    <a:lstStyle/>
-                    <a:p>
-                      <a:pPr>
-                        <a:defRPr sz="1100" b="0"/>
-                      </a:pPr>
-                      <a:r>
-                        <a:t>col_17</a:t>
-                      </a:r>
-                    </a:p>
-                  </a:txBody>
-                  <a:tcPr/>
-                </a:tc>
-                <a:tc>
-                  <a:txBody>
-                    <a:bodyPr/>
-                    <a:lstStyle/>
-                    <a:p>
-                      <a:pPr>
-                        <a:defRPr sz="1100" b="0"/>
-                      </a:pPr>
-                      <a:r>
-                        <a:t>1868</a:t>
-                      </a:r>
-                    </a:p>
-                  </a:txBody>
-                  <a:tcPr/>
-                </a:tc>
-                <a:tc>
-                  <a:txBody>
-                    <a:bodyPr/>
-                    <a:lstStyle/>
-                    <a:p>
-                      <a:pPr>
-                        <a:defRPr sz="1100" b="0"/>
-                      </a:pPr>
-                      <a:r>
-                        <a:t>loam</a:t>
-                      </a:r>
-                    </a:p>
-                  </a:txBody>
-                  <a:tcPr/>
-                </a:tc>
-                <a:tc>
-                  <a:txBody>
-                    <a:bodyPr/>
-                    <a:lstStyle/>
-                    <a:p>
-                      <a:pPr>
-                        <a:defRPr sz="1100" b="0"/>
-                      </a:pPr>
-                      <a:r>
-                        <a:t>20</a:t>
-                      </a:r>
-                    </a:p>
-                  </a:txBody>
-                  <a:tcPr/>
-                </a:tc>
-                <a:tc>
-                  <a:txBody>
-                    <a:bodyPr/>
-                    <a:lstStyle/>
-                    <a:p>
-                      <a:pPr>
-                        <a:defRPr sz="1100" b="0"/>
-                      </a:pPr>
-                      <a:r>
-                        <a:t>28.0</a:t>
-                      </a:r>
-                    </a:p>
-                  </a:txBody>
-                  <a:tcPr/>
-                </a:tc>
-                <a:tc>
-                  <a:txBody>
-                    <a:bodyPr/>
-                    <a:lstStyle/>
-                    <a:p>
-                      <a:pPr>
-                        <a:defRPr sz="1100" b="0"/>
-                      </a:pPr>
-                      <a:r>
-                        <a:t>1.5</a:t>
-                      </a:r>
-                    </a:p>
-                  </a:txBody>
-                  <a:tcPr/>
-                </a:tc>
-                <a:tc>
-                  <a:txBody>
-                    <a:bodyPr/>
-                    <a:lstStyle/>
-                    <a:p>
-                      <a:pPr>
-                        <a:defRPr sz="1100" b="0"/>
-                      </a:pPr>
-                      <a:r>
-                        <a:t>1153</a:t>
-                      </a:r>
-                    </a:p>
-                  </a:txBody>
-                  <a:tcPr/>
-                </a:tc>
-                <a:tc>
-                  <a:txBody>
-                    <a:bodyPr/>
-                    <a:lstStyle/>
-                    <a:p>
-                      <a:pPr>
-                        <a:defRPr sz="1100" b="0"/>
-                      </a:pPr>
-                      <a:r>
-                        <a:t>-3.4</a:t>
-                      </a:r>
-                    </a:p>
-                  </a:txBody>
-                  <a:tcPr/>
-                </a:tc>
-                <a:tc>
-                  <a:txBody>
-                    <a:bodyPr/>
-                    <a:lstStyle/>
-                    <a:p>
-                      <a:pPr>
-                        <a:defRPr sz="1100" b="0"/>
-                      </a:pPr>
-                      <a:r>
-                        <a:t>76.4</a:t>
-                      </a:r>
-                    </a:p>
-                  </a:txBody>
-                  <a:tcPr/>
-                </a:tc>
-                <a:tc>
-                  <a:txBody>
-                    <a:bodyPr/>
-                    <a:lstStyle/>
-                    <a:p>
-                      <a:pPr>
-                        <a:defRPr sz="1100" b="0"/>
-                      </a:pPr>
-                      <a:r>
-                        <a:t>-0.05</a:t>
-                      </a:r>
-                    </a:p>
-                  </a:txBody>
-                  <a:tcPr/>
-                </a:tc>
-                <a:tc>
-                  <a:txBody>
-                    <a:bodyPr/>
-                    <a:lstStyle/>
-                    <a:p>
-                      <a:pPr>
-                        <a:defRPr sz="1100" b="0"/>
-                      </a:pPr>
-                      <a:r>
-                        <a:t>8.81</a:t>
                       </a:r>
                     </a:p>
                   </a:txBody>
@@ -10478,6 +6846,98 @@
           </a:graphicData>
         </a:graphic>
       </p:graphicFrame>
+      <p:sp>
+        <p:nvSpPr>
+          <p:cNvPr id="5" name="TextBox 4"/>
+          <p:cNvSpPr txBox="1"/>
+          <p:nvPr/>
+        </p:nvSpPr>
+        <p:spPr>
+          <a:xfrm>
+            <a:off x="457200" y="3200400"/>
+            <a:ext cx="11277295" cy="2011680"/>
+          </a:xfrm>
+          <a:prstGeom prst="rect">
+            <a:avLst/>
+          </a:prstGeom>
+          <a:noFill/>
+        </p:spPr>
+        <p:txBody>
+          <a:bodyPr wrap="square">
+            <a:spAutoFit/>
+          </a:bodyPr>
+          <a:lstStyle/>
+          <a:p>
+            <a:pPr>
+              <a:spcAft>
+                <a:spcPts val="600"/>
+              </a:spcAft>
+            </a:pPr>
+            <a:r>
+              <a:rPr b="1" sz="1400">
+                <a:solidFill>
+                  <a:srgbClr val="2C7FB8"/>
+                </a:solidFill>
+              </a:rPr>
+              <a:t>wet basin:  </a:t>
+            </a:r>
+            <a:r>
+              <a:rPr sz="1400">
+                <a:solidFill>
+                  <a:srgbClr val="0F172A"/>
+                </a:solidFill>
+              </a:rPr>
+              <a:t>recharge is CLAY-limited — water is ample; the impeding layer decides</a:t>
+            </a:r>
+          </a:p>
+          <a:p>
+            <a:pPr>
+              <a:spcAft>
+                <a:spcPts val="600"/>
+              </a:spcAft>
+            </a:pPr>
+            <a:r>
+              <a:rPr b="1" sz="1400">
+                <a:solidFill>
+                  <a:srgbClr val="2C7FB8"/>
+                </a:solidFill>
+              </a:rPr>
+              <a:t>dry basin:  </a:t>
+            </a:r>
+            <a:r>
+              <a:rPr sz="1400">
+                <a:solidFill>
+                  <a:srgbClr val="0F172A"/>
+                </a:solidFill>
+              </a:rPr>
+              <a:t>recharge is Ksat-limited (threshold) — only the most permeable soil recharges</a:t>
+            </a:r>
+          </a:p>
+          <a:p>
+            <a:pPr>
+              <a:spcAft>
+                <a:spcPts val="600"/>
+              </a:spcAft>
+            </a:pPr>
+            <a:r>
+              <a:rPr b="1" sz="1400">
+                <a:solidFill>
+                  <a:srgbClr val="2C7FB8"/>
+                </a:solidFill>
+              </a:rPr>
+              <a:t>controlled sweep:  </a:t>
+            </a:r>
+            <a:r>
+              <a:rPr sz="1400">
+                <a:solidFill>
+                  <a:srgbClr val="0F172A"/>
+                </a:solidFill>
+              </a:rPr>
+              <a:t>confirms causality: clay 5→55% collapses recharge 755→9 mm/yr with everything else fixed</a:t>
+            </a:r>
+          </a:p>
+        </p:txBody>
+      </p:sp>
     </p:spTree>
   </p:cSld>
   <p:clrMapOvr>
@@ -10529,7 +6989,7 @@
                   <a:srgbClr val="0F172A"/>
                 </a:solidFill>
               </a:rPr>
-              <a:t>Appendix A2 — Naches — Fan warm start: columns &amp; results</a:t>
+              <a:t>Appendix A1 — Naches: columns &amp; results</a:t>
             </a:r>
           </a:p>
         </p:txBody>
@@ -10885,52 +7345,52 @@
                         <a:defRPr sz="1100" b="0"/>
                       </a:pPr>
                       <a:r>
-                        <a:t>-0.0</a:t>
-                      </a:r>
-                    </a:p>
-                  </a:txBody>
-                  <a:tcPr/>
-                </a:tc>
-                <a:tc>
-                  <a:txBody>
-                    <a:bodyPr/>
-                    <a:lstStyle/>
-                    <a:p>
-                      <a:pPr>
-                        <a:defRPr sz="1100" b="0"/>
-                      </a:pPr>
-                      <a:r>
-                        <a:t>21.4</a:t>
-                      </a:r>
-                    </a:p>
-                  </a:txBody>
-                  <a:tcPr/>
-                </a:tc>
-                <a:tc>
-                  <a:txBody>
-                    <a:bodyPr/>
-                    <a:lstStyle/>
-                    <a:p>
-                      <a:pPr>
-                        <a:defRPr sz="1100" b="0"/>
-                      </a:pPr>
-                      <a:r>
-                        <a:t>-0.00</a:t>
-                      </a:r>
-                    </a:p>
-                  </a:txBody>
-                  <a:tcPr/>
-                </a:tc>
-                <a:tc>
-                  <a:txBody>
-                    <a:bodyPr/>
-                    <a:lstStyle/>
-                    <a:p>
-                      <a:pPr>
-                        <a:defRPr sz="1100" b="0"/>
-                      </a:pPr>
-                      <a:r>
-                        <a:t>28.80</a:t>
+                        <a:t>-0.2</a:t>
+                      </a:r>
+                    </a:p>
+                  </a:txBody>
+                  <a:tcPr/>
+                </a:tc>
+                <a:tc>
+                  <a:txBody>
+                    <a:bodyPr/>
+                    <a:lstStyle/>
+                    <a:p>
+                      <a:pPr>
+                        <a:defRPr sz="1100" b="0"/>
+                      </a:pPr>
+                      <a:r>
+                        <a:t>23.5</a:t>
+                      </a:r>
+                    </a:p>
+                  </a:txBody>
+                  <a:tcPr/>
+                </a:tc>
+                <a:tc>
+                  <a:txBody>
+                    <a:bodyPr/>
+                    <a:lstStyle/>
+                    <a:p>
+                      <a:pPr>
+                        <a:defRPr sz="1100" b="0"/>
+                      </a:pPr>
+                      <a:r>
+                        <a:t>-0.01</a:t>
+                      </a:r>
+                    </a:p>
+                  </a:txBody>
+                  <a:tcPr/>
+                </a:tc>
+                <a:tc>
+                  <a:txBody>
+                    <a:bodyPr/>
+                    <a:lstStyle/>
+                    <a:p>
+                      <a:pPr>
+                        <a:defRPr sz="1100" b="0"/>
+                      </a:pPr>
+                      <a:r>
+                        <a:t>8.80</a:t>
                       </a:r>
                     </a:p>
                   </a:txBody>
@@ -11052,52 +7512,52 @@
                         <a:defRPr sz="1100" b="0"/>
                       </a:pPr>
                       <a:r>
-                        <a:t>-84.8</a:t>
-                      </a:r>
-                    </a:p>
-                  </a:txBody>
-                  <a:tcPr/>
-                </a:tc>
-                <a:tc>
-                  <a:txBody>
-                    <a:bodyPr/>
-                    <a:lstStyle/>
-                    <a:p>
-                      <a:pPr>
-                        <a:defRPr sz="1100" b="0"/>
-                      </a:pPr>
-                      <a:r>
-                        <a:t>158.2</a:t>
-                      </a:r>
-                    </a:p>
-                  </a:txBody>
-                  <a:tcPr/>
-                </a:tc>
-                <a:tc>
-                  <a:txBody>
-                    <a:bodyPr/>
-                    <a:lstStyle/>
-                    <a:p>
-                      <a:pPr>
-                        <a:defRPr sz="1100" b="0"/>
-                      </a:pPr>
-                      <a:r>
-                        <a:t>-1.15</a:t>
-                      </a:r>
-                    </a:p>
-                  </a:txBody>
-                  <a:tcPr/>
-                </a:tc>
-                <a:tc>
-                  <a:txBody>
-                    <a:bodyPr/>
-                    <a:lstStyle/>
-                    <a:p>
-                      <a:pPr>
-                        <a:defRPr sz="1100" b="0"/>
-                      </a:pPr>
-                      <a:r>
-                        <a:t>4.16</a:t>
+                        <a:t>-0.2</a:t>
+                      </a:r>
+                    </a:p>
+                  </a:txBody>
+                  <a:tcPr/>
+                </a:tc>
+                <a:tc>
+                  <a:txBody>
+                    <a:bodyPr/>
+                    <a:lstStyle/>
+                    <a:p>
+                      <a:pPr>
+                        <a:defRPr sz="1100" b="0"/>
+                      </a:pPr>
+                      <a:r>
+                        <a:t>39.5</a:t>
+                      </a:r>
+                    </a:p>
+                  </a:txBody>
+                  <a:tcPr/>
+                </a:tc>
+                <a:tc>
+                  <a:txBody>
+                    <a:bodyPr/>
+                    <a:lstStyle/>
+                    <a:p>
+                      <a:pPr>
+                        <a:defRPr sz="1100" b="0"/>
+                      </a:pPr>
+                      <a:r>
+                        <a:t>-0.00</a:t>
+                      </a:r>
+                    </a:p>
+                  </a:txBody>
+                  <a:tcPr/>
+                </a:tc>
+                <a:tc>
+                  <a:txBody>
+                    <a:bodyPr/>
+                    <a:lstStyle/>
+                    <a:p>
+                      <a:pPr>
+                        <a:defRPr sz="1100" b="0"/>
+                      </a:pPr>
+                      <a:r>
+                        <a:t>8.80</a:t>
                       </a:r>
                     </a:p>
                   </a:txBody>
@@ -11219,22 +7679,22 @@
                         <a:defRPr sz="1100" b="0"/>
                       </a:pPr>
                       <a:r>
-                        <a:t>-0.6</a:t>
-                      </a:r>
-                    </a:p>
-                  </a:txBody>
-                  <a:tcPr/>
-                </a:tc>
-                <a:tc>
-                  <a:txBody>
-                    <a:bodyPr/>
-                    <a:lstStyle/>
-                    <a:p>
-                      <a:pPr>
-                        <a:defRPr sz="1100" b="0"/>
-                      </a:pPr>
-                      <a:r>
-                        <a:t>83.0</a:t>
+                        <a:t>-0.2</a:t>
+                      </a:r>
+                    </a:p>
+                  </a:txBody>
+                  <a:tcPr/>
+                </a:tc>
+                <a:tc>
+                  <a:txBody>
+                    <a:bodyPr/>
+                    <a:lstStyle/>
+                    <a:p>
+                      <a:pPr>
+                        <a:defRPr sz="1100" b="0"/>
+                      </a:pPr>
+                      <a:r>
+                        <a:t>23.5</a:t>
                       </a:r>
                     </a:p>
                   </a:txBody>
@@ -11264,7 +7724,7 @@
                         <a:defRPr sz="1100" b="0"/>
                       </a:pPr>
                       <a:r>
-                        <a:t>4.79</a:t>
+                        <a:t>8.80</a:t>
                       </a:r>
                     </a:p>
                   </a:txBody>
@@ -11386,52 +7846,52 @@
                         <a:defRPr sz="1100" b="0"/>
                       </a:pPr>
                       <a:r>
-                        <a:t>486.1</a:t>
-                      </a:r>
-                    </a:p>
-                  </a:txBody>
-                  <a:tcPr/>
-                </a:tc>
-                <a:tc>
-                  <a:txBody>
-                    <a:bodyPr/>
-                    <a:lstStyle/>
-                    <a:p>
-                      <a:pPr>
-                        <a:defRPr sz="1100" b="0"/>
-                      </a:pPr>
-                      <a:r>
-                        <a:t>152.3</a:t>
-                      </a:r>
-                    </a:p>
-                  </a:txBody>
-                  <a:tcPr/>
-                </a:tc>
-                <a:tc>
-                  <a:txBody>
-                    <a:bodyPr/>
-                    <a:lstStyle/>
-                    <a:p>
-                      <a:pPr>
-                        <a:defRPr sz="1100" b="0"/>
-                      </a:pPr>
-                      <a:r>
-                        <a:t>0.76</a:t>
-                      </a:r>
-                    </a:p>
-                  </a:txBody>
-                  <a:tcPr/>
-                </a:tc>
-                <a:tc>
-                  <a:txBody>
-                    <a:bodyPr/>
-                    <a:lstStyle/>
-                    <a:p>
-                      <a:pPr>
-                        <a:defRPr sz="1100" b="0"/>
-                      </a:pPr>
-                      <a:r>
-                        <a:t>4.05</a:t>
+                        <a:t>-0.6</a:t>
+                      </a:r>
+                    </a:p>
+                  </a:txBody>
+                  <a:tcPr/>
+                </a:tc>
+                <a:tc>
+                  <a:txBody>
+                    <a:bodyPr/>
+                    <a:lstStyle/>
+                    <a:p>
+                      <a:pPr>
+                        <a:defRPr sz="1100" b="0"/>
+                      </a:pPr>
+                      <a:r>
+                        <a:t>35.3</a:t>
+                      </a:r>
+                    </a:p>
+                  </a:txBody>
+                  <a:tcPr/>
+                </a:tc>
+                <a:tc>
+                  <a:txBody>
+                    <a:bodyPr/>
+                    <a:lstStyle/>
+                    <a:p>
+                      <a:pPr>
+                        <a:defRPr sz="1100" b="0"/>
+                      </a:pPr>
+                      <a:r>
+                        <a:t>-0.02</a:t>
+                      </a:r>
+                    </a:p>
+                  </a:txBody>
+                  <a:tcPr/>
+                </a:tc>
+                <a:tc>
+                  <a:txBody>
+                    <a:bodyPr/>
+                    <a:lstStyle/>
+                    <a:p>
+                      <a:pPr>
+                        <a:defRPr sz="1100" b="0"/>
+                      </a:pPr>
+                      <a:r>
+                        <a:t>8.80</a:t>
                       </a:r>
                     </a:p>
                   </a:txBody>
@@ -11568,7 +8028,7 @@
                         <a:defRPr sz="1100" b="0"/>
                       </a:pPr>
                       <a:r>
-                        <a:t>165.1</a:t>
+                        <a:t>40.7</a:t>
                       </a:r>
                     </a:p>
                   </a:txBody>
@@ -11598,7 +8058,7 @@
                         <a:defRPr sz="1100" b="0"/>
                       </a:pPr>
                       <a:r>
-                        <a:t>3.94</a:t>
+                        <a:t>8.80</a:t>
                       </a:r>
                     </a:p>
                   </a:txBody>
@@ -11720,52 +8180,52 @@
                         <a:defRPr sz="1100" b="0"/>
                       </a:pPr>
                       <a:r>
-                        <a:t>900.2</a:t>
-                      </a:r>
-                    </a:p>
-                  </a:txBody>
-                  <a:tcPr/>
-                </a:tc>
-                <a:tc>
-                  <a:txBody>
-                    <a:bodyPr/>
-                    <a:lstStyle/>
-                    <a:p>
-                      <a:pPr>
-                        <a:defRPr sz="1100" b="0"/>
-                      </a:pPr>
-                      <a:r>
-                        <a:t>363.5</a:t>
-                      </a:r>
-                    </a:p>
-                  </a:txBody>
-                  <a:tcPr/>
-                </a:tc>
-                <a:tc>
-                  <a:txBody>
-                    <a:bodyPr/>
-                    <a:lstStyle/>
-                    <a:p>
-                      <a:pPr>
-                        <a:defRPr sz="1100" b="0"/>
-                      </a:pPr>
-                      <a:r>
-                        <a:t>0.71</a:t>
-                      </a:r>
-                    </a:p>
-                  </a:txBody>
-                  <a:tcPr/>
-                </a:tc>
-                <a:tc>
-                  <a:txBody>
-                    <a:bodyPr/>
-                    <a:lstStyle/>
-                    <a:p>
-                      <a:pPr>
-                        <a:defRPr sz="1100" b="0"/>
-                      </a:pPr>
-                      <a:r>
-                        <a:t>3.60</a:t>
+                        <a:t>-0.2</a:t>
+                      </a:r>
+                    </a:p>
+                  </a:txBody>
+                  <a:tcPr/>
+                </a:tc>
+                <a:tc>
+                  <a:txBody>
+                    <a:bodyPr/>
+                    <a:lstStyle/>
+                    <a:p>
+                      <a:pPr>
+                        <a:defRPr sz="1100" b="0"/>
+                      </a:pPr>
+                      <a:r>
+                        <a:t>89.8</a:t>
+                      </a:r>
+                    </a:p>
+                  </a:txBody>
+                  <a:tcPr/>
+                </a:tc>
+                <a:tc>
+                  <a:txBody>
+                    <a:bodyPr/>
+                    <a:lstStyle/>
+                    <a:p>
+                      <a:pPr>
+                        <a:defRPr sz="1100" b="0"/>
+                      </a:pPr>
+                      <a:r>
+                        <a:t>-0.00</a:t>
+                      </a:r>
+                    </a:p>
+                  </a:txBody>
+                  <a:tcPr/>
+                </a:tc>
+                <a:tc>
+                  <a:txBody>
+                    <a:bodyPr/>
+                    <a:lstStyle/>
+                    <a:p>
+                      <a:pPr>
+                        <a:defRPr sz="1100" b="0"/>
+                      </a:pPr>
+                      <a:r>
+                        <a:t>8.80</a:t>
                       </a:r>
                     </a:p>
                   </a:txBody>
@@ -11887,52 +8347,52 @@
                         <a:defRPr sz="1100" b="0"/>
                       </a:pPr>
                       <a:r>
-                        <a:t>338.8</a:t>
-                      </a:r>
-                    </a:p>
-                  </a:txBody>
-                  <a:tcPr/>
-                </a:tc>
-                <a:tc>
-                  <a:txBody>
-                    <a:bodyPr/>
-                    <a:lstStyle/>
-                    <a:p>
-                      <a:pPr>
-                        <a:defRPr sz="1100" b="0"/>
-                      </a:pPr>
-                      <a:r>
-                        <a:t>239.9</a:t>
-                      </a:r>
-                    </a:p>
-                  </a:txBody>
-                  <a:tcPr/>
-                </a:tc>
-                <a:tc>
-                  <a:txBody>
-                    <a:bodyPr/>
-                    <a:lstStyle/>
-                    <a:p>
-                      <a:pPr>
-                        <a:defRPr sz="1100" b="0"/>
-                      </a:pPr>
-                      <a:r>
-                        <a:t>0.59</a:t>
-                      </a:r>
-                    </a:p>
-                  </a:txBody>
-                  <a:tcPr/>
-                </a:tc>
-                <a:tc>
-                  <a:txBody>
-                    <a:bodyPr/>
-                    <a:lstStyle/>
-                    <a:p>
-                      <a:pPr>
-                        <a:defRPr sz="1100" b="0"/>
-                      </a:pPr>
-                      <a:r>
-                        <a:t>3.56</a:t>
+                        <a:t>-1.5</a:t>
+                      </a:r>
+                    </a:p>
+                  </a:txBody>
+                  <a:tcPr/>
+                </a:tc>
+                <a:tc>
+                  <a:txBody>
+                    <a:bodyPr/>
+                    <a:lstStyle/>
+                    <a:p>
+                      <a:pPr>
+                        <a:defRPr sz="1100" b="0"/>
+                      </a:pPr>
+                      <a:r>
+                        <a:t>52.6</a:t>
+                      </a:r>
+                    </a:p>
+                  </a:txBody>
+                  <a:tcPr/>
+                </a:tc>
+                <a:tc>
+                  <a:txBody>
+                    <a:bodyPr/>
+                    <a:lstStyle/>
+                    <a:p>
+                      <a:pPr>
+                        <a:defRPr sz="1100" b="0"/>
+                      </a:pPr>
+                      <a:r>
+                        <a:t>-0.03</a:t>
+                      </a:r>
+                    </a:p>
+                  </a:txBody>
+                  <a:tcPr/>
+                </a:tc>
+                <a:tc>
+                  <a:txBody>
+                    <a:bodyPr/>
+                    <a:lstStyle/>
+                    <a:p>
+                      <a:pPr>
+                        <a:defRPr sz="1100" b="0"/>
+                      </a:pPr>
+                      <a:r>
+                        <a:t>8.81</a:t>
                       </a:r>
                     </a:p>
                   </a:txBody>
@@ -12054,52 +8514,52 @@
                         <a:defRPr sz="1100" b="0"/>
                       </a:pPr>
                       <a:r>
-                        <a:t>349.5</a:t>
-                      </a:r>
-                    </a:p>
-                  </a:txBody>
-                  <a:tcPr/>
-                </a:tc>
-                <a:tc>
-                  <a:txBody>
-                    <a:bodyPr/>
-                    <a:lstStyle/>
-                    <a:p>
-                      <a:pPr>
-                        <a:defRPr sz="1100" b="0"/>
-                      </a:pPr>
-                      <a:r>
-                        <a:t>0.4</a:t>
-                      </a:r>
-                    </a:p>
-                  </a:txBody>
-                  <a:tcPr/>
-                </a:tc>
-                <a:tc>
-                  <a:txBody>
-                    <a:bodyPr/>
-                    <a:lstStyle/>
-                    <a:p>
-                      <a:pPr>
-                        <a:defRPr sz="1100" b="0"/>
-                      </a:pPr>
-                      <a:r>
-                        <a:t>1.00</a:t>
-                      </a:r>
-                    </a:p>
-                  </a:txBody>
-                  <a:tcPr/>
-                </a:tc>
-                <a:tc>
-                  <a:txBody>
-                    <a:bodyPr/>
-                    <a:lstStyle/>
-                    <a:p>
-                      <a:pPr>
-                        <a:defRPr sz="1100" b="0"/>
-                      </a:pPr>
-                      <a:r>
-                        <a:t>27.59</a:t>
+                        <a:t>-0.0</a:t>
+                      </a:r>
+                    </a:p>
+                  </a:txBody>
+                  <a:tcPr/>
+                </a:tc>
+                <a:tc>
+                  <a:txBody>
+                    <a:bodyPr/>
+                    <a:lstStyle/>
+                    <a:p>
+                      <a:pPr>
+                        <a:defRPr sz="1100" b="0"/>
+                      </a:pPr>
+                      <a:r>
+                        <a:t>54.7</a:t>
+                      </a:r>
+                    </a:p>
+                  </a:txBody>
+                  <a:tcPr/>
+                </a:tc>
+                <a:tc>
+                  <a:txBody>
+                    <a:bodyPr/>
+                    <a:lstStyle/>
+                    <a:p>
+                      <a:pPr>
+                        <a:defRPr sz="1100" b="0"/>
+                      </a:pPr>
+                      <a:r>
+                        <a:t>-0.00</a:t>
+                      </a:r>
+                    </a:p>
+                  </a:txBody>
+                  <a:tcPr/>
+                </a:tc>
+                <a:tc>
+                  <a:txBody>
+                    <a:bodyPr/>
+                    <a:lstStyle/>
+                    <a:p>
+                      <a:pPr>
+                        <a:defRPr sz="1100" b="0"/>
+                      </a:pPr>
+                      <a:r>
+                        <a:t>8.80</a:t>
                       </a:r>
                     </a:p>
                   </a:txBody>
@@ -12221,52 +8681,52 @@
                         <a:defRPr sz="1100" b="0"/>
                       </a:pPr>
                       <a:r>
-                        <a:t>-53.1</a:t>
-                      </a:r>
-                    </a:p>
-                  </a:txBody>
-                  <a:tcPr/>
-                </a:tc>
-                <a:tc>
-                  <a:txBody>
-                    <a:bodyPr/>
-                    <a:lstStyle/>
-                    <a:p>
-                      <a:pPr>
-                        <a:defRPr sz="1100" b="0"/>
-                      </a:pPr>
-                      <a:r>
-                        <a:t>165.7</a:t>
-                      </a:r>
-                    </a:p>
-                  </a:txBody>
-                  <a:tcPr/>
-                </a:tc>
-                <a:tc>
-                  <a:txBody>
-                    <a:bodyPr/>
-                    <a:lstStyle/>
-                    <a:p>
-                      <a:pPr>
-                        <a:defRPr sz="1100" b="0"/>
-                      </a:pPr>
-                      <a:r>
-                        <a:t>-0.47</a:t>
-                      </a:r>
-                    </a:p>
-                  </a:txBody>
-                  <a:tcPr/>
-                </a:tc>
-                <a:tc>
-                  <a:txBody>
-                    <a:bodyPr/>
-                    <a:lstStyle/>
-                    <a:p>
-                      <a:pPr>
-                        <a:defRPr sz="1100" b="0"/>
-                      </a:pPr>
-                      <a:r>
-                        <a:t>3.79</a:t>
+                        <a:t>-2.9</a:t>
+                      </a:r>
+                    </a:p>
+                  </a:txBody>
+                  <a:tcPr/>
+                </a:tc>
+                <a:tc>
+                  <a:txBody>
+                    <a:bodyPr/>
+                    <a:lstStyle/>
+                    <a:p>
+                      <a:pPr>
+                        <a:defRPr sz="1100" b="0"/>
+                      </a:pPr>
+                      <a:r>
+                        <a:t>40.1</a:t>
+                      </a:r>
+                    </a:p>
+                  </a:txBody>
+                  <a:tcPr/>
+                </a:tc>
+                <a:tc>
+                  <a:txBody>
+                    <a:bodyPr/>
+                    <a:lstStyle/>
+                    <a:p>
+                      <a:pPr>
+                        <a:defRPr sz="1100" b="0"/>
+                      </a:pPr>
+                      <a:r>
+                        <a:t>-0.08</a:t>
+                      </a:r>
+                    </a:p>
+                  </a:txBody>
+                  <a:tcPr/>
+                </a:tc>
+                <a:tc>
+                  <a:txBody>
+                    <a:bodyPr/>
+                    <a:lstStyle/>
+                    <a:p>
+                      <a:pPr>
+                        <a:defRPr sz="1100" b="0"/>
+                      </a:pPr>
+                      <a:r>
+                        <a:t>8.81</a:t>
                       </a:r>
                     </a:p>
                   </a:txBody>
@@ -12388,52 +8848,52 @@
                         <a:defRPr sz="1100" b="0"/>
                       </a:pPr>
                       <a:r>
-                        <a:t>1154.1</a:t>
-                      </a:r>
-                    </a:p>
-                  </a:txBody>
-                  <a:tcPr/>
-                </a:tc>
-                <a:tc>
-                  <a:txBody>
-                    <a:bodyPr/>
-                    <a:lstStyle/>
-                    <a:p>
-                      <a:pPr>
-                        <a:defRPr sz="1100" b="0"/>
-                      </a:pPr>
-                      <a:r>
-                        <a:t>3.4</a:t>
-                      </a:r>
-                    </a:p>
-                  </a:txBody>
-                  <a:tcPr/>
-                </a:tc>
-                <a:tc>
-                  <a:txBody>
-                    <a:bodyPr/>
-                    <a:lstStyle/>
-                    <a:p>
-                      <a:pPr>
-                        <a:defRPr sz="1100" b="0"/>
-                      </a:pPr>
-                      <a:r>
-                        <a:t>1.00</a:t>
-                      </a:r>
-                    </a:p>
-                  </a:txBody>
-                  <a:tcPr/>
-                </a:tc>
-                <a:tc>
-                  <a:txBody>
-                    <a:bodyPr/>
-                    <a:lstStyle/>
-                    <a:p>
-                      <a:pPr>
-                        <a:defRPr sz="1100" b="0"/>
-                      </a:pPr>
-                      <a:r>
-                        <a:t>19.98</a:t>
+                        <a:t>-0.6</a:t>
+                      </a:r>
+                    </a:p>
+                  </a:txBody>
+                  <a:tcPr/>
+                </a:tc>
+                <a:tc>
+                  <a:txBody>
+                    <a:bodyPr/>
+                    <a:lstStyle/>
+                    <a:p>
+                      <a:pPr>
+                        <a:defRPr sz="1100" b="0"/>
+                      </a:pPr>
+                      <a:r>
+                        <a:t>53.3</a:t>
+                      </a:r>
+                    </a:p>
+                  </a:txBody>
+                  <a:tcPr/>
+                </a:tc>
+                <a:tc>
+                  <a:txBody>
+                    <a:bodyPr/>
+                    <a:lstStyle/>
+                    <a:p>
+                      <a:pPr>
+                        <a:defRPr sz="1100" b="0"/>
+                      </a:pPr>
+                      <a:r>
+                        <a:t>-0.01</a:t>
+                      </a:r>
+                    </a:p>
+                  </a:txBody>
+                  <a:tcPr/>
+                </a:tc>
+                <a:tc>
+                  <a:txBody>
+                    <a:bodyPr/>
+                    <a:lstStyle/>
+                    <a:p>
+                      <a:pPr>
+                        <a:defRPr sz="1100" b="0"/>
+                      </a:pPr>
+                      <a:r>
+                        <a:t>8.80</a:t>
                       </a:r>
                     </a:p>
                   </a:txBody>
@@ -12555,52 +9015,52 @@
                         <a:defRPr sz="1100" b="0"/>
                       </a:pPr>
                       <a:r>
-                        <a:t>70.3</a:t>
-                      </a:r>
-                    </a:p>
-                  </a:txBody>
-                  <a:tcPr/>
-                </a:tc>
-                <a:tc>
-                  <a:txBody>
-                    <a:bodyPr/>
-                    <a:lstStyle/>
-                    <a:p>
-                      <a:pPr>
-                        <a:defRPr sz="1100" b="0"/>
-                      </a:pPr>
-                      <a:r>
-                        <a:t>0.4</a:t>
-                      </a:r>
-                    </a:p>
-                  </a:txBody>
-                  <a:tcPr/>
-                </a:tc>
-                <a:tc>
-                  <a:txBody>
-                    <a:bodyPr/>
-                    <a:lstStyle/>
-                    <a:p>
-                      <a:pPr>
-                        <a:defRPr sz="1100" b="0"/>
-                      </a:pPr>
-                      <a:r>
-                        <a:t>0.99</a:t>
-                      </a:r>
-                    </a:p>
-                  </a:txBody>
-                  <a:tcPr/>
-                </a:tc>
-                <a:tc>
-                  <a:txBody>
-                    <a:bodyPr/>
-                    <a:lstStyle/>
-                    <a:p>
-                      <a:pPr>
-                        <a:defRPr sz="1100" b="0"/>
-                      </a:pPr>
-                      <a:r>
-                        <a:t>28.73</a:t>
+                        <a:t>-1.4</a:t>
+                      </a:r>
+                    </a:p>
+                  </a:txBody>
+                  <a:tcPr/>
+                </a:tc>
+                <a:tc>
+                  <a:txBody>
+                    <a:bodyPr/>
+                    <a:lstStyle/>
+                    <a:p>
+                      <a:pPr>
+                        <a:defRPr sz="1100" b="0"/>
+                      </a:pPr>
+                      <a:r>
+                        <a:t>56.8</a:t>
+                      </a:r>
+                    </a:p>
+                  </a:txBody>
+                  <a:tcPr/>
+                </a:tc>
+                <a:tc>
+                  <a:txBody>
+                    <a:bodyPr/>
+                    <a:lstStyle/>
+                    <a:p>
+                      <a:pPr>
+                        <a:defRPr sz="1100" b="0"/>
+                      </a:pPr>
+                      <a:r>
+                        <a:t>-0.02</a:t>
+                      </a:r>
+                    </a:p>
+                  </a:txBody>
+                  <a:tcPr/>
+                </a:tc>
+                <a:tc>
+                  <a:txBody>
+                    <a:bodyPr/>
+                    <a:lstStyle/>
+                    <a:p>
+                      <a:pPr>
+                        <a:defRPr sz="1100" b="0"/>
+                      </a:pPr>
+                      <a:r>
+                        <a:t>8.80</a:t>
                       </a:r>
                     </a:p>
                   </a:txBody>
@@ -12722,52 +9182,52 @@
                         <a:defRPr sz="1100" b="0"/>
                       </a:pPr>
                       <a:r>
-                        <a:t>478.4</a:t>
-                      </a:r>
-                    </a:p>
-                  </a:txBody>
-                  <a:tcPr/>
-                </a:tc>
-                <a:tc>
-                  <a:txBody>
-                    <a:bodyPr/>
-                    <a:lstStyle/>
-                    <a:p>
-                      <a:pPr>
-                        <a:defRPr sz="1100" b="0"/>
-                      </a:pPr>
-                      <a:r>
-                        <a:t>0.3</a:t>
-                      </a:r>
-                    </a:p>
-                  </a:txBody>
-                  <a:tcPr/>
-                </a:tc>
-                <a:tc>
-                  <a:txBody>
-                    <a:bodyPr/>
-                    <a:lstStyle/>
-                    <a:p>
-                      <a:pPr>
-                        <a:defRPr sz="1100" b="0"/>
-                      </a:pPr>
-                      <a:r>
-                        <a:t>1.00</a:t>
-                      </a:r>
-                    </a:p>
-                  </a:txBody>
-                  <a:tcPr/>
-                </a:tc>
-                <a:tc>
-                  <a:txBody>
-                    <a:bodyPr/>
-                    <a:lstStyle/>
-                    <a:p>
-                      <a:pPr>
-                        <a:defRPr sz="1100" b="0"/>
-                      </a:pPr>
-                      <a:r>
-                        <a:t>27.68</a:t>
+                        <a:t>-0.3</a:t>
+                      </a:r>
+                    </a:p>
+                  </a:txBody>
+                  <a:tcPr/>
+                </a:tc>
+                <a:tc>
+                  <a:txBody>
+                    <a:bodyPr/>
+                    <a:lstStyle/>
+                    <a:p>
+                      <a:pPr>
+                        <a:defRPr sz="1100" b="0"/>
+                      </a:pPr>
+                      <a:r>
+                        <a:t>45.4</a:t>
+                      </a:r>
+                    </a:p>
+                  </a:txBody>
+                  <a:tcPr/>
+                </a:tc>
+                <a:tc>
+                  <a:txBody>
+                    <a:bodyPr/>
+                    <a:lstStyle/>
+                    <a:p>
+                      <a:pPr>
+                        <a:defRPr sz="1100" b="0"/>
+                      </a:pPr>
+                      <a:r>
+                        <a:t>-0.01</a:t>
+                      </a:r>
+                    </a:p>
+                  </a:txBody>
+                  <a:tcPr/>
+                </a:tc>
+                <a:tc>
+                  <a:txBody>
+                    <a:bodyPr/>
+                    <a:lstStyle/>
+                    <a:p>
+                      <a:pPr>
+                        <a:defRPr sz="1100" b="0"/>
+                      </a:pPr>
+                      <a:r>
+                        <a:t>8.80</a:t>
                       </a:r>
                     </a:p>
                   </a:txBody>
@@ -12889,52 +9349,52 @@
                         <a:defRPr sz="1100" b="0"/>
                       </a:pPr>
                       <a:r>
-                        <a:t>-34.5</a:t>
-                      </a:r>
-                    </a:p>
-                  </a:txBody>
-                  <a:tcPr/>
-                </a:tc>
-                <a:tc>
-                  <a:txBody>
-                    <a:bodyPr/>
-                    <a:lstStyle/>
-                    <a:p>
-                      <a:pPr>
-                        <a:defRPr sz="1100" b="0"/>
-                      </a:pPr>
-                      <a:r>
-                        <a:t>412.7</a:t>
-                      </a:r>
-                    </a:p>
-                  </a:txBody>
-                  <a:tcPr/>
-                </a:tc>
-                <a:tc>
-                  <a:txBody>
-                    <a:bodyPr/>
-                    <a:lstStyle/>
-                    <a:p>
-                      <a:pPr>
-                        <a:defRPr sz="1100" b="0"/>
-                      </a:pPr>
-                      <a:r>
-                        <a:t>-0.09</a:t>
-                      </a:r>
-                    </a:p>
-                  </a:txBody>
-                  <a:tcPr/>
-                </a:tc>
-                <a:tc>
-                  <a:txBody>
-                    <a:bodyPr/>
-                    <a:lstStyle/>
-                    <a:p>
-                      <a:pPr>
-                        <a:defRPr sz="1100" b="0"/>
-                      </a:pPr>
-                      <a:r>
-                        <a:t>3.79</a:t>
+                        <a:t>-3.6</a:t>
+                      </a:r>
+                    </a:p>
+                  </a:txBody>
+                  <a:tcPr/>
+                </a:tc>
+                <a:tc>
+                  <a:txBody>
+                    <a:bodyPr/>
+                    <a:lstStyle/>
+                    <a:p>
+                      <a:pPr>
+                        <a:defRPr sz="1100" b="0"/>
+                      </a:pPr>
+                      <a:r>
+                        <a:t>77.1</a:t>
+                      </a:r>
+                    </a:p>
+                  </a:txBody>
+                  <a:tcPr/>
+                </a:tc>
+                <a:tc>
+                  <a:txBody>
+                    <a:bodyPr/>
+                    <a:lstStyle/>
+                    <a:p>
+                      <a:pPr>
+                        <a:defRPr sz="1100" b="0"/>
+                      </a:pPr>
+                      <a:r>
+                        <a:t>-0.05</a:t>
+                      </a:r>
+                    </a:p>
+                  </a:txBody>
+                  <a:tcPr/>
+                </a:tc>
+                <a:tc>
+                  <a:txBody>
+                    <a:bodyPr/>
+                    <a:lstStyle/>
+                    <a:p>
+                      <a:pPr>
+                        <a:defRPr sz="1100" b="0"/>
+                      </a:pPr>
+                      <a:r>
+                        <a:t>8.81</a:t>
                       </a:r>
                     </a:p>
                   </a:txBody>
@@ -13056,52 +9516,52 @@
                         <a:defRPr sz="1100" b="0"/>
                       </a:pPr>
                       <a:r>
-                        <a:t>516.8</a:t>
-                      </a:r>
-                    </a:p>
-                  </a:txBody>
-                  <a:tcPr/>
-                </a:tc>
-                <a:tc>
-                  <a:txBody>
-                    <a:bodyPr/>
-                    <a:lstStyle/>
-                    <a:p>
-                      <a:pPr>
-                        <a:defRPr sz="1100" b="0"/>
-                      </a:pPr>
-                      <a:r>
-                        <a:t>0.4</a:t>
-                      </a:r>
-                    </a:p>
-                  </a:txBody>
-                  <a:tcPr/>
-                </a:tc>
-                <a:tc>
-                  <a:txBody>
-                    <a:bodyPr/>
-                    <a:lstStyle/>
-                    <a:p>
-                      <a:pPr>
-                        <a:defRPr sz="1100" b="0"/>
-                      </a:pPr>
-                      <a:r>
-                        <a:t>1.00</a:t>
-                      </a:r>
-                    </a:p>
-                  </a:txBody>
-                  <a:tcPr/>
-                </a:tc>
-                <a:tc>
-                  <a:txBody>
-                    <a:bodyPr/>
-                    <a:lstStyle/>
-                    <a:p>
-                      <a:pPr>
-                        <a:defRPr sz="1100" b="0"/>
-                      </a:pPr>
-                      <a:r>
-                        <a:t>27.58</a:t>
+                        <a:t>-0.4</a:t>
+                      </a:r>
+                    </a:p>
+                  </a:txBody>
+                  <a:tcPr/>
+                </a:tc>
+                <a:tc>
+                  <a:txBody>
+                    <a:bodyPr/>
+                    <a:lstStyle/>
+                    <a:p>
+                      <a:pPr>
+                        <a:defRPr sz="1100" b="0"/>
+                      </a:pPr>
+                      <a:r>
+                        <a:t>44.2</a:t>
+                      </a:r>
+                    </a:p>
+                  </a:txBody>
+                  <a:tcPr/>
+                </a:tc>
+                <a:tc>
+                  <a:txBody>
+                    <a:bodyPr/>
+                    <a:lstStyle/>
+                    <a:p>
+                      <a:pPr>
+                        <a:defRPr sz="1100" b="0"/>
+                      </a:pPr>
+                      <a:r>
+                        <a:t>-0.01</a:t>
+                      </a:r>
+                    </a:p>
+                  </a:txBody>
+                  <a:tcPr/>
+                </a:tc>
+                <a:tc>
+                  <a:txBody>
+                    <a:bodyPr/>
+                    <a:lstStyle/>
+                    <a:p>
+                      <a:pPr>
+                        <a:defRPr sz="1100" b="0"/>
+                      </a:pPr>
+                      <a:r>
+                        <a:t>8.80</a:t>
                       </a:r>
                     </a:p>
                   </a:txBody>
@@ -13223,52 +9683,52 @@
                         <a:defRPr sz="1100" b="0"/>
                       </a:pPr>
                       <a:r>
-                        <a:t>863.2</a:t>
-                      </a:r>
-                    </a:p>
-                  </a:txBody>
-                  <a:tcPr/>
-                </a:tc>
-                <a:tc>
-                  <a:txBody>
-                    <a:bodyPr/>
-                    <a:lstStyle/>
-                    <a:p>
-                      <a:pPr>
-                        <a:defRPr sz="1100" b="0"/>
-                      </a:pPr>
-                      <a:r>
-                        <a:t>344.4</a:t>
-                      </a:r>
-                    </a:p>
-                  </a:txBody>
-                  <a:tcPr/>
-                </a:tc>
-                <a:tc>
-                  <a:txBody>
-                    <a:bodyPr/>
-                    <a:lstStyle/>
-                    <a:p>
-                      <a:pPr>
-                        <a:defRPr sz="1100" b="0"/>
-                      </a:pPr>
-                      <a:r>
-                        <a:t>0.71</a:t>
-                      </a:r>
-                    </a:p>
-                  </a:txBody>
-                  <a:tcPr/>
-                </a:tc>
-                <a:tc>
-                  <a:txBody>
-                    <a:bodyPr/>
-                    <a:lstStyle/>
-                    <a:p>
-                      <a:pPr>
-                        <a:defRPr sz="1100" b="0"/>
-                      </a:pPr>
-                      <a:r>
-                        <a:t>3.56</a:t>
+                        <a:t>291.2</a:t>
+                      </a:r>
+                    </a:p>
+                  </a:txBody>
+                  <a:tcPr/>
+                </a:tc>
+                <a:tc>
+                  <a:txBody>
+                    <a:bodyPr/>
+                    <a:lstStyle/>
+                    <a:p>
+                      <a:pPr>
+                        <a:defRPr sz="1100" b="0"/>
+                      </a:pPr>
+                      <a:r>
+                        <a:t>94.6</a:t>
+                      </a:r>
+                    </a:p>
+                  </a:txBody>
+                  <a:tcPr/>
+                </a:tc>
+                <a:tc>
+                  <a:txBody>
+                    <a:bodyPr/>
+                    <a:lstStyle/>
+                    <a:p>
+                      <a:pPr>
+                        <a:defRPr sz="1100" b="0"/>
+                      </a:pPr>
+                      <a:r>
+                        <a:t>0.75</a:t>
+                      </a:r>
+                    </a:p>
+                  </a:txBody>
+                  <a:tcPr/>
+                </a:tc>
+                <a:tc>
+                  <a:txBody>
+                    <a:bodyPr/>
+                    <a:lstStyle/>
+                    <a:p>
+                      <a:pPr>
+                        <a:defRPr sz="1100" b="0"/>
+                      </a:pPr>
+                      <a:r>
+                        <a:t>8.74</a:t>
                       </a:r>
                     </a:p>
                   </a:txBody>
@@ -13390,52 +9850,52 @@
                         <a:defRPr sz="1100" b="0"/>
                       </a:pPr>
                       <a:r>
-                        <a:t>634.9</a:t>
-                      </a:r>
-                    </a:p>
-                  </a:txBody>
-                  <a:tcPr/>
-                </a:tc>
-                <a:tc>
-                  <a:txBody>
-                    <a:bodyPr/>
-                    <a:lstStyle/>
-                    <a:p>
-                      <a:pPr>
-                        <a:defRPr sz="1100" b="0"/>
-                      </a:pPr>
-                      <a:r>
-                        <a:t>0.4</a:t>
-                      </a:r>
-                    </a:p>
-                  </a:txBody>
-                  <a:tcPr/>
-                </a:tc>
-                <a:tc>
-                  <a:txBody>
-                    <a:bodyPr/>
-                    <a:lstStyle/>
-                    <a:p>
-                      <a:pPr>
-                        <a:defRPr sz="1100" b="0"/>
-                      </a:pPr>
-                      <a:r>
-                        <a:t>1.00</a:t>
-                      </a:r>
-                    </a:p>
-                  </a:txBody>
-                  <a:tcPr/>
-                </a:tc>
-                <a:tc>
-                  <a:txBody>
-                    <a:bodyPr/>
-                    <a:lstStyle/>
-                    <a:p>
-                      <a:pPr>
-                        <a:defRPr sz="1100" b="0"/>
-                      </a:pPr>
-                      <a:r>
-                        <a:t>27.50</a:t>
+                        <a:t>-2.1</a:t>
+                      </a:r>
+                    </a:p>
+                  </a:txBody>
+                  <a:tcPr/>
+                </a:tc>
+                <a:tc>
+                  <a:txBody>
+                    <a:bodyPr/>
+                    <a:lstStyle/>
+                    <a:p>
+                      <a:pPr>
+                        <a:defRPr sz="1100" b="0"/>
+                      </a:pPr>
+                      <a:r>
+                        <a:t>38.9</a:t>
+                      </a:r>
+                    </a:p>
+                  </a:txBody>
+                  <a:tcPr/>
+                </a:tc>
+                <a:tc>
+                  <a:txBody>
+                    <a:bodyPr/>
+                    <a:lstStyle/>
+                    <a:p>
+                      <a:pPr>
+                        <a:defRPr sz="1100" b="0"/>
+                      </a:pPr>
+                      <a:r>
+                        <a:t>-0.06</a:t>
+                      </a:r>
+                    </a:p>
+                  </a:txBody>
+                  <a:tcPr/>
+                </a:tc>
+                <a:tc>
+                  <a:txBody>
+                    <a:bodyPr/>
+                    <a:lstStyle/>
+                    <a:p>
+                      <a:pPr>
+                        <a:defRPr sz="1100" b="0"/>
+                      </a:pPr>
+                      <a:r>
+                        <a:t>8.81</a:t>
                       </a:r>
                     </a:p>
                   </a:txBody>
@@ -13557,52 +10017,52 @@
                         <a:defRPr sz="1100" b="0"/>
                       </a:pPr>
                       <a:r>
-                        <a:t>1298.8</a:t>
-                      </a:r>
-                    </a:p>
-                  </a:txBody>
-                  <a:tcPr/>
-                </a:tc>
-                <a:tc>
-                  <a:txBody>
-                    <a:bodyPr/>
-                    <a:lstStyle/>
-                    <a:p>
-                      <a:pPr>
-                        <a:defRPr sz="1100" b="0"/>
-                      </a:pPr>
-                      <a:r>
-                        <a:t>0.9</a:t>
-                      </a:r>
-                    </a:p>
-                  </a:txBody>
-                  <a:tcPr/>
-                </a:tc>
-                <a:tc>
-                  <a:txBody>
-                    <a:bodyPr/>
-                    <a:lstStyle/>
-                    <a:p>
-                      <a:pPr>
-                        <a:defRPr sz="1100" b="0"/>
-                      </a:pPr>
-                      <a:r>
-                        <a:t>1.00</a:t>
-                      </a:r>
-                    </a:p>
-                  </a:txBody>
-                  <a:tcPr/>
-                </a:tc>
-                <a:tc>
-                  <a:txBody>
-                    <a:bodyPr/>
-                    <a:lstStyle/>
-                    <a:p>
-                      <a:pPr>
-                        <a:defRPr sz="1100" b="0"/>
-                      </a:pPr>
-                      <a:r>
-                        <a:t>26.38</a:t>
+                        <a:t>-3.6</a:t>
+                      </a:r>
+                    </a:p>
+                  </a:txBody>
+                  <a:tcPr/>
+                </a:tc>
+                <a:tc>
+                  <a:txBody>
+                    <a:bodyPr/>
+                    <a:lstStyle/>
+                    <a:p>
+                      <a:pPr>
+                        <a:defRPr sz="1100" b="0"/>
+                      </a:pPr>
+                      <a:r>
+                        <a:t>52.9</a:t>
+                      </a:r>
+                    </a:p>
+                  </a:txBody>
+                  <a:tcPr/>
+                </a:tc>
+                <a:tc>
+                  <a:txBody>
+                    <a:bodyPr/>
+                    <a:lstStyle/>
+                    <a:p>
+                      <a:pPr>
+                        <a:defRPr sz="1100" b="0"/>
+                      </a:pPr>
+                      <a:r>
+                        <a:t>-0.07</a:t>
+                      </a:r>
+                    </a:p>
+                  </a:txBody>
+                  <a:tcPr/>
+                </a:tc>
+                <a:tc>
+                  <a:txBody>
+                    <a:bodyPr/>
+                    <a:lstStyle/>
+                    <a:p>
+                      <a:pPr>
+                        <a:defRPr sz="1100" b="0"/>
+                      </a:pPr>
+                      <a:r>
+                        <a:t>8.81</a:t>
                       </a:r>
                     </a:p>
                   </a:txBody>
@@ -13724,52 +10184,52 @@
                         <a:defRPr sz="1100" b="0"/>
                       </a:pPr>
                       <a:r>
-                        <a:t>722.6</a:t>
-                      </a:r>
-                    </a:p>
-                  </a:txBody>
-                  <a:tcPr/>
-                </a:tc>
-                <a:tc>
-                  <a:txBody>
-                    <a:bodyPr/>
-                    <a:lstStyle/>
-                    <a:p>
-                      <a:pPr>
-                        <a:defRPr sz="1100" b="0"/>
-                      </a:pPr>
-                      <a:r>
-                        <a:t>12.4</a:t>
-                      </a:r>
-                    </a:p>
-                  </a:txBody>
-                  <a:tcPr/>
-                </a:tc>
-                <a:tc>
-                  <a:txBody>
-                    <a:bodyPr/>
-                    <a:lstStyle/>
-                    <a:p>
-                      <a:pPr>
-                        <a:defRPr sz="1100" b="0"/>
-                      </a:pPr>
-                      <a:r>
-                        <a:t>0.98</a:t>
-                      </a:r>
-                    </a:p>
-                  </a:txBody>
-                  <a:tcPr/>
-                </a:tc>
-                <a:tc>
-                  <a:txBody>
-                    <a:bodyPr/>
-                    <a:lstStyle/>
-                    <a:p>
-                      <a:pPr>
-                        <a:defRPr sz="1100" b="0"/>
-                      </a:pPr>
-                      <a:r>
-                        <a:t>27.19</a:t>
+                        <a:t>-0.5</a:t>
+                      </a:r>
+                    </a:p>
+                  </a:txBody>
+                  <a:tcPr/>
+                </a:tc>
+                <a:tc>
+                  <a:txBody>
+                    <a:bodyPr/>
+                    <a:lstStyle/>
+                    <a:p>
+                      <a:pPr>
+                        <a:defRPr sz="1100" b="0"/>
+                      </a:pPr>
+                      <a:r>
+                        <a:t>36.0</a:t>
+                      </a:r>
+                    </a:p>
+                  </a:txBody>
+                  <a:tcPr/>
+                </a:tc>
+                <a:tc>
+                  <a:txBody>
+                    <a:bodyPr/>
+                    <a:lstStyle/>
+                    <a:p>
+                      <a:pPr>
+                        <a:defRPr sz="1100" b="0"/>
+                      </a:pPr>
+                      <a:r>
+                        <a:t>-0.01</a:t>
+                      </a:r>
+                    </a:p>
+                  </a:txBody>
+                  <a:tcPr/>
+                </a:tc>
+                <a:tc>
+                  <a:txBody>
+                    <a:bodyPr/>
+                    <a:lstStyle/>
+                    <a:p>
+                      <a:pPr>
+                        <a:defRPr sz="1100" b="0"/>
+                      </a:pPr>
+                      <a:r>
+                        <a:t>8.80</a:t>
                       </a:r>
                     </a:p>
                   </a:txBody>
@@ -13891,52 +10351,52 @@
                         <a:defRPr sz="1100" b="0"/>
                       </a:pPr>
                       <a:r>
-                        <a:t>1283.2</a:t>
-                      </a:r>
-                    </a:p>
-                  </a:txBody>
-                  <a:tcPr/>
-                </a:tc>
-                <a:tc>
-                  <a:txBody>
-                    <a:bodyPr/>
-                    <a:lstStyle/>
-                    <a:p>
-                      <a:pPr>
-                        <a:defRPr sz="1100" b="0"/>
-                      </a:pPr>
-                      <a:r>
-                        <a:t>4.1</a:t>
-                      </a:r>
-                    </a:p>
-                  </a:txBody>
-                  <a:tcPr/>
-                </a:tc>
-                <a:tc>
-                  <a:txBody>
-                    <a:bodyPr/>
-                    <a:lstStyle/>
-                    <a:p>
-                      <a:pPr>
-                        <a:defRPr sz="1100" b="0"/>
-                      </a:pPr>
-                      <a:r>
-                        <a:t>1.00</a:t>
-                      </a:r>
-                    </a:p>
-                  </a:txBody>
-                  <a:tcPr/>
-                </a:tc>
-                <a:tc>
-                  <a:txBody>
-                    <a:bodyPr/>
-                    <a:lstStyle/>
-                    <a:p>
-                      <a:pPr>
-                        <a:defRPr sz="1100" b="0"/>
-                      </a:pPr>
-                      <a:r>
-                        <a:t>20.18</a:t>
+                        <a:t>-3.6</a:t>
+                      </a:r>
+                    </a:p>
+                  </a:txBody>
+                  <a:tcPr/>
+                </a:tc>
+                <a:tc>
+                  <a:txBody>
+                    <a:bodyPr/>
+                    <a:lstStyle/>
+                    <a:p>
+                      <a:pPr>
+                        <a:defRPr sz="1100" b="0"/>
+                      </a:pPr>
+                      <a:r>
+                        <a:t>56.0</a:t>
+                      </a:r>
+                    </a:p>
+                  </a:txBody>
+                  <a:tcPr/>
+                </a:tc>
+                <a:tc>
+                  <a:txBody>
+                    <a:bodyPr/>
+                    <a:lstStyle/>
+                    <a:p>
+                      <a:pPr>
+                        <a:defRPr sz="1100" b="0"/>
+                      </a:pPr>
+                      <a:r>
+                        <a:t>-0.07</a:t>
+                      </a:r>
+                    </a:p>
+                  </a:txBody>
+                  <a:tcPr/>
+                </a:tc>
+                <a:tc>
+                  <a:txBody>
+                    <a:bodyPr/>
+                    <a:lstStyle/>
+                    <a:p>
+                      <a:pPr>
+                        <a:defRPr sz="1100" b="0"/>
+                      </a:pPr>
+                      <a:r>
+                        <a:t>8.81</a:t>
                       </a:r>
                     </a:p>
                   </a:txBody>
@@ -14058,52 +10518,52 @@
                         <a:defRPr sz="1100" b="0"/>
                       </a:pPr>
                       <a:r>
-                        <a:t>-5.1</a:t>
-                      </a:r>
-                    </a:p>
-                  </a:txBody>
-                  <a:tcPr/>
-                </a:tc>
-                <a:tc>
-                  <a:txBody>
-                    <a:bodyPr/>
-                    <a:lstStyle/>
-                    <a:p>
-                      <a:pPr>
-                        <a:defRPr sz="1100" b="0"/>
-                      </a:pPr>
-                      <a:r>
-                        <a:t>281.3</a:t>
-                      </a:r>
-                    </a:p>
-                  </a:txBody>
-                  <a:tcPr/>
-                </a:tc>
-                <a:tc>
-                  <a:txBody>
-                    <a:bodyPr/>
-                    <a:lstStyle/>
-                    <a:p>
-                      <a:pPr>
-                        <a:defRPr sz="1100" b="0"/>
-                      </a:pPr>
-                      <a:r>
-                        <a:t>-0.02</a:t>
-                      </a:r>
-                    </a:p>
-                  </a:txBody>
-                  <a:tcPr/>
-                </a:tc>
-                <a:tc>
-                  <a:txBody>
-                    <a:bodyPr/>
-                    <a:lstStyle/>
-                    <a:p>
-                      <a:pPr>
-                        <a:defRPr sz="1100" b="0"/>
-                      </a:pPr>
-                      <a:r>
-                        <a:t>3.78</a:t>
+                        <a:t>-3.4</a:t>
+                      </a:r>
+                    </a:p>
+                  </a:txBody>
+                  <a:tcPr/>
+                </a:tc>
+                <a:tc>
+                  <a:txBody>
+                    <a:bodyPr/>
+                    <a:lstStyle/>
+                    <a:p>
+                      <a:pPr>
+                        <a:defRPr sz="1100" b="0"/>
+                      </a:pPr>
+                      <a:r>
+                        <a:t>76.4</a:t>
+                      </a:r>
+                    </a:p>
+                  </a:txBody>
+                  <a:tcPr/>
+                </a:tc>
+                <a:tc>
+                  <a:txBody>
+                    <a:bodyPr/>
+                    <a:lstStyle/>
+                    <a:p>
+                      <a:pPr>
+                        <a:defRPr sz="1100" b="0"/>
+                      </a:pPr>
+                      <a:r>
+                        <a:t>-0.05</a:t>
+                      </a:r>
+                    </a:p>
+                  </a:txBody>
+                  <a:tcPr/>
+                </a:tc>
+                <a:tc>
+                  <a:txBody>
+                    <a:bodyPr/>
+                    <a:lstStyle/>
+                    <a:p>
+                      <a:pPr>
+                        <a:defRPr sz="1100" b="0"/>
+                      </a:pPr>
+                      <a:r>
+                        <a:t>8.81</a:t>
                       </a:r>
                     </a:p>
                   </a:txBody>
@@ -14123,6 +10583,3642 @@
 </file>
 
 <file path=ppt/slides/slide28.xml><?xml version="1.0" encoding="utf-8"?>
+<p:sld xmlns:a="http://schemas.openxmlformats.org/drawingml/2006/main" xmlns:p="http://schemas.openxmlformats.org/presentationml/2006/main" xmlns:r="http://schemas.openxmlformats.org/officeDocument/2006/relationships">
+  <p:cSld>
+    <p:spTree>
+      <p:nvGrpSpPr>
+        <p:cNvPr id="1" name=""/>
+        <p:cNvGrpSpPr/>
+        <p:nvPr/>
+      </p:nvGrpSpPr>
+      <p:grpSpPr/>
+      <p:sp>
+        <p:nvSpPr>
+          <p:cNvPr id="2" name="TextBox 1"/>
+          <p:cNvSpPr txBox="1"/>
+          <p:nvPr/>
+        </p:nvSpPr>
+        <p:spPr>
+          <a:xfrm>
+            <a:off x="457200" y="228600"/>
+            <a:ext cx="11277295" cy="640080"/>
+          </a:xfrm>
+          <a:prstGeom prst="rect">
+            <a:avLst/>
+          </a:prstGeom>
+          <a:noFill/>
+        </p:spPr>
+        <p:txBody>
+          <a:bodyPr wrap="square">
+            <a:spAutoFit/>
+          </a:bodyPr>
+          <a:lstStyle/>
+          <a:p>
+            <a:pPr>
+              <a:spcAft>
+                <a:spcPts val="600"/>
+              </a:spcAft>
+            </a:pPr>
+            <a:r>
+              <a:rPr sz="2800" b="1">
+                <a:solidFill>
+                  <a:srgbClr val="0F172A"/>
+                </a:solidFill>
+              </a:rPr>
+              <a:t>Appendix A2 — Naches — Fan warm start: columns &amp; results</a:t>
+            </a:r>
+          </a:p>
+        </p:txBody>
+      </p:sp>
+      <p:sp>
+        <p:nvSpPr>
+          <p:cNvPr id="3" name="TextBox 2"/>
+          <p:cNvSpPr txBox="1"/>
+          <p:nvPr/>
+        </p:nvSpPr>
+        <p:spPr>
+          <a:xfrm>
+            <a:off x="457200" y="868680"/>
+            <a:ext cx="11277295" cy="365760"/>
+          </a:xfrm>
+          <a:prstGeom prst="rect">
+            <a:avLst/>
+          </a:prstGeom>
+          <a:noFill/>
+        </p:spPr>
+        <p:txBody>
+          <a:bodyPr wrap="square">
+            <a:spAutoFit/>
+          </a:bodyPr>
+          <a:lstStyle/>
+          <a:p>
+            <a:pPr>
+              <a:spcAft>
+                <a:spcPts val="600"/>
+              </a:spcAft>
+            </a:pPr>
+            <a:r>
+              <a:rPr sz="1300" b="0">
+                <a:solidFill>
+                  <a:srgbClr val="475569"/>
+                </a:solidFill>
+              </a:rPr>
+              <a:t>characteristics from the real data (SSURGO soil, Fan 2013 WTD, NLDAS-2 (0.125°, ~12 km) forcing) · results are annual means (mm/yr)</a:t>
+            </a:r>
+          </a:p>
+        </p:txBody>
+      </p:sp>
+      <p:graphicFrame>
+        <p:nvGraphicFramePr>
+          <p:cNvPr id="4" name="Table 3"/>
+          <p:cNvGraphicFramePr>
+            <a:graphicFrameLocks noGrp="1"/>
+          </p:cNvGraphicFramePr>
+          <p:nvPr/>
+        </p:nvGraphicFramePr>
+        <p:xfrm>
+          <a:off x="365760" y="1325880"/>
+          <a:ext cx="11460175" cy="8065008"/>
+        </p:xfrm>
+        <a:graphic>
+          <a:graphicData uri="http://schemas.openxmlformats.org/drawingml/2006/table">
+            <a:tbl>
+              <a:tblPr firstRow="1" bandRow="1">
+                <a:tableStyleId>{5C22544A-7EE6-4342-B048-85BDC9FD1C3A}</a:tableStyleId>
+              </a:tblPr>
+              <a:tblGrid>
+                <a:gridCol w="1041834"/>
+                <a:gridCol w="1041834"/>
+                <a:gridCol w="1041834"/>
+                <a:gridCol w="1041834"/>
+                <a:gridCol w="1041834"/>
+                <a:gridCol w="1041834"/>
+                <a:gridCol w="1041834"/>
+                <a:gridCol w="1041834"/>
+                <a:gridCol w="1041834"/>
+                <a:gridCol w="1041834"/>
+                <a:gridCol w="1041835"/>
+              </a:tblGrid>
+              <a:tr h="384048">
+                <a:tc>
+                  <a:txBody>
+                    <a:bodyPr/>
+                    <a:lstStyle/>
+                    <a:p>
+                      <a:pPr>
+                        <a:defRPr sz="1100" b="1"/>
+                      </a:pPr>
+                      <a:r>
+                        <a:t>column</a:t>
+                      </a:r>
+                    </a:p>
+                  </a:txBody>
+                  <a:tcPr/>
+                </a:tc>
+                <a:tc>
+                  <a:txBody>
+                    <a:bodyPr/>
+                    <a:lstStyle/>
+                    <a:p>
+                      <a:pPr>
+                        <a:defRPr sz="1100" b="1"/>
+                      </a:pPr>
+                      <a:r>
+                        <a:t>elev m</a:t>
+                      </a:r>
+                    </a:p>
+                  </a:txBody>
+                  <a:tcPr/>
+                </a:tc>
+                <a:tc>
+                  <a:txBody>
+                    <a:bodyPr/>
+                    <a:lstStyle/>
+                    <a:p>
+                      <a:pPr>
+                        <a:defRPr sz="1100" b="1"/>
+                      </a:pPr>
+                      <a:r>
+                        <a:t>top soil</a:t>
+                      </a:r>
+                    </a:p>
+                  </a:txBody>
+                  <a:tcPr/>
+                </a:tc>
+                <a:tc>
+                  <a:txBody>
+                    <a:bodyPr/>
+                    <a:lstStyle/>
+                    <a:p>
+                      <a:pPr>
+                        <a:defRPr sz="1100" b="1"/>
+                      </a:pPr>
+                      <a:r>
+                        <a:t>clay%</a:t>
+                      </a:r>
+                    </a:p>
+                  </a:txBody>
+                  <a:tcPr/>
+                </a:tc>
+                <a:tc>
+                  <a:txBody>
+                    <a:bodyPr/>
+                    <a:lstStyle/>
+                    <a:p>
+                      <a:pPr>
+                        <a:defRPr sz="1100" b="1"/>
+                      </a:pPr>
+                      <a:r>
+                        <a:t>Ksat µm/s</a:t>
+                      </a:r>
+                    </a:p>
+                  </a:txBody>
+                  <a:tcPr/>
+                </a:tc>
+                <a:tc>
+                  <a:txBody>
+                    <a:bodyPr/>
+                    <a:lstStyle/>
+                    <a:p>
+                      <a:pPr>
+                        <a:defRPr sz="1100" b="1"/>
+                      </a:pPr>
+                      <a:r>
+                        <a:t>Fan WTD m</a:t>
+                      </a:r>
+                    </a:p>
+                  </a:txBody>
+                  <a:tcPr/>
+                </a:tc>
+                <a:tc>
+                  <a:txBody>
+                    <a:bodyPr/>
+                    <a:lstStyle/>
+                    <a:p>
+                      <a:pPr>
+                        <a:defRPr sz="1100" b="1"/>
+                      </a:pPr>
+                      <a:r>
+                        <a:t>precip</a:t>
+                      </a:r>
+                    </a:p>
+                  </a:txBody>
+                  <a:tcPr/>
+                </a:tc>
+                <a:tc>
+                  <a:txBody>
+                    <a:bodyPr/>
+                    <a:lstStyle/>
+                    <a:p>
+                      <a:pPr>
+                        <a:defRPr sz="1100" b="1"/>
+                      </a:pPr>
+                      <a:r>
+                        <a:t>recharge</a:t>
+                      </a:r>
+                    </a:p>
+                  </a:txBody>
+                  <a:tcPr/>
+                </a:tc>
+                <a:tc>
+                  <a:txBody>
+                    <a:bodyPr/>
+                    <a:lstStyle/>
+                    <a:p>
+                      <a:pPr>
+                        <a:defRPr sz="1100" b="1"/>
+                      </a:pPr>
+                      <a:r>
+                        <a:t>runoff</a:t>
+                      </a:r>
+                    </a:p>
+                  </a:txBody>
+                  <a:tcPr/>
+                </a:tc>
+                <a:tc>
+                  <a:txBody>
+                    <a:bodyPr/>
+                    <a:lstStyle/>
+                    <a:p>
+                      <a:pPr>
+                        <a:defRPr sz="1100" b="1"/>
+                      </a:pPr>
+                      <a:r>
+                        <a:t>rech.frac</a:t>
+                      </a:r>
+                    </a:p>
+                  </a:txBody>
+                  <a:tcPr/>
+                </a:tc>
+                <a:tc>
+                  <a:txBody>
+                    <a:bodyPr/>
+                    <a:lstStyle/>
+                    <a:p>
+                      <a:pPr>
+                        <a:defRPr sz="1100" b="1"/>
+                      </a:pPr>
+                      <a:r>
+                        <a:t>ZWT m</a:t>
+                      </a:r>
+                    </a:p>
+                  </a:txBody>
+                  <a:tcPr/>
+                </a:tc>
+              </a:tr>
+              <a:tr h="384048">
+                <a:tc>
+                  <a:txBody>
+                    <a:bodyPr/>
+                    <a:lstStyle/>
+                    <a:p>
+                      <a:pPr>
+                        <a:defRPr sz="1100" b="0"/>
+                      </a:pPr>
+                      <a:r>
+                        <a:t>col_01</a:t>
+                      </a:r>
+                    </a:p>
+                  </a:txBody>
+                  <a:tcPr/>
+                </a:tc>
+                <a:tc>
+                  <a:txBody>
+                    <a:bodyPr/>
+                    <a:lstStyle/>
+                    <a:p>
+                      <a:pPr>
+                        <a:defRPr sz="1100" b="0"/>
+                      </a:pPr>
+                      <a:r>
+                        <a:t>750</a:t>
+                      </a:r>
+                    </a:p>
+                  </a:txBody>
+                  <a:tcPr/>
+                </a:tc>
+                <a:tc>
+                  <a:txBody>
+                    <a:bodyPr/>
+                    <a:lstStyle/>
+                    <a:p>
+                      <a:pPr>
+                        <a:defRPr sz="1100" b="0"/>
+                      </a:pPr>
+                      <a:r>
+                        <a:t>—</a:t>
+                      </a:r>
+                    </a:p>
+                  </a:txBody>
+                  <a:tcPr/>
+                </a:tc>
+                <a:tc>
+                  <a:txBody>
+                    <a:bodyPr/>
+                    <a:lstStyle/>
+                    <a:p>
+                      <a:pPr>
+                        <a:defRPr sz="1100" b="0"/>
+                      </a:pPr>
+                      <a:r>
+                        <a:t>—</a:t>
+                      </a:r>
+                    </a:p>
+                  </a:txBody>
+                  <a:tcPr/>
+                </a:tc>
+                <a:tc>
+                  <a:txBody>
+                    <a:bodyPr/>
+                    <a:lstStyle/>
+                    <a:p>
+                      <a:pPr>
+                        <a:defRPr sz="1100" b="0"/>
+                      </a:pPr>
+                      <a:r>
+                        <a:t>—</a:t>
+                      </a:r>
+                    </a:p>
+                  </a:txBody>
+                  <a:tcPr/>
+                </a:tc>
+                <a:tc>
+                  <a:txBody>
+                    <a:bodyPr/>
+                    <a:lstStyle/>
+                    <a:p>
+                      <a:pPr>
+                        <a:defRPr sz="1100" b="0"/>
+                      </a:pPr>
+                      <a:r>
+                        <a:t>61.5</a:t>
+                      </a:r>
+                    </a:p>
+                  </a:txBody>
+                  <a:tcPr/>
+                </a:tc>
+                <a:tc>
+                  <a:txBody>
+                    <a:bodyPr/>
+                    <a:lstStyle/>
+                    <a:p>
+                      <a:pPr>
+                        <a:defRPr sz="1100" b="0"/>
+                      </a:pPr>
+                      <a:r>
+                        <a:t>474</a:t>
+                      </a:r>
+                    </a:p>
+                  </a:txBody>
+                  <a:tcPr/>
+                </a:tc>
+                <a:tc>
+                  <a:txBody>
+                    <a:bodyPr/>
+                    <a:lstStyle/>
+                    <a:p>
+                      <a:pPr>
+                        <a:defRPr sz="1100" b="0"/>
+                      </a:pPr>
+                      <a:r>
+                        <a:t>-0.0</a:t>
+                      </a:r>
+                    </a:p>
+                  </a:txBody>
+                  <a:tcPr/>
+                </a:tc>
+                <a:tc>
+                  <a:txBody>
+                    <a:bodyPr/>
+                    <a:lstStyle/>
+                    <a:p>
+                      <a:pPr>
+                        <a:defRPr sz="1100" b="0"/>
+                      </a:pPr>
+                      <a:r>
+                        <a:t>21.4</a:t>
+                      </a:r>
+                    </a:p>
+                  </a:txBody>
+                  <a:tcPr/>
+                </a:tc>
+                <a:tc>
+                  <a:txBody>
+                    <a:bodyPr/>
+                    <a:lstStyle/>
+                    <a:p>
+                      <a:pPr>
+                        <a:defRPr sz="1100" b="0"/>
+                      </a:pPr>
+                      <a:r>
+                        <a:t>-0.00</a:t>
+                      </a:r>
+                    </a:p>
+                  </a:txBody>
+                  <a:tcPr/>
+                </a:tc>
+                <a:tc>
+                  <a:txBody>
+                    <a:bodyPr/>
+                    <a:lstStyle/>
+                    <a:p>
+                      <a:pPr>
+                        <a:defRPr sz="1100" b="0"/>
+                      </a:pPr>
+                      <a:r>
+                        <a:t>28.80</a:t>
+                      </a:r>
+                    </a:p>
+                  </a:txBody>
+                  <a:tcPr/>
+                </a:tc>
+              </a:tr>
+              <a:tr h="384048">
+                <a:tc>
+                  <a:txBody>
+                    <a:bodyPr/>
+                    <a:lstStyle/>
+                    <a:p>
+                      <a:pPr>
+                        <a:defRPr sz="1100" b="0"/>
+                      </a:pPr>
+                      <a:r>
+                        <a:t>col_02</a:t>
+                      </a:r>
+                    </a:p>
+                  </a:txBody>
+                  <a:tcPr/>
+                </a:tc>
+                <a:tc>
+                  <a:txBody>
+                    <a:bodyPr/>
+                    <a:lstStyle/>
+                    <a:p>
+                      <a:pPr>
+                        <a:defRPr sz="1100" b="0"/>
+                      </a:pPr>
+                      <a:r>
+                        <a:t>754</a:t>
+                      </a:r>
+                    </a:p>
+                  </a:txBody>
+                  <a:tcPr/>
+                </a:tc>
+                <a:tc>
+                  <a:txBody>
+                    <a:bodyPr/>
+                    <a:lstStyle/>
+                    <a:p>
+                      <a:pPr>
+                        <a:defRPr sz="1100" b="0"/>
+                      </a:pPr>
+                      <a:r>
+                        <a:t>—</a:t>
+                      </a:r>
+                    </a:p>
+                  </a:txBody>
+                  <a:tcPr/>
+                </a:tc>
+                <a:tc>
+                  <a:txBody>
+                    <a:bodyPr/>
+                    <a:lstStyle/>
+                    <a:p>
+                      <a:pPr>
+                        <a:defRPr sz="1100" b="0"/>
+                      </a:pPr>
+                      <a:r>
+                        <a:t>—</a:t>
+                      </a:r>
+                    </a:p>
+                  </a:txBody>
+                  <a:tcPr/>
+                </a:tc>
+                <a:tc>
+                  <a:txBody>
+                    <a:bodyPr/>
+                    <a:lstStyle/>
+                    <a:p>
+                      <a:pPr>
+                        <a:defRPr sz="1100" b="0"/>
+                      </a:pPr>
+                      <a:r>
+                        <a:t>—</a:t>
+                      </a:r>
+                    </a:p>
+                  </a:txBody>
+                  <a:tcPr/>
+                </a:tc>
+                <a:tc>
+                  <a:txBody>
+                    <a:bodyPr/>
+                    <a:lstStyle/>
+                    <a:p>
+                      <a:pPr>
+                        <a:defRPr sz="1100" b="0"/>
+                      </a:pPr>
+                      <a:r>
+                        <a:t>0.6</a:t>
+                      </a:r>
+                    </a:p>
+                  </a:txBody>
+                  <a:tcPr/>
+                </a:tc>
+                <a:tc>
+                  <a:txBody>
+                    <a:bodyPr/>
+                    <a:lstStyle/>
+                    <a:p>
+                      <a:pPr>
+                        <a:defRPr sz="1100" b="0"/>
+                      </a:pPr>
+                      <a:r>
+                        <a:t>682</a:t>
+                      </a:r>
+                    </a:p>
+                  </a:txBody>
+                  <a:tcPr/>
+                </a:tc>
+                <a:tc>
+                  <a:txBody>
+                    <a:bodyPr/>
+                    <a:lstStyle/>
+                    <a:p>
+                      <a:pPr>
+                        <a:defRPr sz="1100" b="0"/>
+                      </a:pPr>
+                      <a:r>
+                        <a:t>-84.8</a:t>
+                      </a:r>
+                    </a:p>
+                  </a:txBody>
+                  <a:tcPr/>
+                </a:tc>
+                <a:tc>
+                  <a:txBody>
+                    <a:bodyPr/>
+                    <a:lstStyle/>
+                    <a:p>
+                      <a:pPr>
+                        <a:defRPr sz="1100" b="0"/>
+                      </a:pPr>
+                      <a:r>
+                        <a:t>158.2</a:t>
+                      </a:r>
+                    </a:p>
+                  </a:txBody>
+                  <a:tcPr/>
+                </a:tc>
+                <a:tc>
+                  <a:txBody>
+                    <a:bodyPr/>
+                    <a:lstStyle/>
+                    <a:p>
+                      <a:pPr>
+                        <a:defRPr sz="1100" b="0"/>
+                      </a:pPr>
+                      <a:r>
+                        <a:t>-1.15</a:t>
+                      </a:r>
+                    </a:p>
+                  </a:txBody>
+                  <a:tcPr/>
+                </a:tc>
+                <a:tc>
+                  <a:txBody>
+                    <a:bodyPr/>
+                    <a:lstStyle/>
+                    <a:p>
+                      <a:pPr>
+                        <a:defRPr sz="1100" b="0"/>
+                      </a:pPr>
+                      <a:r>
+                        <a:t>4.16</a:t>
+                      </a:r>
+                    </a:p>
+                  </a:txBody>
+                  <a:tcPr/>
+                </a:tc>
+              </a:tr>
+              <a:tr h="384048">
+                <a:tc>
+                  <a:txBody>
+                    <a:bodyPr/>
+                    <a:lstStyle/>
+                    <a:p>
+                      <a:pPr>
+                        <a:defRPr sz="1100" b="0"/>
+                      </a:pPr>
+                      <a:r>
+                        <a:t>col_05</a:t>
+                      </a:r>
+                    </a:p>
+                  </a:txBody>
+                  <a:tcPr/>
+                </a:tc>
+                <a:tc>
+                  <a:txBody>
+                    <a:bodyPr/>
+                    <a:lstStyle/>
+                    <a:p>
+                      <a:pPr>
+                        <a:defRPr sz="1100" b="0"/>
+                      </a:pPr>
+                      <a:r>
+                        <a:t>924</a:t>
+                      </a:r>
+                    </a:p>
+                  </a:txBody>
+                  <a:tcPr/>
+                </a:tc>
+                <a:tc>
+                  <a:txBody>
+                    <a:bodyPr/>
+                    <a:lstStyle/>
+                    <a:p>
+                      <a:pPr>
+                        <a:defRPr sz="1100" b="0"/>
+                      </a:pPr>
+                      <a:r>
+                        <a:t>—</a:t>
+                      </a:r>
+                    </a:p>
+                  </a:txBody>
+                  <a:tcPr/>
+                </a:tc>
+                <a:tc>
+                  <a:txBody>
+                    <a:bodyPr/>
+                    <a:lstStyle/>
+                    <a:p>
+                      <a:pPr>
+                        <a:defRPr sz="1100" b="0"/>
+                      </a:pPr>
+                      <a:r>
+                        <a:t>—</a:t>
+                      </a:r>
+                    </a:p>
+                  </a:txBody>
+                  <a:tcPr/>
+                </a:tc>
+                <a:tc>
+                  <a:txBody>
+                    <a:bodyPr/>
+                    <a:lstStyle/>
+                    <a:p>
+                      <a:pPr>
+                        <a:defRPr sz="1100" b="0"/>
+                      </a:pPr>
+                      <a:r>
+                        <a:t>—</a:t>
+                      </a:r>
+                    </a:p>
+                  </a:txBody>
+                  <a:tcPr/>
+                </a:tc>
+                <a:tc>
+                  <a:txBody>
+                    <a:bodyPr/>
+                    <a:lstStyle/>
+                    <a:p>
+                      <a:pPr>
+                        <a:defRPr sz="1100" b="0"/>
+                      </a:pPr>
+                      <a:r>
+                        <a:t>4.7</a:t>
+                      </a:r>
+                    </a:p>
+                  </a:txBody>
+                  <a:tcPr/>
+                </a:tc>
+                <a:tc>
+                  <a:txBody>
+                    <a:bodyPr/>
+                    <a:lstStyle/>
+                    <a:p>
+                      <a:pPr>
+                        <a:defRPr sz="1100" b="0"/>
+                      </a:pPr>
+                      <a:r>
+                        <a:t>474</a:t>
+                      </a:r>
+                    </a:p>
+                  </a:txBody>
+                  <a:tcPr/>
+                </a:tc>
+                <a:tc>
+                  <a:txBody>
+                    <a:bodyPr/>
+                    <a:lstStyle/>
+                    <a:p>
+                      <a:pPr>
+                        <a:defRPr sz="1100" b="0"/>
+                      </a:pPr>
+                      <a:r>
+                        <a:t>-0.6</a:t>
+                      </a:r>
+                    </a:p>
+                  </a:txBody>
+                  <a:tcPr/>
+                </a:tc>
+                <a:tc>
+                  <a:txBody>
+                    <a:bodyPr/>
+                    <a:lstStyle/>
+                    <a:p>
+                      <a:pPr>
+                        <a:defRPr sz="1100" b="0"/>
+                      </a:pPr>
+                      <a:r>
+                        <a:t>83.0</a:t>
+                      </a:r>
+                    </a:p>
+                  </a:txBody>
+                  <a:tcPr/>
+                </a:tc>
+                <a:tc>
+                  <a:txBody>
+                    <a:bodyPr/>
+                    <a:lstStyle/>
+                    <a:p>
+                      <a:pPr>
+                        <a:defRPr sz="1100" b="0"/>
+                      </a:pPr>
+                      <a:r>
+                        <a:t>-0.01</a:t>
+                      </a:r>
+                    </a:p>
+                  </a:txBody>
+                  <a:tcPr/>
+                </a:tc>
+                <a:tc>
+                  <a:txBody>
+                    <a:bodyPr/>
+                    <a:lstStyle/>
+                    <a:p>
+                      <a:pPr>
+                        <a:defRPr sz="1100" b="0"/>
+                      </a:pPr>
+                      <a:r>
+                        <a:t>4.79</a:t>
+                      </a:r>
+                    </a:p>
+                  </a:txBody>
+                  <a:tcPr/>
+                </a:tc>
+              </a:tr>
+              <a:tr h="384048">
+                <a:tc>
+                  <a:txBody>
+                    <a:bodyPr/>
+                    <a:lstStyle/>
+                    <a:p>
+                      <a:pPr>
+                        <a:defRPr sz="1100" b="0"/>
+                      </a:pPr>
+                      <a:r>
+                        <a:t>col_06</a:t>
+                      </a:r>
+                    </a:p>
+                  </a:txBody>
+                  <a:tcPr/>
+                </a:tc>
+                <a:tc>
+                  <a:txBody>
+                    <a:bodyPr/>
+                    <a:lstStyle/>
+                    <a:p>
+                      <a:pPr>
+                        <a:defRPr sz="1100" b="0"/>
+                      </a:pPr>
+                      <a:r>
+                        <a:t>932</a:t>
+                      </a:r>
+                    </a:p>
+                  </a:txBody>
+                  <a:tcPr/>
+                </a:tc>
+                <a:tc>
+                  <a:txBody>
+                    <a:bodyPr/>
+                    <a:lstStyle/>
+                    <a:p>
+                      <a:pPr>
+                        <a:defRPr sz="1100" b="0"/>
+                      </a:pPr>
+                      <a:r>
+                        <a:t>loam</a:t>
+                      </a:r>
+                    </a:p>
+                  </a:txBody>
+                  <a:tcPr/>
+                </a:tc>
+                <a:tc>
+                  <a:txBody>
+                    <a:bodyPr/>
+                    <a:lstStyle/>
+                    <a:p>
+                      <a:pPr>
+                        <a:defRPr sz="1100" b="0"/>
+                      </a:pPr>
+                      <a:r>
+                        <a:t>26</a:t>
+                      </a:r>
+                    </a:p>
+                  </a:txBody>
+                  <a:tcPr/>
+                </a:tc>
+                <a:tc>
+                  <a:txBody>
+                    <a:bodyPr/>
+                    <a:lstStyle/>
+                    <a:p>
+                      <a:pPr>
+                        <a:defRPr sz="1100" b="0"/>
+                      </a:pPr>
+                      <a:r>
+                        <a:t>3.0</a:t>
+                      </a:r>
+                    </a:p>
+                  </a:txBody>
+                  <a:tcPr/>
+                </a:tc>
+                <a:tc>
+                  <a:txBody>
+                    <a:bodyPr/>
+                    <a:lstStyle/>
+                    <a:p>
+                      <a:pPr>
+                        <a:defRPr sz="1100" b="0"/>
+                      </a:pPr>
+                      <a:r>
+                        <a:t>4.5</a:t>
+                      </a:r>
+                    </a:p>
+                  </a:txBody>
+                  <a:tcPr/>
+                </a:tc>
+                <a:tc>
+                  <a:txBody>
+                    <a:bodyPr/>
+                    <a:lstStyle/>
+                    <a:p>
+                      <a:pPr>
+                        <a:defRPr sz="1100" b="0"/>
+                      </a:pPr>
+                      <a:r>
+                        <a:t>727</a:t>
+                      </a:r>
+                    </a:p>
+                  </a:txBody>
+                  <a:tcPr/>
+                </a:tc>
+                <a:tc>
+                  <a:txBody>
+                    <a:bodyPr/>
+                    <a:lstStyle/>
+                    <a:p>
+                      <a:pPr>
+                        <a:defRPr sz="1100" b="0"/>
+                      </a:pPr>
+                      <a:r>
+                        <a:t>486.1</a:t>
+                      </a:r>
+                    </a:p>
+                  </a:txBody>
+                  <a:tcPr/>
+                </a:tc>
+                <a:tc>
+                  <a:txBody>
+                    <a:bodyPr/>
+                    <a:lstStyle/>
+                    <a:p>
+                      <a:pPr>
+                        <a:defRPr sz="1100" b="0"/>
+                      </a:pPr>
+                      <a:r>
+                        <a:t>152.3</a:t>
+                      </a:r>
+                    </a:p>
+                  </a:txBody>
+                  <a:tcPr/>
+                </a:tc>
+                <a:tc>
+                  <a:txBody>
+                    <a:bodyPr/>
+                    <a:lstStyle/>
+                    <a:p>
+                      <a:pPr>
+                        <a:defRPr sz="1100" b="0"/>
+                      </a:pPr>
+                      <a:r>
+                        <a:t>0.76</a:t>
+                      </a:r>
+                    </a:p>
+                  </a:txBody>
+                  <a:tcPr/>
+                </a:tc>
+                <a:tc>
+                  <a:txBody>
+                    <a:bodyPr/>
+                    <a:lstStyle/>
+                    <a:p>
+                      <a:pPr>
+                        <a:defRPr sz="1100" b="0"/>
+                      </a:pPr>
+                      <a:r>
+                        <a:t>4.05</a:t>
+                      </a:r>
+                    </a:p>
+                  </a:txBody>
+                  <a:tcPr/>
+                </a:tc>
+              </a:tr>
+              <a:tr h="384048">
+                <a:tc>
+                  <a:txBody>
+                    <a:bodyPr/>
+                    <a:lstStyle/>
+                    <a:p>
+                      <a:pPr>
+                        <a:defRPr sz="1100" b="0"/>
+                      </a:pPr>
+                      <a:r>
+                        <a:t>col_03</a:t>
+                      </a:r>
+                    </a:p>
+                  </a:txBody>
+                  <a:tcPr/>
+                </a:tc>
+                <a:tc>
+                  <a:txBody>
+                    <a:bodyPr/>
+                    <a:lstStyle/>
+                    <a:p>
+                      <a:pPr>
+                        <a:defRPr sz="1100" b="0"/>
+                      </a:pPr>
+                      <a:r>
+                        <a:t>943</a:t>
+                      </a:r>
+                    </a:p>
+                  </a:txBody>
+                  <a:tcPr/>
+                </a:tc>
+                <a:tc>
+                  <a:txBody>
+                    <a:bodyPr/>
+                    <a:lstStyle/>
+                    <a:p>
+                      <a:pPr>
+                        <a:defRPr sz="1100" b="0"/>
+                      </a:pPr>
+                      <a:r>
+                        <a:t>—</a:t>
+                      </a:r>
+                    </a:p>
+                  </a:txBody>
+                  <a:tcPr/>
+                </a:tc>
+                <a:tc>
+                  <a:txBody>
+                    <a:bodyPr/>
+                    <a:lstStyle/>
+                    <a:p>
+                      <a:pPr>
+                        <a:defRPr sz="1100" b="0"/>
+                      </a:pPr>
+                      <a:r>
+                        <a:t>—</a:t>
+                      </a:r>
+                    </a:p>
+                  </a:txBody>
+                  <a:tcPr/>
+                </a:tc>
+                <a:tc>
+                  <a:txBody>
+                    <a:bodyPr/>
+                    <a:lstStyle/>
+                    <a:p>
+                      <a:pPr>
+                        <a:defRPr sz="1100" b="0"/>
+                      </a:pPr>
+                      <a:r>
+                        <a:t>—</a:t>
+                      </a:r>
+                    </a:p>
+                  </a:txBody>
+                  <a:tcPr/>
+                </a:tc>
+                <a:tc>
+                  <a:txBody>
+                    <a:bodyPr/>
+                    <a:lstStyle/>
+                    <a:p>
+                      <a:pPr>
+                        <a:defRPr sz="1100" b="0"/>
+                      </a:pPr>
+                      <a:r>
+                        <a:t>0.7</a:t>
+                      </a:r>
+                    </a:p>
+                  </a:txBody>
+                  <a:tcPr/>
+                </a:tc>
+                <a:tc>
+                  <a:txBody>
+                    <a:bodyPr/>
+                    <a:lstStyle/>
+                    <a:p>
+                      <a:pPr>
+                        <a:defRPr sz="1100" b="0"/>
+                      </a:pPr>
+                      <a:r>
+                        <a:t>793</a:t>
+                      </a:r>
+                    </a:p>
+                  </a:txBody>
+                  <a:tcPr/>
+                </a:tc>
+                <a:tc>
+                  <a:txBody>
+                    <a:bodyPr/>
+                    <a:lstStyle/>
+                    <a:p>
+                      <a:pPr>
+                        <a:defRPr sz="1100" b="0"/>
+                      </a:pPr>
+                      <a:r>
+                        <a:t>-0.2</a:t>
+                      </a:r>
+                    </a:p>
+                  </a:txBody>
+                  <a:tcPr/>
+                </a:tc>
+                <a:tc>
+                  <a:txBody>
+                    <a:bodyPr/>
+                    <a:lstStyle/>
+                    <a:p>
+                      <a:pPr>
+                        <a:defRPr sz="1100" b="0"/>
+                      </a:pPr>
+                      <a:r>
+                        <a:t>165.1</a:t>
+                      </a:r>
+                    </a:p>
+                  </a:txBody>
+                  <a:tcPr/>
+                </a:tc>
+                <a:tc>
+                  <a:txBody>
+                    <a:bodyPr/>
+                    <a:lstStyle/>
+                    <a:p>
+                      <a:pPr>
+                        <a:defRPr sz="1100" b="0"/>
+                      </a:pPr>
+                      <a:r>
+                        <a:t>-0.00</a:t>
+                      </a:r>
+                    </a:p>
+                  </a:txBody>
+                  <a:tcPr/>
+                </a:tc>
+                <a:tc>
+                  <a:txBody>
+                    <a:bodyPr/>
+                    <a:lstStyle/>
+                    <a:p>
+                      <a:pPr>
+                        <a:defRPr sz="1100" b="0"/>
+                      </a:pPr>
+                      <a:r>
+                        <a:t>3.94</a:t>
+                      </a:r>
+                    </a:p>
+                  </a:txBody>
+                  <a:tcPr/>
+                </a:tc>
+              </a:tr>
+              <a:tr h="384048">
+                <a:tc>
+                  <a:txBody>
+                    <a:bodyPr/>
+                    <a:lstStyle/>
+                    <a:p>
+                      <a:pPr>
+                        <a:defRPr sz="1100" b="0"/>
+                      </a:pPr>
+                      <a:r>
+                        <a:t>col_04</a:t>
+                      </a:r>
+                    </a:p>
+                  </a:txBody>
+                  <a:tcPr/>
+                </a:tc>
+                <a:tc>
+                  <a:txBody>
+                    <a:bodyPr/>
+                    <a:lstStyle/>
+                    <a:p>
+                      <a:pPr>
+                        <a:defRPr sz="1100" b="0"/>
+                      </a:pPr>
+                      <a:r>
+                        <a:t>1031</a:t>
+                      </a:r>
+                    </a:p>
+                  </a:txBody>
+                  <a:tcPr/>
+                </a:tc>
+                <a:tc>
+                  <a:txBody>
+                    <a:bodyPr/>
+                    <a:lstStyle/>
+                    <a:p>
+                      <a:pPr>
+                        <a:defRPr sz="1100" b="0"/>
+                      </a:pPr>
+                      <a:r>
+                        <a:t>—</a:t>
+                      </a:r>
+                    </a:p>
+                  </a:txBody>
+                  <a:tcPr/>
+                </a:tc>
+                <a:tc>
+                  <a:txBody>
+                    <a:bodyPr/>
+                    <a:lstStyle/>
+                    <a:p>
+                      <a:pPr>
+                        <a:defRPr sz="1100" b="0"/>
+                      </a:pPr>
+                      <a:r>
+                        <a:t>—</a:t>
+                      </a:r>
+                    </a:p>
+                  </a:txBody>
+                  <a:tcPr/>
+                </a:tc>
+                <a:tc>
+                  <a:txBody>
+                    <a:bodyPr/>
+                    <a:lstStyle/>
+                    <a:p>
+                      <a:pPr>
+                        <a:defRPr sz="1100" b="0"/>
+                      </a:pPr>
+                      <a:r>
+                        <a:t>—</a:t>
+                      </a:r>
+                    </a:p>
+                  </a:txBody>
+                  <a:tcPr/>
+                </a:tc>
+                <a:tc>
+                  <a:txBody>
+                    <a:bodyPr/>
+                    <a:lstStyle/>
+                    <a:p>
+                      <a:pPr>
+                        <a:defRPr sz="1100" b="0"/>
+                      </a:pPr>
+                      <a:r>
+                        <a:t>0.9</a:t>
+                      </a:r>
+                    </a:p>
+                  </a:txBody>
+                  <a:tcPr/>
+                </a:tc>
+                <a:tc>
+                  <a:txBody>
+                    <a:bodyPr/>
+                    <a:lstStyle/>
+                    <a:p>
+                      <a:pPr>
+                        <a:defRPr sz="1100" b="0"/>
+                      </a:pPr>
+                      <a:r>
+                        <a:t>1361</a:t>
+                      </a:r>
+                    </a:p>
+                  </a:txBody>
+                  <a:tcPr/>
+                </a:tc>
+                <a:tc>
+                  <a:txBody>
+                    <a:bodyPr/>
+                    <a:lstStyle/>
+                    <a:p>
+                      <a:pPr>
+                        <a:defRPr sz="1100" b="0"/>
+                      </a:pPr>
+                      <a:r>
+                        <a:t>900.2</a:t>
+                      </a:r>
+                    </a:p>
+                  </a:txBody>
+                  <a:tcPr/>
+                </a:tc>
+                <a:tc>
+                  <a:txBody>
+                    <a:bodyPr/>
+                    <a:lstStyle/>
+                    <a:p>
+                      <a:pPr>
+                        <a:defRPr sz="1100" b="0"/>
+                      </a:pPr>
+                      <a:r>
+                        <a:t>363.5</a:t>
+                      </a:r>
+                    </a:p>
+                  </a:txBody>
+                  <a:tcPr/>
+                </a:tc>
+                <a:tc>
+                  <a:txBody>
+                    <a:bodyPr/>
+                    <a:lstStyle/>
+                    <a:p>
+                      <a:pPr>
+                        <a:defRPr sz="1100" b="0"/>
+                      </a:pPr>
+                      <a:r>
+                        <a:t>0.71</a:t>
+                      </a:r>
+                    </a:p>
+                  </a:txBody>
+                  <a:tcPr/>
+                </a:tc>
+                <a:tc>
+                  <a:txBody>
+                    <a:bodyPr/>
+                    <a:lstStyle/>
+                    <a:p>
+                      <a:pPr>
+                        <a:defRPr sz="1100" b="0"/>
+                      </a:pPr>
+                      <a:r>
+                        <a:t>3.60</a:t>
+                      </a:r>
+                    </a:p>
+                  </a:txBody>
+                  <a:tcPr/>
+                </a:tc>
+              </a:tr>
+              <a:tr h="384048">
+                <a:tc>
+                  <a:txBody>
+                    <a:bodyPr/>
+                    <a:lstStyle/>
+                    <a:p>
+                      <a:pPr>
+                        <a:defRPr sz="1100" b="0"/>
+                      </a:pPr>
+                      <a:r>
+                        <a:t>col_07</a:t>
+                      </a:r>
+                    </a:p>
+                  </a:txBody>
+                  <a:tcPr/>
+                </a:tc>
+                <a:tc>
+                  <a:txBody>
+                    <a:bodyPr/>
+                    <a:lstStyle/>
+                    <a:p>
+                      <a:pPr>
+                        <a:defRPr sz="1100" b="0"/>
+                      </a:pPr>
+                      <a:r>
+                        <a:t>1116</a:t>
+                      </a:r>
+                    </a:p>
+                  </a:txBody>
+                  <a:tcPr/>
+                </a:tc>
+                <a:tc>
+                  <a:txBody>
+                    <a:bodyPr/>
+                    <a:lstStyle/>
+                    <a:p>
+                      <a:pPr>
+                        <a:defRPr sz="1100" b="0"/>
+                      </a:pPr>
+                      <a:r>
+                        <a:t>loam</a:t>
+                      </a:r>
+                    </a:p>
+                  </a:txBody>
+                  <a:tcPr/>
+                </a:tc>
+                <a:tc>
+                  <a:txBody>
+                    <a:bodyPr/>
+                    <a:lstStyle/>
+                    <a:p>
+                      <a:pPr>
+                        <a:defRPr sz="1100" b="0"/>
+                      </a:pPr>
+                      <a:r>
+                        <a:t>14</a:t>
+                      </a:r>
+                    </a:p>
+                  </a:txBody>
+                  <a:tcPr/>
+                </a:tc>
+                <a:tc>
+                  <a:txBody>
+                    <a:bodyPr/>
+                    <a:lstStyle/>
+                    <a:p>
+                      <a:pPr>
+                        <a:defRPr sz="1100" b="0"/>
+                      </a:pPr>
+                      <a:r>
+                        <a:t>9.0</a:t>
+                      </a:r>
+                    </a:p>
+                  </a:txBody>
+                  <a:tcPr/>
+                </a:tc>
+                <a:tc>
+                  <a:txBody>
+                    <a:bodyPr/>
+                    <a:lstStyle/>
+                    <a:p>
+                      <a:pPr>
+                        <a:defRPr sz="1100" b="0"/>
+                      </a:pPr>
+                      <a:r>
+                        <a:t>0.7</a:t>
+                      </a:r>
+                    </a:p>
+                  </a:txBody>
+                  <a:tcPr/>
+                </a:tc>
+                <a:tc>
+                  <a:txBody>
+                    <a:bodyPr/>
+                    <a:lstStyle/>
+                    <a:p>
+                      <a:pPr>
+                        <a:defRPr sz="1100" b="0"/>
+                      </a:pPr>
+                      <a:r>
+                        <a:t>975</a:t>
+                      </a:r>
+                    </a:p>
+                  </a:txBody>
+                  <a:tcPr/>
+                </a:tc>
+                <a:tc>
+                  <a:txBody>
+                    <a:bodyPr/>
+                    <a:lstStyle/>
+                    <a:p>
+                      <a:pPr>
+                        <a:defRPr sz="1100" b="0"/>
+                      </a:pPr>
+                      <a:r>
+                        <a:t>338.8</a:t>
+                      </a:r>
+                    </a:p>
+                  </a:txBody>
+                  <a:tcPr/>
+                </a:tc>
+                <a:tc>
+                  <a:txBody>
+                    <a:bodyPr/>
+                    <a:lstStyle/>
+                    <a:p>
+                      <a:pPr>
+                        <a:defRPr sz="1100" b="0"/>
+                      </a:pPr>
+                      <a:r>
+                        <a:t>239.9</a:t>
+                      </a:r>
+                    </a:p>
+                  </a:txBody>
+                  <a:tcPr/>
+                </a:tc>
+                <a:tc>
+                  <a:txBody>
+                    <a:bodyPr/>
+                    <a:lstStyle/>
+                    <a:p>
+                      <a:pPr>
+                        <a:defRPr sz="1100" b="0"/>
+                      </a:pPr>
+                      <a:r>
+                        <a:t>0.59</a:t>
+                      </a:r>
+                    </a:p>
+                  </a:txBody>
+                  <a:tcPr/>
+                </a:tc>
+                <a:tc>
+                  <a:txBody>
+                    <a:bodyPr/>
+                    <a:lstStyle/>
+                    <a:p>
+                      <a:pPr>
+                        <a:defRPr sz="1100" b="0"/>
+                      </a:pPr>
+                      <a:r>
+                        <a:t>3.56</a:t>
+                      </a:r>
+                    </a:p>
+                  </a:txBody>
+                  <a:tcPr/>
+                </a:tc>
+              </a:tr>
+              <a:tr h="384048">
+                <a:tc>
+                  <a:txBody>
+                    <a:bodyPr/>
+                    <a:lstStyle/>
+                    <a:p>
+                      <a:pPr>
+                        <a:defRPr sz="1100" b="0"/>
+                      </a:pPr>
+                      <a:r>
+                        <a:t>col_08</a:t>
+                      </a:r>
+                    </a:p>
+                  </a:txBody>
+                  <a:tcPr/>
+                </a:tc>
+                <a:tc>
+                  <a:txBody>
+                    <a:bodyPr/>
+                    <a:lstStyle/>
+                    <a:p>
+                      <a:pPr>
+                        <a:defRPr sz="1100" b="0"/>
+                      </a:pPr>
+                      <a:r>
+                        <a:t>1130</a:t>
+                      </a:r>
+                    </a:p>
+                  </a:txBody>
+                  <a:tcPr/>
+                </a:tc>
+                <a:tc>
+                  <a:txBody>
+                    <a:bodyPr/>
+                    <a:lstStyle/>
+                    <a:p>
+                      <a:pPr>
+                        <a:defRPr sz="1100" b="0"/>
+                      </a:pPr>
+                      <a:r>
+                        <a:t>loam</a:t>
+                      </a:r>
+                    </a:p>
+                  </a:txBody>
+                  <a:tcPr/>
+                </a:tc>
+                <a:tc>
+                  <a:txBody>
+                    <a:bodyPr/>
+                    <a:lstStyle/>
+                    <a:p>
+                      <a:pPr>
+                        <a:defRPr sz="1100" b="0"/>
+                      </a:pPr>
+                      <a:r>
+                        <a:t>54</a:t>
+                      </a:r>
+                    </a:p>
+                  </a:txBody>
+                  <a:tcPr/>
+                </a:tc>
+                <a:tc>
+                  <a:txBody>
+                    <a:bodyPr/>
+                    <a:lstStyle/>
+                    <a:p>
+                      <a:pPr>
+                        <a:defRPr sz="1100" b="0"/>
+                      </a:pPr>
+                      <a:r>
+                        <a:t>0.1</a:t>
+                      </a:r>
+                    </a:p>
+                  </a:txBody>
+                  <a:tcPr/>
+                </a:tc>
+                <a:tc>
+                  <a:txBody>
+                    <a:bodyPr/>
+                    <a:lstStyle/>
+                    <a:p>
+                      <a:pPr>
+                        <a:defRPr sz="1100" b="0"/>
+                      </a:pPr>
+                      <a:r>
+                        <a:t>34.8</a:t>
+                      </a:r>
+                    </a:p>
+                  </a:txBody>
+                  <a:tcPr/>
+                </a:tc>
+                <a:tc>
+                  <a:txBody>
+                    <a:bodyPr/>
+                    <a:lstStyle/>
+                    <a:p>
+                      <a:pPr>
+                        <a:defRPr sz="1100" b="0"/>
+                      </a:pPr>
+                      <a:r>
+                        <a:t>509</a:t>
+                      </a:r>
+                    </a:p>
+                  </a:txBody>
+                  <a:tcPr/>
+                </a:tc>
+                <a:tc>
+                  <a:txBody>
+                    <a:bodyPr/>
+                    <a:lstStyle/>
+                    <a:p>
+                      <a:pPr>
+                        <a:defRPr sz="1100" b="0"/>
+                      </a:pPr>
+                      <a:r>
+                        <a:t>349.5</a:t>
+                      </a:r>
+                    </a:p>
+                  </a:txBody>
+                  <a:tcPr/>
+                </a:tc>
+                <a:tc>
+                  <a:txBody>
+                    <a:bodyPr/>
+                    <a:lstStyle/>
+                    <a:p>
+                      <a:pPr>
+                        <a:defRPr sz="1100" b="0"/>
+                      </a:pPr>
+                      <a:r>
+                        <a:t>0.4</a:t>
+                      </a:r>
+                    </a:p>
+                  </a:txBody>
+                  <a:tcPr/>
+                </a:tc>
+                <a:tc>
+                  <a:txBody>
+                    <a:bodyPr/>
+                    <a:lstStyle/>
+                    <a:p>
+                      <a:pPr>
+                        <a:defRPr sz="1100" b="0"/>
+                      </a:pPr>
+                      <a:r>
+                        <a:t>1.00</a:t>
+                      </a:r>
+                    </a:p>
+                  </a:txBody>
+                  <a:tcPr/>
+                </a:tc>
+                <a:tc>
+                  <a:txBody>
+                    <a:bodyPr/>
+                    <a:lstStyle/>
+                    <a:p>
+                      <a:pPr>
+                        <a:defRPr sz="1100" b="0"/>
+                      </a:pPr>
+                      <a:r>
+                        <a:t>27.59</a:t>
+                      </a:r>
+                    </a:p>
+                  </a:txBody>
+                  <a:tcPr/>
+                </a:tc>
+              </a:tr>
+              <a:tr h="384048">
+                <a:tc>
+                  <a:txBody>
+                    <a:bodyPr/>
+                    <a:lstStyle/>
+                    <a:p>
+                      <a:pPr>
+                        <a:defRPr sz="1100" b="0"/>
+                      </a:pPr>
+                      <a:r>
+                        <a:t>col_09</a:t>
+                      </a:r>
+                    </a:p>
+                  </a:txBody>
+                  <a:tcPr/>
+                </a:tc>
+                <a:tc>
+                  <a:txBody>
+                    <a:bodyPr/>
+                    <a:lstStyle/>
+                    <a:p>
+                      <a:pPr>
+                        <a:defRPr sz="1100" b="0"/>
+                      </a:pPr>
+                      <a:r>
+                        <a:t>1186</a:t>
+                      </a:r>
+                    </a:p>
+                  </a:txBody>
+                  <a:tcPr/>
+                </a:tc>
+                <a:tc>
+                  <a:txBody>
+                    <a:bodyPr/>
+                    <a:lstStyle/>
+                    <a:p>
+                      <a:pPr>
+                        <a:defRPr sz="1100" b="0"/>
+                      </a:pPr>
+                      <a:r>
+                        <a:t>loam</a:t>
+                      </a:r>
+                    </a:p>
+                  </a:txBody>
+                  <a:tcPr/>
+                </a:tc>
+                <a:tc>
+                  <a:txBody>
+                    <a:bodyPr/>
+                    <a:lstStyle/>
+                    <a:p>
+                      <a:pPr>
+                        <a:defRPr sz="1100" b="0"/>
+                      </a:pPr>
+                      <a:r>
+                        <a:t>12</a:t>
+                      </a:r>
+                    </a:p>
+                  </a:txBody>
+                  <a:tcPr/>
+                </a:tc>
+                <a:tc>
+                  <a:txBody>
+                    <a:bodyPr/>
+                    <a:lstStyle/>
+                    <a:p>
+                      <a:pPr>
+                        <a:defRPr sz="1100" b="0"/>
+                      </a:pPr>
+                      <a:r>
+                        <a:t>28.0</a:t>
+                      </a:r>
+                    </a:p>
+                  </a:txBody>
+                  <a:tcPr/>
+                </a:tc>
+                <a:tc>
+                  <a:txBody>
+                    <a:bodyPr/>
+                    <a:lstStyle/>
+                    <a:p>
+                      <a:pPr>
+                        <a:defRPr sz="1100" b="0"/>
+                      </a:pPr>
+                      <a:r>
+                        <a:t>0.2</a:t>
+                      </a:r>
+                    </a:p>
+                  </a:txBody>
+                  <a:tcPr/>
+                </a:tc>
+                <a:tc>
+                  <a:txBody>
+                    <a:bodyPr/>
+                    <a:lstStyle/>
+                    <a:p>
+                      <a:pPr>
+                        <a:defRPr sz="1100" b="0"/>
+                      </a:pPr>
+                      <a:r>
+                        <a:t>793</a:t>
+                      </a:r>
+                    </a:p>
+                  </a:txBody>
+                  <a:tcPr/>
+                </a:tc>
+                <a:tc>
+                  <a:txBody>
+                    <a:bodyPr/>
+                    <a:lstStyle/>
+                    <a:p>
+                      <a:pPr>
+                        <a:defRPr sz="1100" b="0"/>
+                      </a:pPr>
+                      <a:r>
+                        <a:t>-53.1</a:t>
+                      </a:r>
+                    </a:p>
+                  </a:txBody>
+                  <a:tcPr/>
+                </a:tc>
+                <a:tc>
+                  <a:txBody>
+                    <a:bodyPr/>
+                    <a:lstStyle/>
+                    <a:p>
+                      <a:pPr>
+                        <a:defRPr sz="1100" b="0"/>
+                      </a:pPr>
+                      <a:r>
+                        <a:t>165.7</a:t>
+                      </a:r>
+                    </a:p>
+                  </a:txBody>
+                  <a:tcPr/>
+                </a:tc>
+                <a:tc>
+                  <a:txBody>
+                    <a:bodyPr/>
+                    <a:lstStyle/>
+                    <a:p>
+                      <a:pPr>
+                        <a:defRPr sz="1100" b="0"/>
+                      </a:pPr>
+                      <a:r>
+                        <a:t>-0.47</a:t>
+                      </a:r>
+                    </a:p>
+                  </a:txBody>
+                  <a:tcPr/>
+                </a:tc>
+                <a:tc>
+                  <a:txBody>
+                    <a:bodyPr/>
+                    <a:lstStyle/>
+                    <a:p>
+                      <a:pPr>
+                        <a:defRPr sz="1100" b="0"/>
+                      </a:pPr>
+                      <a:r>
+                        <a:t>3.79</a:t>
+                      </a:r>
+                    </a:p>
+                  </a:txBody>
+                  <a:tcPr/>
+                </a:tc>
+              </a:tr>
+              <a:tr h="384048">
+                <a:tc>
+                  <a:txBody>
+                    <a:bodyPr/>
+                    <a:lstStyle/>
+                    <a:p>
+                      <a:pPr>
+                        <a:defRPr sz="1100" b="0"/>
+                      </a:pPr>
+                      <a:r>
+                        <a:t>col_10</a:t>
+                      </a:r>
+                    </a:p>
+                  </a:txBody>
+                  <a:tcPr/>
+                </a:tc>
+                <a:tc>
+                  <a:txBody>
+                    <a:bodyPr/>
+                    <a:lstStyle/>
+                    <a:p>
+                      <a:pPr>
+                        <a:defRPr sz="1100" b="0"/>
+                      </a:pPr>
+                      <a:r>
+                        <a:t>1249</a:t>
+                      </a:r>
+                    </a:p>
+                  </a:txBody>
+                  <a:tcPr/>
+                </a:tc>
+                <a:tc>
+                  <a:txBody>
+                    <a:bodyPr/>
+                    <a:lstStyle/>
+                    <a:p>
+                      <a:pPr>
+                        <a:defRPr sz="1100" b="0"/>
+                      </a:pPr>
+                      <a:r>
+                        <a:t>loam</a:t>
+                      </a:r>
+                    </a:p>
+                  </a:txBody>
+                  <a:tcPr/>
+                </a:tc>
+                <a:tc>
+                  <a:txBody>
+                    <a:bodyPr/>
+                    <a:lstStyle/>
+                    <a:p>
+                      <a:pPr>
+                        <a:defRPr sz="1100" b="0"/>
+                      </a:pPr>
+                      <a:r>
+                        <a:t>8</a:t>
+                      </a:r>
+                    </a:p>
+                  </a:txBody>
+                  <a:tcPr/>
+                </a:tc>
+                <a:tc>
+                  <a:txBody>
+                    <a:bodyPr/>
+                    <a:lstStyle/>
+                    <a:p>
+                      <a:pPr>
+                        <a:defRPr sz="1100" b="0"/>
+                      </a:pPr>
+                      <a:r>
+                        <a:t>28.0</a:t>
+                      </a:r>
+                    </a:p>
+                  </a:txBody>
+                  <a:tcPr/>
+                </a:tc>
+                <a:tc>
+                  <a:txBody>
+                    <a:bodyPr/>
+                    <a:lstStyle/>
+                    <a:p>
+                      <a:pPr>
+                        <a:defRPr sz="1100" b="0"/>
+                      </a:pPr>
+                      <a:r>
+                        <a:t>22.2</a:t>
+                      </a:r>
+                    </a:p>
+                  </a:txBody>
+                  <a:tcPr/>
+                </a:tc>
+                <a:tc>
+                  <a:txBody>
+                    <a:bodyPr/>
+                    <a:lstStyle/>
+                    <a:p>
+                      <a:pPr>
+                        <a:defRPr sz="1100" b="0"/>
+                      </a:pPr>
+                      <a:r>
+                        <a:t>699</a:t>
+                      </a:r>
+                    </a:p>
+                  </a:txBody>
+                  <a:tcPr/>
+                </a:tc>
+                <a:tc>
+                  <a:txBody>
+                    <a:bodyPr/>
+                    <a:lstStyle/>
+                    <a:p>
+                      <a:pPr>
+                        <a:defRPr sz="1100" b="0"/>
+                      </a:pPr>
+                      <a:r>
+                        <a:t>1154.1</a:t>
+                      </a:r>
+                    </a:p>
+                  </a:txBody>
+                  <a:tcPr/>
+                </a:tc>
+                <a:tc>
+                  <a:txBody>
+                    <a:bodyPr/>
+                    <a:lstStyle/>
+                    <a:p>
+                      <a:pPr>
+                        <a:defRPr sz="1100" b="0"/>
+                      </a:pPr>
+                      <a:r>
+                        <a:t>3.4</a:t>
+                      </a:r>
+                    </a:p>
+                  </a:txBody>
+                  <a:tcPr/>
+                </a:tc>
+                <a:tc>
+                  <a:txBody>
+                    <a:bodyPr/>
+                    <a:lstStyle/>
+                    <a:p>
+                      <a:pPr>
+                        <a:defRPr sz="1100" b="0"/>
+                      </a:pPr>
+                      <a:r>
+                        <a:t>1.00</a:t>
+                      </a:r>
+                    </a:p>
+                  </a:txBody>
+                  <a:tcPr/>
+                </a:tc>
+                <a:tc>
+                  <a:txBody>
+                    <a:bodyPr/>
+                    <a:lstStyle/>
+                    <a:p>
+                      <a:pPr>
+                        <a:defRPr sz="1100" b="0"/>
+                      </a:pPr>
+                      <a:r>
+                        <a:t>19.98</a:t>
+                      </a:r>
+                    </a:p>
+                  </a:txBody>
+                  <a:tcPr/>
+                </a:tc>
+              </a:tr>
+              <a:tr h="384048">
+                <a:tc>
+                  <a:txBody>
+                    <a:bodyPr/>
+                    <a:lstStyle/>
+                    <a:p>
+                      <a:pPr>
+                        <a:defRPr sz="1100" b="0"/>
+                      </a:pPr>
+                      <a:r>
+                        <a:t>col_15</a:t>
+                      </a:r>
+                    </a:p>
+                  </a:txBody>
+                  <a:tcPr/>
+                </a:tc>
+                <a:tc>
+                  <a:txBody>
+                    <a:bodyPr/>
+                    <a:lstStyle/>
+                    <a:p>
+                      <a:pPr>
+                        <a:defRPr sz="1100" b="0"/>
+                      </a:pPr>
+                      <a:r>
+                        <a:t>1273</a:t>
+                      </a:r>
+                    </a:p>
+                  </a:txBody>
+                  <a:tcPr/>
+                </a:tc>
+                <a:tc>
+                  <a:txBody>
+                    <a:bodyPr/>
+                    <a:lstStyle/>
+                    <a:p>
+                      <a:pPr>
+                        <a:defRPr sz="1100" b="0"/>
+                      </a:pPr>
+                      <a:r>
+                        <a:t>loam</a:t>
+                      </a:r>
+                    </a:p>
+                  </a:txBody>
+                  <a:tcPr/>
+                </a:tc>
+                <a:tc>
+                  <a:txBody>
+                    <a:bodyPr/>
+                    <a:lstStyle/>
+                    <a:p>
+                      <a:pPr>
+                        <a:defRPr sz="1100" b="0"/>
+                      </a:pPr>
+                      <a:r>
+                        <a:t>6</a:t>
+                      </a:r>
+                    </a:p>
+                  </a:txBody>
+                  <a:tcPr/>
+                </a:tc>
+                <a:tc>
+                  <a:txBody>
+                    <a:bodyPr/>
+                    <a:lstStyle/>
+                    <a:p>
+                      <a:pPr>
+                        <a:defRPr sz="1100" b="0"/>
+                      </a:pPr>
+                      <a:r>
+                        <a:t>28.0</a:t>
+                      </a:r>
+                    </a:p>
+                  </a:txBody>
+                  <a:tcPr/>
+                </a:tc>
+                <a:tc>
+                  <a:txBody>
+                    <a:bodyPr/>
+                    <a:lstStyle/>
+                    <a:p>
+                      <a:pPr>
+                        <a:defRPr sz="1100" b="0"/>
+                      </a:pPr>
+                      <a:r>
+                        <a:t>215.2</a:t>
+                      </a:r>
+                    </a:p>
+                  </a:txBody>
+                  <a:tcPr/>
+                </a:tc>
+                <a:tc>
+                  <a:txBody>
+                    <a:bodyPr/>
+                    <a:lstStyle/>
+                    <a:p>
+                      <a:pPr>
+                        <a:defRPr sz="1100" b="0"/>
+                      </a:pPr>
+                      <a:r>
+                        <a:t>735</a:t>
+                      </a:r>
+                    </a:p>
+                  </a:txBody>
+                  <a:tcPr/>
+                </a:tc>
+                <a:tc>
+                  <a:txBody>
+                    <a:bodyPr/>
+                    <a:lstStyle/>
+                    <a:p>
+                      <a:pPr>
+                        <a:defRPr sz="1100" b="0"/>
+                      </a:pPr>
+                      <a:r>
+                        <a:t>70.3</a:t>
+                      </a:r>
+                    </a:p>
+                  </a:txBody>
+                  <a:tcPr/>
+                </a:tc>
+                <a:tc>
+                  <a:txBody>
+                    <a:bodyPr/>
+                    <a:lstStyle/>
+                    <a:p>
+                      <a:pPr>
+                        <a:defRPr sz="1100" b="0"/>
+                      </a:pPr>
+                      <a:r>
+                        <a:t>0.4</a:t>
+                      </a:r>
+                    </a:p>
+                  </a:txBody>
+                  <a:tcPr/>
+                </a:tc>
+                <a:tc>
+                  <a:txBody>
+                    <a:bodyPr/>
+                    <a:lstStyle/>
+                    <a:p>
+                      <a:pPr>
+                        <a:defRPr sz="1100" b="0"/>
+                      </a:pPr>
+                      <a:r>
+                        <a:t>0.99</a:t>
+                      </a:r>
+                    </a:p>
+                  </a:txBody>
+                  <a:tcPr/>
+                </a:tc>
+                <a:tc>
+                  <a:txBody>
+                    <a:bodyPr/>
+                    <a:lstStyle/>
+                    <a:p>
+                      <a:pPr>
+                        <a:defRPr sz="1100" b="0"/>
+                      </a:pPr>
+                      <a:r>
+                        <a:t>28.73</a:t>
+                      </a:r>
+                    </a:p>
+                  </a:txBody>
+                  <a:tcPr/>
+                </a:tc>
+              </a:tr>
+              <a:tr h="384048">
+                <a:tc>
+                  <a:txBody>
+                    <a:bodyPr/>
+                    <a:lstStyle/>
+                    <a:p>
+                      <a:pPr>
+                        <a:defRPr sz="1100" b="0"/>
+                      </a:pPr>
+                      <a:r>
+                        <a:t>col_13</a:t>
+                      </a:r>
+                    </a:p>
+                  </a:txBody>
+                  <a:tcPr/>
+                </a:tc>
+                <a:tc>
+                  <a:txBody>
+                    <a:bodyPr/>
+                    <a:lstStyle/>
+                    <a:p>
+                      <a:pPr>
+                        <a:defRPr sz="1100" b="0"/>
+                      </a:pPr>
+                      <a:r>
+                        <a:t>1280</a:t>
+                      </a:r>
+                    </a:p>
+                  </a:txBody>
+                  <a:tcPr/>
+                </a:tc>
+                <a:tc>
+                  <a:txBody>
+                    <a:bodyPr/>
+                    <a:lstStyle/>
+                    <a:p>
+                      <a:pPr>
+                        <a:defRPr sz="1100" b="0"/>
+                      </a:pPr>
+                      <a:r>
+                        <a:t>loam</a:t>
+                      </a:r>
+                    </a:p>
+                  </a:txBody>
+                  <a:tcPr/>
+                </a:tc>
+                <a:tc>
+                  <a:txBody>
+                    <a:bodyPr/>
+                    <a:lstStyle/>
+                    <a:p>
+                      <a:pPr>
+                        <a:defRPr sz="1100" b="0"/>
+                      </a:pPr>
+                      <a:r>
+                        <a:t>22</a:t>
+                      </a:r>
+                    </a:p>
+                  </a:txBody>
+                  <a:tcPr/>
+                </a:tc>
+                <a:tc>
+                  <a:txBody>
+                    <a:bodyPr/>
+                    <a:lstStyle/>
+                    <a:p>
+                      <a:pPr>
+                        <a:defRPr sz="1100" b="0"/>
+                      </a:pPr>
+                      <a:r>
+                        <a:t>9.0</a:t>
+                      </a:r>
+                    </a:p>
+                  </a:txBody>
+                  <a:tcPr/>
+                </a:tc>
+                <a:tc>
+                  <a:txBody>
+                    <a:bodyPr/>
+                    <a:lstStyle/>
+                    <a:p>
+                      <a:pPr>
+                        <a:defRPr sz="1100" b="0"/>
+                      </a:pPr>
+                      <a:r>
+                        <a:t>114.5</a:t>
+                      </a:r>
+                    </a:p>
+                  </a:txBody>
+                  <a:tcPr/>
+                </a:tc>
+                <a:tc>
+                  <a:txBody>
+                    <a:bodyPr/>
+                    <a:lstStyle/>
+                    <a:p>
+                      <a:pPr>
+                        <a:defRPr sz="1100" b="0"/>
+                      </a:pPr>
+                      <a:r>
+                        <a:t>459</a:t>
+                      </a:r>
+                    </a:p>
+                  </a:txBody>
+                  <a:tcPr/>
+                </a:tc>
+                <a:tc>
+                  <a:txBody>
+                    <a:bodyPr/>
+                    <a:lstStyle/>
+                    <a:p>
+                      <a:pPr>
+                        <a:defRPr sz="1100" b="0"/>
+                      </a:pPr>
+                      <a:r>
+                        <a:t>478.4</a:t>
+                      </a:r>
+                    </a:p>
+                  </a:txBody>
+                  <a:tcPr/>
+                </a:tc>
+                <a:tc>
+                  <a:txBody>
+                    <a:bodyPr/>
+                    <a:lstStyle/>
+                    <a:p>
+                      <a:pPr>
+                        <a:defRPr sz="1100" b="0"/>
+                      </a:pPr>
+                      <a:r>
+                        <a:t>0.3</a:t>
+                      </a:r>
+                    </a:p>
+                  </a:txBody>
+                  <a:tcPr/>
+                </a:tc>
+                <a:tc>
+                  <a:txBody>
+                    <a:bodyPr/>
+                    <a:lstStyle/>
+                    <a:p>
+                      <a:pPr>
+                        <a:defRPr sz="1100" b="0"/>
+                      </a:pPr>
+                      <a:r>
+                        <a:t>1.00</a:t>
+                      </a:r>
+                    </a:p>
+                  </a:txBody>
+                  <a:tcPr/>
+                </a:tc>
+                <a:tc>
+                  <a:txBody>
+                    <a:bodyPr/>
+                    <a:lstStyle/>
+                    <a:p>
+                      <a:pPr>
+                        <a:defRPr sz="1100" b="0"/>
+                      </a:pPr>
+                      <a:r>
+                        <a:t>27.68</a:t>
+                      </a:r>
+                    </a:p>
+                  </a:txBody>
+                  <a:tcPr/>
+                </a:tc>
+              </a:tr>
+              <a:tr h="384048">
+                <a:tc>
+                  <a:txBody>
+                    <a:bodyPr/>
+                    <a:lstStyle/>
+                    <a:p>
+                      <a:pPr>
+                        <a:defRPr sz="1100" b="0"/>
+                      </a:pPr>
+                      <a:r>
+                        <a:t>col_14</a:t>
+                      </a:r>
+                    </a:p>
+                  </a:txBody>
+                  <a:tcPr/>
+                </a:tc>
+                <a:tc>
+                  <a:txBody>
+                    <a:bodyPr/>
+                    <a:lstStyle/>
+                    <a:p>
+                      <a:pPr>
+                        <a:defRPr sz="1100" b="0"/>
+                      </a:pPr>
+                      <a:r>
+                        <a:t>1390</a:t>
+                      </a:r>
+                    </a:p>
+                  </a:txBody>
+                  <a:tcPr/>
+                </a:tc>
+                <a:tc>
+                  <a:txBody>
+                    <a:bodyPr/>
+                    <a:lstStyle/>
+                    <a:p>
+                      <a:pPr>
+                        <a:defRPr sz="1100" b="0"/>
+                      </a:pPr>
+                      <a:r>
+                        <a:t>sandy loam</a:t>
+                      </a:r>
+                    </a:p>
+                  </a:txBody>
+                  <a:tcPr/>
+                </a:tc>
+                <a:tc>
+                  <a:txBody>
+                    <a:bodyPr/>
+                    <a:lstStyle/>
+                    <a:p>
+                      <a:pPr>
+                        <a:defRPr sz="1100" b="0"/>
+                      </a:pPr>
+                      <a:r>
+                        <a:t>8</a:t>
+                      </a:r>
+                    </a:p>
+                  </a:txBody>
+                  <a:tcPr/>
+                </a:tc>
+                <a:tc>
+                  <a:txBody>
+                    <a:bodyPr/>
+                    <a:lstStyle/>
+                    <a:p>
+                      <a:pPr>
+                        <a:defRPr sz="1100" b="0"/>
+                      </a:pPr>
+                      <a:r>
+                        <a:t>9.0</a:t>
+                      </a:r>
+                    </a:p>
+                  </a:txBody>
+                  <a:tcPr/>
+                </a:tc>
+                <a:tc>
+                  <a:txBody>
+                    <a:bodyPr/>
+                    <a:lstStyle/>
+                    <a:p>
+                      <a:pPr>
+                        <a:defRPr sz="1100" b="0"/>
+                      </a:pPr>
+                      <a:r>
+                        <a:t>0.6</a:t>
+                      </a:r>
+                    </a:p>
+                  </a:txBody>
+                  <a:tcPr/>
+                </a:tc>
+                <a:tc>
+                  <a:txBody>
+                    <a:bodyPr/>
+                    <a:lstStyle/>
+                    <a:p>
+                      <a:pPr>
+                        <a:defRPr sz="1100" b="0"/>
+                      </a:pPr>
+                      <a:r>
+                        <a:t>611</a:t>
+                      </a:r>
+                    </a:p>
+                  </a:txBody>
+                  <a:tcPr/>
+                </a:tc>
+                <a:tc>
+                  <a:txBody>
+                    <a:bodyPr/>
+                    <a:lstStyle/>
+                    <a:p>
+                      <a:pPr>
+                        <a:defRPr sz="1100" b="0"/>
+                      </a:pPr>
+                      <a:r>
+                        <a:t>-34.5</a:t>
+                      </a:r>
+                    </a:p>
+                  </a:txBody>
+                  <a:tcPr/>
+                </a:tc>
+                <a:tc>
+                  <a:txBody>
+                    <a:bodyPr/>
+                    <a:lstStyle/>
+                    <a:p>
+                      <a:pPr>
+                        <a:defRPr sz="1100" b="0"/>
+                      </a:pPr>
+                      <a:r>
+                        <a:t>412.7</a:t>
+                      </a:r>
+                    </a:p>
+                  </a:txBody>
+                  <a:tcPr/>
+                </a:tc>
+                <a:tc>
+                  <a:txBody>
+                    <a:bodyPr/>
+                    <a:lstStyle/>
+                    <a:p>
+                      <a:pPr>
+                        <a:defRPr sz="1100" b="0"/>
+                      </a:pPr>
+                      <a:r>
+                        <a:t>-0.09</a:t>
+                      </a:r>
+                    </a:p>
+                  </a:txBody>
+                  <a:tcPr/>
+                </a:tc>
+                <a:tc>
+                  <a:txBody>
+                    <a:bodyPr/>
+                    <a:lstStyle/>
+                    <a:p>
+                      <a:pPr>
+                        <a:defRPr sz="1100" b="0"/>
+                      </a:pPr>
+                      <a:r>
+                        <a:t>3.79</a:t>
+                      </a:r>
+                    </a:p>
+                  </a:txBody>
+                  <a:tcPr/>
+                </a:tc>
+              </a:tr>
+              <a:tr h="384048">
+                <a:tc>
+                  <a:txBody>
+                    <a:bodyPr/>
+                    <a:lstStyle/>
+                    <a:p>
+                      <a:pPr>
+                        <a:defRPr sz="1100" b="0"/>
+                      </a:pPr>
+                      <a:r>
+                        <a:t>col_12</a:t>
+                      </a:r>
+                    </a:p>
+                  </a:txBody>
+                  <a:tcPr/>
+                </a:tc>
+                <a:tc>
+                  <a:txBody>
+                    <a:bodyPr/>
+                    <a:lstStyle/>
+                    <a:p>
+                      <a:pPr>
+                        <a:defRPr sz="1100" b="0"/>
+                      </a:pPr>
+                      <a:r>
+                        <a:t>1428</a:t>
+                      </a:r>
+                    </a:p>
+                  </a:txBody>
+                  <a:tcPr/>
+                </a:tc>
+                <a:tc>
+                  <a:txBody>
+                    <a:bodyPr/>
+                    <a:lstStyle/>
+                    <a:p>
+                      <a:pPr>
+                        <a:defRPr sz="1100" b="0"/>
+                      </a:pPr>
+                      <a:r>
+                        <a:t>loam</a:t>
+                      </a:r>
+                    </a:p>
+                  </a:txBody>
+                  <a:tcPr/>
+                </a:tc>
+                <a:tc>
+                  <a:txBody>
+                    <a:bodyPr/>
+                    <a:lstStyle/>
+                    <a:p>
+                      <a:pPr>
+                        <a:defRPr sz="1100" b="0"/>
+                      </a:pPr>
+                      <a:r>
+                        <a:t>21</a:t>
+                      </a:r>
+                    </a:p>
+                  </a:txBody>
+                  <a:tcPr/>
+                </a:tc>
+                <a:tc>
+                  <a:txBody>
+                    <a:bodyPr/>
+                    <a:lstStyle/>
+                    <a:p>
+                      <a:pPr>
+                        <a:defRPr sz="1100" b="0"/>
+                      </a:pPr>
+                      <a:r>
+                        <a:t>9.0</a:t>
+                      </a:r>
+                    </a:p>
+                  </a:txBody>
+                  <a:tcPr/>
+                </a:tc>
+                <a:tc>
+                  <a:txBody>
+                    <a:bodyPr/>
+                    <a:lstStyle/>
+                    <a:p>
+                      <a:pPr>
+                        <a:defRPr sz="1100" b="0"/>
+                      </a:pPr>
+                      <a:r>
+                        <a:t>35.2</a:t>
+                      </a:r>
+                    </a:p>
+                  </a:txBody>
+                  <a:tcPr/>
+                </a:tc>
+                <a:tc>
+                  <a:txBody>
+                    <a:bodyPr/>
+                    <a:lstStyle/>
+                    <a:p>
+                      <a:pPr>
+                        <a:defRPr sz="1100" b="0"/>
+                      </a:pPr>
+                      <a:r>
+                        <a:t>509</a:t>
+                      </a:r>
+                    </a:p>
+                  </a:txBody>
+                  <a:tcPr/>
+                </a:tc>
+                <a:tc>
+                  <a:txBody>
+                    <a:bodyPr/>
+                    <a:lstStyle/>
+                    <a:p>
+                      <a:pPr>
+                        <a:defRPr sz="1100" b="0"/>
+                      </a:pPr>
+                      <a:r>
+                        <a:t>516.8</a:t>
+                      </a:r>
+                    </a:p>
+                  </a:txBody>
+                  <a:tcPr/>
+                </a:tc>
+                <a:tc>
+                  <a:txBody>
+                    <a:bodyPr/>
+                    <a:lstStyle/>
+                    <a:p>
+                      <a:pPr>
+                        <a:defRPr sz="1100" b="0"/>
+                      </a:pPr>
+                      <a:r>
+                        <a:t>0.4</a:t>
+                      </a:r>
+                    </a:p>
+                  </a:txBody>
+                  <a:tcPr/>
+                </a:tc>
+                <a:tc>
+                  <a:txBody>
+                    <a:bodyPr/>
+                    <a:lstStyle/>
+                    <a:p>
+                      <a:pPr>
+                        <a:defRPr sz="1100" b="0"/>
+                      </a:pPr>
+                      <a:r>
+                        <a:t>1.00</a:t>
+                      </a:r>
+                    </a:p>
+                  </a:txBody>
+                  <a:tcPr/>
+                </a:tc>
+                <a:tc>
+                  <a:txBody>
+                    <a:bodyPr/>
+                    <a:lstStyle/>
+                    <a:p>
+                      <a:pPr>
+                        <a:defRPr sz="1100" b="0"/>
+                      </a:pPr>
+                      <a:r>
+                        <a:t>27.58</a:t>
+                      </a:r>
+                    </a:p>
+                  </a:txBody>
+                  <a:tcPr/>
+                </a:tc>
+              </a:tr>
+              <a:tr h="384048">
+                <a:tc>
+                  <a:txBody>
+                    <a:bodyPr/>
+                    <a:lstStyle/>
+                    <a:p>
+                      <a:pPr>
+                        <a:defRPr sz="1100" b="0"/>
+                      </a:pPr>
+                      <a:r>
+                        <a:t>col_11</a:t>
+                      </a:r>
+                    </a:p>
+                  </a:txBody>
+                  <a:tcPr/>
+                </a:tc>
+                <a:tc>
+                  <a:txBody>
+                    <a:bodyPr/>
+                    <a:lstStyle/>
+                    <a:p>
+                      <a:pPr>
+                        <a:defRPr sz="1100" b="0"/>
+                      </a:pPr>
+                      <a:r>
+                        <a:t>1485</a:t>
+                      </a:r>
+                    </a:p>
+                  </a:txBody>
+                  <a:tcPr/>
+                </a:tc>
+                <a:tc>
+                  <a:txBody>
+                    <a:bodyPr/>
+                    <a:lstStyle/>
+                    <a:p>
+                      <a:pPr>
+                        <a:defRPr sz="1100" b="0"/>
+                      </a:pPr>
+                      <a:r>
+                        <a:t>sandy loam</a:t>
+                      </a:r>
+                    </a:p>
+                  </a:txBody>
+                  <a:tcPr/>
+                </a:tc>
+                <a:tc>
+                  <a:txBody>
+                    <a:bodyPr/>
+                    <a:lstStyle/>
+                    <a:p>
+                      <a:pPr>
+                        <a:defRPr sz="1100" b="0"/>
+                      </a:pPr>
+                      <a:r>
+                        <a:t>8</a:t>
+                      </a:r>
+                    </a:p>
+                  </a:txBody>
+                  <a:tcPr/>
+                </a:tc>
+                <a:tc>
+                  <a:txBody>
+                    <a:bodyPr/>
+                    <a:lstStyle/>
+                    <a:p>
+                      <a:pPr>
+                        <a:defRPr sz="1100" b="0"/>
+                      </a:pPr>
+                      <a:r>
+                        <a:t>9.0</a:t>
+                      </a:r>
+                    </a:p>
+                  </a:txBody>
+                  <a:tcPr/>
+                </a:tc>
+                <a:tc>
+                  <a:txBody>
+                    <a:bodyPr/>
+                    <a:lstStyle/>
+                    <a:p>
+                      <a:pPr>
+                        <a:defRPr sz="1100" b="0"/>
+                      </a:pPr>
+                      <a:r>
+                        <a:t>0.2</a:t>
+                      </a:r>
+                    </a:p>
+                  </a:txBody>
+                  <a:tcPr/>
+                </a:tc>
+                <a:tc>
+                  <a:txBody>
+                    <a:bodyPr/>
+                    <a:lstStyle/>
+                    <a:p>
+                      <a:pPr>
+                        <a:defRPr sz="1100" b="0"/>
+                      </a:pPr>
+                      <a:r>
+                        <a:t>1580</a:t>
+                      </a:r>
+                    </a:p>
+                  </a:txBody>
+                  <a:tcPr/>
+                </a:tc>
+                <a:tc>
+                  <a:txBody>
+                    <a:bodyPr/>
+                    <a:lstStyle/>
+                    <a:p>
+                      <a:pPr>
+                        <a:defRPr sz="1100" b="0"/>
+                      </a:pPr>
+                      <a:r>
+                        <a:t>863.2</a:t>
+                      </a:r>
+                    </a:p>
+                  </a:txBody>
+                  <a:tcPr/>
+                </a:tc>
+                <a:tc>
+                  <a:txBody>
+                    <a:bodyPr/>
+                    <a:lstStyle/>
+                    <a:p>
+                      <a:pPr>
+                        <a:defRPr sz="1100" b="0"/>
+                      </a:pPr>
+                      <a:r>
+                        <a:t>344.4</a:t>
+                      </a:r>
+                    </a:p>
+                  </a:txBody>
+                  <a:tcPr/>
+                </a:tc>
+                <a:tc>
+                  <a:txBody>
+                    <a:bodyPr/>
+                    <a:lstStyle/>
+                    <a:p>
+                      <a:pPr>
+                        <a:defRPr sz="1100" b="0"/>
+                      </a:pPr>
+                      <a:r>
+                        <a:t>0.71</a:t>
+                      </a:r>
+                    </a:p>
+                  </a:txBody>
+                  <a:tcPr/>
+                </a:tc>
+                <a:tc>
+                  <a:txBody>
+                    <a:bodyPr/>
+                    <a:lstStyle/>
+                    <a:p>
+                      <a:pPr>
+                        <a:defRPr sz="1100" b="0"/>
+                      </a:pPr>
+                      <a:r>
+                        <a:t>3.56</a:t>
+                      </a:r>
+                    </a:p>
+                  </a:txBody>
+                  <a:tcPr/>
+                </a:tc>
+              </a:tr>
+              <a:tr h="384048">
+                <a:tc>
+                  <a:txBody>
+                    <a:bodyPr/>
+                    <a:lstStyle/>
+                    <a:p>
+                      <a:pPr>
+                        <a:defRPr sz="1100" b="0"/>
+                      </a:pPr>
+                      <a:r>
+                        <a:t>col_18</a:t>
+                      </a:r>
+                    </a:p>
+                  </a:txBody>
+                  <a:tcPr/>
+                </a:tc>
+                <a:tc>
+                  <a:txBody>
+                    <a:bodyPr/>
+                    <a:lstStyle/>
+                    <a:p>
+                      <a:pPr>
+                        <a:defRPr sz="1100" b="0"/>
+                      </a:pPr>
+                      <a:r>
+                        <a:t>1564</a:t>
+                      </a:r>
+                    </a:p>
+                  </a:txBody>
+                  <a:tcPr/>
+                </a:tc>
+                <a:tc>
+                  <a:txBody>
+                    <a:bodyPr/>
+                    <a:lstStyle/>
+                    <a:p>
+                      <a:pPr>
+                        <a:defRPr sz="1100" b="0"/>
+                      </a:pPr>
+                      <a:r>
+                        <a:t>loam</a:t>
+                      </a:r>
+                    </a:p>
+                  </a:txBody>
+                  <a:tcPr/>
+                </a:tc>
+                <a:tc>
+                  <a:txBody>
+                    <a:bodyPr/>
+                    <a:lstStyle/>
+                    <a:p>
+                      <a:pPr>
+                        <a:defRPr sz="1100" b="0"/>
+                      </a:pPr>
+                      <a:r>
+                        <a:t>21</a:t>
+                      </a:r>
+                    </a:p>
+                  </a:txBody>
+                  <a:tcPr/>
+                </a:tc>
+                <a:tc>
+                  <a:txBody>
+                    <a:bodyPr/>
+                    <a:lstStyle/>
+                    <a:p>
+                      <a:pPr>
+                        <a:defRPr sz="1100" b="0"/>
+                      </a:pPr>
+                      <a:r>
+                        <a:t>9.0</a:t>
+                      </a:r>
+                    </a:p>
+                  </a:txBody>
+                  <a:tcPr/>
+                </a:tc>
+                <a:tc>
+                  <a:txBody>
+                    <a:bodyPr/>
+                    <a:lstStyle/>
+                    <a:p>
+                      <a:pPr>
+                        <a:defRPr sz="1100" b="0"/>
+                      </a:pPr>
+                      <a:r>
+                        <a:t>62.7</a:t>
+                      </a:r>
+                    </a:p>
+                  </a:txBody>
+                  <a:tcPr/>
+                </a:tc>
+                <a:tc>
+                  <a:txBody>
+                    <a:bodyPr/>
+                    <a:lstStyle/>
+                    <a:p>
+                      <a:pPr>
+                        <a:defRPr sz="1100" b="0"/>
+                      </a:pPr>
+                      <a:r>
+                        <a:t>682</a:t>
+                      </a:r>
+                    </a:p>
+                  </a:txBody>
+                  <a:tcPr/>
+                </a:tc>
+                <a:tc>
+                  <a:txBody>
+                    <a:bodyPr/>
+                    <a:lstStyle/>
+                    <a:p>
+                      <a:pPr>
+                        <a:defRPr sz="1100" b="0"/>
+                      </a:pPr>
+                      <a:r>
+                        <a:t>634.9</a:t>
+                      </a:r>
+                    </a:p>
+                  </a:txBody>
+                  <a:tcPr/>
+                </a:tc>
+                <a:tc>
+                  <a:txBody>
+                    <a:bodyPr/>
+                    <a:lstStyle/>
+                    <a:p>
+                      <a:pPr>
+                        <a:defRPr sz="1100" b="0"/>
+                      </a:pPr>
+                      <a:r>
+                        <a:t>0.4</a:t>
+                      </a:r>
+                    </a:p>
+                  </a:txBody>
+                  <a:tcPr/>
+                </a:tc>
+                <a:tc>
+                  <a:txBody>
+                    <a:bodyPr/>
+                    <a:lstStyle/>
+                    <a:p>
+                      <a:pPr>
+                        <a:defRPr sz="1100" b="0"/>
+                      </a:pPr>
+                      <a:r>
+                        <a:t>1.00</a:t>
+                      </a:r>
+                    </a:p>
+                  </a:txBody>
+                  <a:tcPr/>
+                </a:tc>
+                <a:tc>
+                  <a:txBody>
+                    <a:bodyPr/>
+                    <a:lstStyle/>
+                    <a:p>
+                      <a:pPr>
+                        <a:defRPr sz="1100" b="0"/>
+                      </a:pPr>
+                      <a:r>
+                        <a:t>27.50</a:t>
+                      </a:r>
+                    </a:p>
+                  </a:txBody>
+                  <a:tcPr/>
+                </a:tc>
+              </a:tr>
+              <a:tr h="384048">
+                <a:tc>
+                  <a:txBody>
+                    <a:bodyPr/>
+                    <a:lstStyle/>
+                    <a:p>
+                      <a:pPr>
+                        <a:defRPr sz="1100" b="0"/>
+                      </a:pPr>
+                      <a:r>
+                        <a:t>col_16</a:t>
+                      </a:r>
+                    </a:p>
+                  </a:txBody>
+                  <a:tcPr/>
+                </a:tc>
+                <a:tc>
+                  <a:txBody>
+                    <a:bodyPr/>
+                    <a:lstStyle/>
+                    <a:p>
+                      <a:pPr>
+                        <a:defRPr sz="1100" b="0"/>
+                      </a:pPr>
+                      <a:r>
+                        <a:t>1578</a:t>
+                      </a:r>
+                    </a:p>
+                  </a:txBody>
+                  <a:tcPr/>
+                </a:tc>
+                <a:tc>
+                  <a:txBody>
+                    <a:bodyPr/>
+                    <a:lstStyle/>
+                    <a:p>
+                      <a:pPr>
+                        <a:defRPr sz="1100" b="0"/>
+                      </a:pPr>
+                      <a:r>
+                        <a:t>sandy loam</a:t>
+                      </a:r>
+                    </a:p>
+                  </a:txBody>
+                  <a:tcPr/>
+                </a:tc>
+                <a:tc>
+                  <a:txBody>
+                    <a:bodyPr/>
+                    <a:lstStyle/>
+                    <a:p>
+                      <a:pPr>
+                        <a:defRPr sz="1100" b="0"/>
+                      </a:pPr>
+                      <a:r>
+                        <a:t>8</a:t>
+                      </a:r>
+                    </a:p>
+                  </a:txBody>
+                  <a:tcPr/>
+                </a:tc>
+                <a:tc>
+                  <a:txBody>
+                    <a:bodyPr/>
+                    <a:lstStyle/>
+                    <a:p>
+                      <a:pPr>
+                        <a:defRPr sz="1100" b="0"/>
+                      </a:pPr>
+                      <a:r>
+                        <a:t>9.0</a:t>
+                      </a:r>
+                    </a:p>
+                  </a:txBody>
+                  <a:tcPr/>
+                </a:tc>
+                <a:tc>
+                  <a:txBody>
+                    <a:bodyPr/>
+                    <a:lstStyle/>
+                    <a:p>
+                      <a:pPr>
+                        <a:defRPr sz="1100" b="0"/>
+                      </a:pPr>
+                      <a:r>
+                        <a:t>145.0</a:t>
+                      </a:r>
+                    </a:p>
+                  </a:txBody>
+                  <a:tcPr/>
+                </a:tc>
+                <a:tc>
+                  <a:txBody>
+                    <a:bodyPr/>
+                    <a:lstStyle/>
+                    <a:p>
+                      <a:pPr>
+                        <a:defRPr sz="1100" b="0"/>
+                      </a:pPr>
+                      <a:r>
+                        <a:t>941</a:t>
+                      </a:r>
+                    </a:p>
+                  </a:txBody>
+                  <a:tcPr/>
+                </a:tc>
+                <a:tc>
+                  <a:txBody>
+                    <a:bodyPr/>
+                    <a:lstStyle/>
+                    <a:p>
+                      <a:pPr>
+                        <a:defRPr sz="1100" b="0"/>
+                      </a:pPr>
+                      <a:r>
+                        <a:t>1298.8</a:t>
+                      </a:r>
+                    </a:p>
+                  </a:txBody>
+                  <a:tcPr/>
+                </a:tc>
+                <a:tc>
+                  <a:txBody>
+                    <a:bodyPr/>
+                    <a:lstStyle/>
+                    <a:p>
+                      <a:pPr>
+                        <a:defRPr sz="1100" b="0"/>
+                      </a:pPr>
+                      <a:r>
+                        <a:t>0.9</a:t>
+                      </a:r>
+                    </a:p>
+                  </a:txBody>
+                  <a:tcPr/>
+                </a:tc>
+                <a:tc>
+                  <a:txBody>
+                    <a:bodyPr/>
+                    <a:lstStyle/>
+                    <a:p>
+                      <a:pPr>
+                        <a:defRPr sz="1100" b="0"/>
+                      </a:pPr>
+                      <a:r>
+                        <a:t>1.00</a:t>
+                      </a:r>
+                    </a:p>
+                  </a:txBody>
+                  <a:tcPr/>
+                </a:tc>
+                <a:tc>
+                  <a:txBody>
+                    <a:bodyPr/>
+                    <a:lstStyle/>
+                    <a:p>
+                      <a:pPr>
+                        <a:defRPr sz="1100" b="0"/>
+                      </a:pPr>
+                      <a:r>
+                        <a:t>26.38</a:t>
+                      </a:r>
+                    </a:p>
+                  </a:txBody>
+                  <a:tcPr/>
+                </a:tc>
+              </a:tr>
+              <a:tr h="384048">
+                <a:tc>
+                  <a:txBody>
+                    <a:bodyPr/>
+                    <a:lstStyle/>
+                    <a:p>
+                      <a:pPr>
+                        <a:defRPr sz="1100" b="0"/>
+                      </a:pPr>
+                      <a:r>
+                        <a:t>col_20</a:t>
+                      </a:r>
+                    </a:p>
+                  </a:txBody>
+                  <a:tcPr/>
+                </a:tc>
+                <a:tc>
+                  <a:txBody>
+                    <a:bodyPr/>
+                    <a:lstStyle/>
+                    <a:p>
+                      <a:pPr>
+                        <a:defRPr sz="1100" b="0"/>
+                      </a:pPr>
+                      <a:r>
+                        <a:t>1617</a:t>
+                      </a:r>
+                    </a:p>
+                  </a:txBody>
+                  <a:tcPr/>
+                </a:tc>
+                <a:tc>
+                  <a:txBody>
+                    <a:bodyPr/>
+                    <a:lstStyle/>
+                    <a:p>
+                      <a:pPr>
+                        <a:defRPr sz="1100" b="0"/>
+                      </a:pPr>
+                      <a:r>
+                        <a:t>loam</a:t>
+                      </a:r>
+                    </a:p>
+                  </a:txBody>
+                  <a:tcPr/>
+                </a:tc>
+                <a:tc>
+                  <a:txBody>
+                    <a:bodyPr/>
+                    <a:lstStyle/>
+                    <a:p>
+                      <a:pPr>
+                        <a:defRPr sz="1100" b="0"/>
+                      </a:pPr>
+                      <a:r>
+                        <a:t>20</a:t>
+                      </a:r>
+                    </a:p>
+                  </a:txBody>
+                  <a:tcPr/>
+                </a:tc>
+                <a:tc>
+                  <a:txBody>
+                    <a:bodyPr/>
+                    <a:lstStyle/>
+                    <a:p>
+                      <a:pPr>
+                        <a:defRPr sz="1100" b="0"/>
+                      </a:pPr>
+                      <a:r>
+                        <a:t>—</a:t>
+                      </a:r>
+                    </a:p>
+                  </a:txBody>
+                  <a:tcPr/>
+                </a:tc>
+                <a:tc>
+                  <a:txBody>
+                    <a:bodyPr/>
+                    <a:lstStyle/>
+                    <a:p>
+                      <a:pPr>
+                        <a:defRPr sz="1100" b="0"/>
+                      </a:pPr>
+                      <a:r>
+                        <a:t>195.5</a:t>
+                      </a:r>
+                    </a:p>
+                  </a:txBody>
+                  <a:tcPr/>
+                </a:tc>
+                <a:tc>
+                  <a:txBody>
+                    <a:bodyPr/>
+                    <a:lstStyle/>
+                    <a:p>
+                      <a:pPr>
+                        <a:defRPr sz="1100" b="0"/>
+                      </a:pPr>
+                      <a:r>
+                        <a:t>619</a:t>
+                      </a:r>
+                    </a:p>
+                  </a:txBody>
+                  <a:tcPr/>
+                </a:tc>
+                <a:tc>
+                  <a:txBody>
+                    <a:bodyPr/>
+                    <a:lstStyle/>
+                    <a:p>
+                      <a:pPr>
+                        <a:defRPr sz="1100" b="0"/>
+                      </a:pPr>
+                      <a:r>
+                        <a:t>722.6</a:t>
+                      </a:r>
+                    </a:p>
+                  </a:txBody>
+                  <a:tcPr/>
+                </a:tc>
+                <a:tc>
+                  <a:txBody>
+                    <a:bodyPr/>
+                    <a:lstStyle/>
+                    <a:p>
+                      <a:pPr>
+                        <a:defRPr sz="1100" b="0"/>
+                      </a:pPr>
+                      <a:r>
+                        <a:t>12.4</a:t>
+                      </a:r>
+                    </a:p>
+                  </a:txBody>
+                  <a:tcPr/>
+                </a:tc>
+                <a:tc>
+                  <a:txBody>
+                    <a:bodyPr/>
+                    <a:lstStyle/>
+                    <a:p>
+                      <a:pPr>
+                        <a:defRPr sz="1100" b="0"/>
+                      </a:pPr>
+                      <a:r>
+                        <a:t>0.98</a:t>
+                      </a:r>
+                    </a:p>
+                  </a:txBody>
+                  <a:tcPr/>
+                </a:tc>
+                <a:tc>
+                  <a:txBody>
+                    <a:bodyPr/>
+                    <a:lstStyle/>
+                    <a:p>
+                      <a:pPr>
+                        <a:defRPr sz="1100" b="0"/>
+                      </a:pPr>
+                      <a:r>
+                        <a:t>27.19</a:t>
+                      </a:r>
+                    </a:p>
+                  </a:txBody>
+                  <a:tcPr/>
+                </a:tc>
+              </a:tr>
+              <a:tr h="384048">
+                <a:tc>
+                  <a:txBody>
+                    <a:bodyPr/>
+                    <a:lstStyle/>
+                    <a:p>
+                      <a:pPr>
+                        <a:defRPr sz="1100" b="0"/>
+                      </a:pPr>
+                      <a:r>
+                        <a:t>col_19</a:t>
+                      </a:r>
+                    </a:p>
+                  </a:txBody>
+                  <a:tcPr/>
+                </a:tc>
+                <a:tc>
+                  <a:txBody>
+                    <a:bodyPr/>
+                    <a:lstStyle/>
+                    <a:p>
+                      <a:pPr>
+                        <a:defRPr sz="1100" b="0"/>
+                      </a:pPr>
+                      <a:r>
+                        <a:t>1792</a:t>
+                      </a:r>
+                    </a:p>
+                  </a:txBody>
+                  <a:tcPr/>
+                </a:tc>
+                <a:tc>
+                  <a:txBody>
+                    <a:bodyPr/>
+                    <a:lstStyle/>
+                    <a:p>
+                      <a:pPr>
+                        <a:defRPr sz="1100" b="0"/>
+                      </a:pPr>
+                      <a:r>
+                        <a:t>sandy loam</a:t>
+                      </a:r>
+                    </a:p>
+                  </a:txBody>
+                  <a:tcPr/>
+                </a:tc>
+                <a:tc>
+                  <a:txBody>
+                    <a:bodyPr/>
+                    <a:lstStyle/>
+                    <a:p>
+                      <a:pPr>
+                        <a:defRPr sz="1100" b="0"/>
+                      </a:pPr>
+                      <a:r>
+                        <a:t>20</a:t>
+                      </a:r>
+                    </a:p>
+                  </a:txBody>
+                  <a:tcPr/>
+                </a:tc>
+                <a:tc>
+                  <a:txBody>
+                    <a:bodyPr/>
+                    <a:lstStyle/>
+                    <a:p>
+                      <a:pPr>
+                        <a:defRPr sz="1100" b="0"/>
+                      </a:pPr>
+                      <a:r>
+                        <a:t>9.0</a:t>
+                      </a:r>
+                    </a:p>
+                  </a:txBody>
+                  <a:tcPr/>
+                </a:tc>
+                <a:tc>
+                  <a:txBody>
+                    <a:bodyPr/>
+                    <a:lstStyle/>
+                    <a:p>
+                      <a:pPr>
+                        <a:defRPr sz="1100" b="0"/>
+                      </a:pPr>
+                      <a:r>
+                        <a:t>22.7</a:t>
+                      </a:r>
+                    </a:p>
+                  </a:txBody>
+                  <a:tcPr/>
+                </a:tc>
+                <a:tc>
+                  <a:txBody>
+                    <a:bodyPr/>
+                    <a:lstStyle/>
+                    <a:p>
+                      <a:pPr>
+                        <a:defRPr sz="1100" b="0"/>
+                      </a:pPr>
+                      <a:r>
+                        <a:t>975</a:t>
+                      </a:r>
+                    </a:p>
+                  </a:txBody>
+                  <a:tcPr/>
+                </a:tc>
+                <a:tc>
+                  <a:txBody>
+                    <a:bodyPr/>
+                    <a:lstStyle/>
+                    <a:p>
+                      <a:pPr>
+                        <a:defRPr sz="1100" b="0"/>
+                      </a:pPr>
+                      <a:r>
+                        <a:t>1283.2</a:t>
+                      </a:r>
+                    </a:p>
+                  </a:txBody>
+                  <a:tcPr/>
+                </a:tc>
+                <a:tc>
+                  <a:txBody>
+                    <a:bodyPr/>
+                    <a:lstStyle/>
+                    <a:p>
+                      <a:pPr>
+                        <a:defRPr sz="1100" b="0"/>
+                      </a:pPr>
+                      <a:r>
+                        <a:t>4.1</a:t>
+                      </a:r>
+                    </a:p>
+                  </a:txBody>
+                  <a:tcPr/>
+                </a:tc>
+                <a:tc>
+                  <a:txBody>
+                    <a:bodyPr/>
+                    <a:lstStyle/>
+                    <a:p>
+                      <a:pPr>
+                        <a:defRPr sz="1100" b="0"/>
+                      </a:pPr>
+                      <a:r>
+                        <a:t>1.00</a:t>
+                      </a:r>
+                    </a:p>
+                  </a:txBody>
+                  <a:tcPr/>
+                </a:tc>
+                <a:tc>
+                  <a:txBody>
+                    <a:bodyPr/>
+                    <a:lstStyle/>
+                    <a:p>
+                      <a:pPr>
+                        <a:defRPr sz="1100" b="0"/>
+                      </a:pPr>
+                      <a:r>
+                        <a:t>20.18</a:t>
+                      </a:r>
+                    </a:p>
+                  </a:txBody>
+                  <a:tcPr/>
+                </a:tc>
+              </a:tr>
+              <a:tr h="384048">
+                <a:tc>
+                  <a:txBody>
+                    <a:bodyPr/>
+                    <a:lstStyle/>
+                    <a:p>
+                      <a:pPr>
+                        <a:defRPr sz="1100" b="0"/>
+                      </a:pPr>
+                      <a:r>
+                        <a:t>col_17</a:t>
+                      </a:r>
+                    </a:p>
+                  </a:txBody>
+                  <a:tcPr/>
+                </a:tc>
+                <a:tc>
+                  <a:txBody>
+                    <a:bodyPr/>
+                    <a:lstStyle/>
+                    <a:p>
+                      <a:pPr>
+                        <a:defRPr sz="1100" b="0"/>
+                      </a:pPr>
+                      <a:r>
+                        <a:t>1868</a:t>
+                      </a:r>
+                    </a:p>
+                  </a:txBody>
+                  <a:tcPr/>
+                </a:tc>
+                <a:tc>
+                  <a:txBody>
+                    <a:bodyPr/>
+                    <a:lstStyle/>
+                    <a:p>
+                      <a:pPr>
+                        <a:defRPr sz="1100" b="0"/>
+                      </a:pPr>
+                      <a:r>
+                        <a:t>loam</a:t>
+                      </a:r>
+                    </a:p>
+                  </a:txBody>
+                  <a:tcPr/>
+                </a:tc>
+                <a:tc>
+                  <a:txBody>
+                    <a:bodyPr/>
+                    <a:lstStyle/>
+                    <a:p>
+                      <a:pPr>
+                        <a:defRPr sz="1100" b="0"/>
+                      </a:pPr>
+                      <a:r>
+                        <a:t>20</a:t>
+                      </a:r>
+                    </a:p>
+                  </a:txBody>
+                  <a:tcPr/>
+                </a:tc>
+                <a:tc>
+                  <a:txBody>
+                    <a:bodyPr/>
+                    <a:lstStyle/>
+                    <a:p>
+                      <a:pPr>
+                        <a:defRPr sz="1100" b="0"/>
+                      </a:pPr>
+                      <a:r>
+                        <a:t>28.0</a:t>
+                      </a:r>
+                    </a:p>
+                  </a:txBody>
+                  <a:tcPr/>
+                </a:tc>
+                <a:tc>
+                  <a:txBody>
+                    <a:bodyPr/>
+                    <a:lstStyle/>
+                    <a:p>
+                      <a:pPr>
+                        <a:defRPr sz="1100" b="0"/>
+                      </a:pPr>
+                      <a:r>
+                        <a:t>1.5</a:t>
+                      </a:r>
+                    </a:p>
+                  </a:txBody>
+                  <a:tcPr/>
+                </a:tc>
+                <a:tc>
+                  <a:txBody>
+                    <a:bodyPr/>
+                    <a:lstStyle/>
+                    <a:p>
+                      <a:pPr>
+                        <a:defRPr sz="1100" b="0"/>
+                      </a:pPr>
+                      <a:r>
+                        <a:t>1153</a:t>
+                      </a:r>
+                    </a:p>
+                  </a:txBody>
+                  <a:tcPr/>
+                </a:tc>
+                <a:tc>
+                  <a:txBody>
+                    <a:bodyPr/>
+                    <a:lstStyle/>
+                    <a:p>
+                      <a:pPr>
+                        <a:defRPr sz="1100" b="0"/>
+                      </a:pPr>
+                      <a:r>
+                        <a:t>-5.1</a:t>
+                      </a:r>
+                    </a:p>
+                  </a:txBody>
+                  <a:tcPr/>
+                </a:tc>
+                <a:tc>
+                  <a:txBody>
+                    <a:bodyPr/>
+                    <a:lstStyle/>
+                    <a:p>
+                      <a:pPr>
+                        <a:defRPr sz="1100" b="0"/>
+                      </a:pPr>
+                      <a:r>
+                        <a:t>281.3</a:t>
+                      </a:r>
+                    </a:p>
+                  </a:txBody>
+                  <a:tcPr/>
+                </a:tc>
+                <a:tc>
+                  <a:txBody>
+                    <a:bodyPr/>
+                    <a:lstStyle/>
+                    <a:p>
+                      <a:pPr>
+                        <a:defRPr sz="1100" b="0"/>
+                      </a:pPr>
+                      <a:r>
+                        <a:t>-0.02</a:t>
+                      </a:r>
+                    </a:p>
+                  </a:txBody>
+                  <a:tcPr/>
+                </a:tc>
+                <a:tc>
+                  <a:txBody>
+                    <a:bodyPr/>
+                    <a:lstStyle/>
+                    <a:p>
+                      <a:pPr>
+                        <a:defRPr sz="1100" b="0"/>
+                      </a:pPr>
+                      <a:r>
+                        <a:t>3.78</a:t>
+                      </a:r>
+                    </a:p>
+                  </a:txBody>
+                  <a:tcPr/>
+                </a:tc>
+              </a:tr>
+            </a:tbl>
+          </a:graphicData>
+        </a:graphic>
+      </p:graphicFrame>
+    </p:spTree>
+  </p:cSld>
+  <p:clrMapOvr>
+    <a:masterClrMapping/>
+  </p:clrMapOvr>
+</p:sld>
+</file>
+
+<file path=ppt/slides/slide29.xml><?xml version="1.0" encoding="utf-8"?>
 <p:sld xmlns:a="http://schemas.openxmlformats.org/drawingml/2006/main" xmlns:p="http://schemas.openxmlformats.org/presentationml/2006/main" xmlns:r="http://schemas.openxmlformats.org/officeDocument/2006/relationships">
   <p:cSld>
     <p:spTree>

--- a/docs/slides/story_20260706.pptx
+++ b/docs/slides/story_20260706.pptx
@@ -3904,8 +3904,8 @@
         </p:blipFill>
         <p:spPr>
           <a:xfrm>
-            <a:off x="2595728" y="1005840"/>
-            <a:ext cx="7000239" cy="4846320"/>
+            <a:off x="1384147" y="1005840"/>
+            <a:ext cx="9423400" cy="4846320"/>
           </a:xfrm>
           <a:prstGeom prst="rect">
             <a:avLst/>
@@ -6076,7 +6076,7 @@
         <p:spPr>
           <a:xfrm>
             <a:off x="1097280" y="1143000"/>
-            <a:ext cx="7528560" cy="5212080"/>
+            <a:ext cx="10134600" cy="5212080"/>
           </a:xfrm>
           <a:prstGeom prst="rect">
             <a:avLst/>
@@ -14524,7 +14524,7 @@
                         <a:defRPr sz="900"/>
                       </a:pPr>
                       <a:r>
-                        <a:t>&gt;cap</a:t>
+                        <a:t>—</a:t>
                       </a:r>
                     </a:p>
                   </a:txBody>
@@ -15744,7 +15744,7 @@
                         <a:defRPr sz="900"/>
                       </a:pPr>
                       <a:r>
-                        <a:t>&gt;cap</a:t>
+                        <a:t>—</a:t>
                       </a:r>
                     </a:p>
                   </a:txBody>
@@ -15866,7 +15866,7 @@
                         <a:defRPr sz="900"/>
                       </a:pPr>
                       <a:r>
-                        <a:t>&gt;cap</a:t>
+                        <a:t>—</a:t>
                       </a:r>
                     </a:p>
                   </a:txBody>
@@ -16354,7 +16354,7 @@
                         <a:defRPr sz="900"/>
                       </a:pPr>
                       <a:r>
-                        <a:t>&gt;cap</a:t>
+                        <a:t>—</a:t>
                       </a:r>
                     </a:p>
                   </a:txBody>
@@ -16476,7 +16476,7 @@
                         <a:defRPr sz="900"/>
                       </a:pPr>
                       <a:r>
-                        <a:t>&gt;cap</a:t>
+                        <a:t>—</a:t>
                       </a:r>
                     </a:p>
                   </a:txBody>
@@ -16598,7 +16598,7 @@
                         <a:defRPr sz="900"/>
                       </a:pPr>
                       <a:r>
-                        <a:t>&gt;cap</a:t>
+                        <a:t>—</a:t>
                       </a:r>
                     </a:p>
                   </a:txBody>
@@ -16970,8 +16970,8 @@
         </p:blipFill>
         <p:spPr>
           <a:xfrm>
-            <a:off x="2595728" y="1005840"/>
-            <a:ext cx="7000239" cy="4846320"/>
+            <a:off x="1384147" y="1005840"/>
+            <a:ext cx="9423400" cy="4846320"/>
           </a:xfrm>
           <a:prstGeom prst="rect">
             <a:avLst/>
